--- a/slides-morning/orientation-and-health-ai-foundations.pptx
+++ b/slides-morning/orientation-and-health-ai-foundations.pptx
@@ -30,6 +30,8 @@
     <p:sldId id="278" r:id="rId29"/>
     <p:sldId id="279" r:id="rId30"/>
     <p:sldId id="280" r:id="rId31"/>
+    <p:sldId id="281" r:id="rId32"/>
+    <p:sldId id="282" r:id="rId33"/>
   </p:sldIdLst>
   <p:sldSz cx="12191695" cy="6858000" type="screen4x3"/>
   <p:notesSz cx="6858000" cy="9144000"/>
@@ -3754,7 +3756,7 @@
         <p:spPr>
           <a:xfrm>
             <a:off x="822960" y="1645920"/>
-            <a:ext cx="4114800" cy="411480"/>
+            <a:ext cx="4389120" cy="411480"/>
           </a:xfrm>
           <a:prstGeom prst="roundRect">
             <a:avLst/>
@@ -3820,14 +3822,14 @@
           <a:lstStyle/>
           <a:p>
             <a:pPr>
-              <a:defRPr b="1" sz="3800">
+              <a:defRPr b="1" sz="3600">
                 <a:solidFill>
                   <a:srgbClr val="FFFFFF"/>
                 </a:solidFill>
               </a:defRPr>
             </a:pPr>
             <a:r>
-              <a:t>From HL7 v2 to FHIR R4</a:t>
+              <a:t>OSI Layer 7 &amp; The HL7 Mandate</a:t>
             </a:r>
           </a:p>
           <a:p>
@@ -3835,14 +3837,14 @@
               <a:spcBef>
                 <a:spcPts val="1200"/>
               </a:spcBef>
-              <a:defRPr sz="1700">
+              <a:defRPr sz="1600">
                 <a:solidFill>
                   <a:srgbClr val="94BA33"/>
                 </a:solidFill>
               </a:defRPr>
             </a:pPr>
             <a:r>
-              <a:t>How 35 years of medical IT evolved from 1989 serial delimiters to modern RESTful web APIs</a:t>
+              <a:t>Why networking solved moving packets (Layers 1–4), but healthcare required standardizing Application Meaning (Layer 7)</a:t>
             </a:r>
           </a:p>
         </p:txBody>
@@ -3909,7 +3911,7 @@
               </a:defRPr>
             </a:pPr>
             <a:r>
-              <a:t>In HL7 v2, you find a value by counting pipe delimiters in a line. In FHIR, you query a standardized URI endpoint and parse standard JSON.</a:t>
+              <a:t>In HL7 v2 (1989), you read a lab value by counting pipe delimiters in a line. In FHIR (2014), you query a RESTful URI endpoint and parse standard JSON.</a:t>
             </a:r>
           </a:p>
         </p:txBody>
@@ -4534,7 +4536,7 @@
               </a:defRPr>
             </a:pPr>
             <a:r>
-              <a:t>Why HL7 v2 Broke at Scale: The Integration Debt</a:t>
+              <a:t>Technological Relativity: Why HL7 v2 in 1989</a:t>
             </a:r>
           </a:p>
         </p:txBody>
@@ -4570,7 +4572,7 @@
               </a:defRPr>
             </a:pPr>
             <a:r>
-              <a:t>"When you've seen one HL7 v2 implementation... you've seen ONE implementation."</a:t>
+              <a:t>An engineering triumph for 1989 hardware that accumulated 30 years of Z-segment integration debt</a:t>
             </a:r>
           </a:p>
         </p:txBody>
@@ -4643,12 +4645,12 @@
             <a:pPr algn="ctr">
               <a:defRPr b="1" sz="1600">
                 <a:solidFill>
-                  <a:srgbClr val="C0392B"/>
-                </a:solidFill>
-              </a:defRPr>
-            </a:pPr>
-            <a:r>
-              <a:t>The 'Z-Segment' Trap</a:t>
+                  <a:srgbClr val="285C36"/>
+                </a:solidFill>
+              </a:defRPr>
+            </a:pPr>
+            <a:r>
+              <a:t>The Context of 1989</a:t>
             </a:r>
           </a:p>
           <a:p>
@@ -4663,7 +4665,7 @@
               </a:defRPr>
             </a:pPr>
             <a:r>
-              <a:t>Non-Standard Custom Extensions</a:t>
+              <a:t>Why Not JSON / REST?</a:t>
             </a:r>
           </a:p>
           <a:p>
@@ -4678,7 +4680,7 @@
               </a:defRPr>
             </a:pPr>
             <a:r>
-              <a:t>HL7 v2 was so loosely specified that vendors added proprietary custom segments (ZBE, ZPD, ZAL). A message from Hospital A could not be parsed by Hospital B without bespoke translation code.</a:t>
+              <a:t>The Web didn't exist (HTTP in 1991, JSON in 2001). Hardware was 1–4 MB RAM and 10 Mbps coax. Delimiter-separated ASCII allowed O(1) streaming directly into C buffers over raw TCP sockets without memory bloat.</a:t>
             </a:r>
           </a:p>
         </p:txBody>
@@ -4727,12 +4729,12 @@
             <a:pPr algn="ctr">
               <a:defRPr b="1" sz="1600">
                 <a:solidFill>
-                  <a:srgbClr val="285C36"/>
-                </a:solidFill>
-              </a:defRPr>
-            </a:pPr>
-            <a:r>
-              <a:t>Optionality Chaos</a:t>
+                  <a:srgbClr val="C0392B"/>
+                </a:solidFill>
+              </a:defRPr>
+            </a:pPr>
+            <a:r>
+              <a:t>The 'Z-Segment' Trap</a:t>
             </a:r>
           </a:p>
           <a:p>
@@ -4747,7 +4749,7 @@
               </a:defRPr>
             </a:pPr>
             <a:r>
-              <a:t>No Enforceable Schema</a:t>
+              <a:t>Non-Standard Custom Extensions</a:t>
             </a:r>
           </a:p>
           <a:p>
@@ -4762,7 +4764,7 @@
               </a:defRPr>
             </a:pPr>
             <a:r>
-              <a:t>Nearly every field in HL7 v2 was optional. Fields could be omitted or swapped without violating the specification. Parsers broke unpredictably on minor hospital software updates.</a:t>
+              <a:t>HL7 v2 was so loosely specified that vendors added proprietary custom segments (ZBE, ZPD, ZAL). A message from Hospital A could not be parsed by Hospital B without bespoke translation code.</a:t>
             </a:r>
           </a:p>
         </p:txBody>
@@ -4816,7 +4818,7 @@
               </a:defRPr>
             </a:pPr>
             <a:r>
-              <a:t>No Standard Web API</a:t>
+              <a:t>The Modern Debt</a:t>
             </a:r>
           </a:p>
           <a:p>
@@ -7205,7 +7207,7 @@
               </a:defRPr>
             </a:pPr>
             <a:r>
-              <a:t>The Four Pillars of AI-Readiness in Clinical Data</a:t>
+              <a:t>The New Dilemma: Is FHIR R4 Actually "AI-Ready"?</a:t>
             </a:r>
           </a:p>
         </p:txBody>
@@ -7241,7 +7243,7 @@
               </a:defRPr>
             </a:pPr>
             <a:r>
-              <a:t>Having gigabytes of healthcare records does not make them fit for machine learning</a:t>
+              <a:t>Why transactional healthcare records (OLTP) require four strict pillars to become fit for ML (OLAP)</a:t>
             </a:r>
           </a:p>
         </p:txBody>
@@ -10117,6 +10119,950 @@
 </file>
 
 <file path=ppt/slides/slide25.xml><?xml version="1.0" encoding="utf-8"?>
+<p:sld xmlns:a="http://schemas.openxmlformats.org/drawingml/2006/main" xmlns:p="http://schemas.openxmlformats.org/presentationml/2006/main" xmlns:r="http://schemas.openxmlformats.org/officeDocument/2006/relationships">
+  <p:cSld>
+    <p:spTree>
+      <p:nvGrpSpPr>
+        <p:cNvPr id="1" name=""/>
+        <p:cNvGrpSpPr/>
+        <p:nvPr/>
+      </p:nvGrpSpPr>
+      <p:grpSpPr/>
+      <p:sp>
+        <p:nvSpPr>
+          <p:cNvPr id="2" name="Rectangle 1"/>
+          <p:cNvSpPr/>
+          <p:nvPr/>
+        </p:nvSpPr>
+        <p:spPr>
+          <a:xfrm>
+            <a:off x="0" y="0"/>
+            <a:ext cx="12191695" cy="6858000"/>
+          </a:xfrm>
+          <a:prstGeom prst="rect">
+            <a:avLst/>
+          </a:prstGeom>
+          <a:solidFill>
+            <a:srgbClr val="F5F7F5"/>
+          </a:solidFill>
+          <a:ln>
+            <a:noFill/>
+          </a:ln>
+        </p:spPr>
+        <p:style>
+          <a:lnRef idx="1">
+            <a:schemeClr val="accent1"/>
+          </a:lnRef>
+          <a:fillRef idx="3">
+            <a:schemeClr val="accent1"/>
+          </a:fillRef>
+          <a:effectRef idx="2">
+            <a:schemeClr val="accent1"/>
+          </a:effectRef>
+          <a:fontRef idx="minor">
+            <a:schemeClr val="lt1"/>
+          </a:fontRef>
+        </p:style>
+        <p:txBody>
+          <a:bodyPr rtlCol="0" anchor="ctr"/>
+          <a:lstStyle/>
+          <a:p>
+            <a:pPr algn="ctr"/>
+          </a:p>
+        </p:txBody>
+      </p:sp>
+      <p:sp>
+        <p:nvSpPr>
+          <p:cNvPr id="3" name="TextBox 2"/>
+          <p:cNvSpPr txBox="1"/>
+          <p:nvPr/>
+        </p:nvSpPr>
+        <p:spPr>
+          <a:xfrm>
+            <a:off x="731520" y="365760"/>
+            <a:ext cx="7772400" cy="320040"/>
+          </a:xfrm>
+          <a:prstGeom prst="rect">
+            <a:avLst/>
+          </a:prstGeom>
+          <a:noFill/>
+        </p:spPr>
+        <p:txBody>
+          <a:bodyPr wrap="square" lIns="0" rIns="0" tIns="0" bIns="0">
+            <a:spAutoFit/>
+          </a:bodyPr>
+          <a:lstStyle/>
+          <a:p>
+            <a:pPr>
+              <a:defRPr sz="1000" b="1">
+                <a:solidFill>
+                  <a:srgbClr val="285C36"/>
+                </a:solidFill>
+                <a:latin typeface="Arial"/>
+              </a:defRPr>
+            </a:pPr>
+            <a:r>
+              <a:t>THE GENERATIVE AI ERA</a:t>
+            </a:r>
+          </a:p>
+        </p:txBody>
+      </p:sp>
+      <p:sp>
+        <p:nvSpPr>
+          <p:cNvPr id="4" name="TextBox 3"/>
+          <p:cNvSpPr txBox="1"/>
+          <p:nvPr/>
+        </p:nvSpPr>
+        <p:spPr>
+          <a:xfrm>
+            <a:off x="731520" y="658368"/>
+            <a:ext cx="8961120" cy="594360"/>
+          </a:xfrm>
+          <a:prstGeom prst="rect">
+            <a:avLst/>
+          </a:prstGeom>
+          <a:noFill/>
+        </p:spPr>
+        <p:txBody>
+          <a:bodyPr wrap="square" lIns="0" rIns="0" tIns="0" bIns="0">
+            <a:spAutoFit/>
+          </a:bodyPr>
+          <a:lstStyle/>
+          <a:p>
+            <a:pPr>
+              <a:defRPr sz="2100" b="1">
+                <a:solidFill>
+                  <a:srgbClr val="1B3E24"/>
+                </a:solidFill>
+                <a:latin typeface="Arial"/>
+              </a:defRPr>
+            </a:pPr>
+            <a:r>
+              <a:t>LLMs, Clinical Agents &amp; Context Formats</a:t>
+            </a:r>
+          </a:p>
+        </p:txBody>
+      </p:sp>
+      <p:sp>
+        <p:nvSpPr>
+          <p:cNvPr id="5" name="TextBox 4"/>
+          <p:cNvSpPr txBox="1"/>
+          <p:nvPr/>
+        </p:nvSpPr>
+        <p:spPr>
+          <a:xfrm>
+            <a:off x="731520" y="1261872"/>
+            <a:ext cx="9144000" cy="365760"/>
+          </a:xfrm>
+          <a:prstGeom prst="rect">
+            <a:avLst/>
+          </a:prstGeom>
+          <a:noFill/>
+        </p:spPr>
+        <p:txBody>
+          <a:bodyPr wrap="square" lIns="0" rIns="0" tIns="0" bIns="0">
+            <a:spAutoFit/>
+          </a:bodyPr>
+          <a:lstStyle/>
+          <a:p>
+            <a:pPr>
+              <a:defRPr sz="1200">
+                <a:solidFill>
+                  <a:srgbClr val="526458"/>
+                </a:solidFill>
+                <a:latin typeface="Arial"/>
+              </a:defRPr>
+            </a:pPr>
+            <a:r>
+              <a:t>Why modern clinical AI assistants consume Markdown, RAG, and MCP rather than raw FHIR JSON</a:t>
+            </a:r>
+          </a:p>
+        </p:txBody>
+      </p:sp>
+      <p:pic>
+        <p:nvPicPr>
+          <p:cNvPr id="6" name="Picture 5" descr="ait_logo.png"/>
+          <p:cNvPicPr>
+            <a:picLocks noChangeAspect="1"/>
+          </p:cNvPicPr>
+          <p:nvPr/>
+        </p:nvPicPr>
+        <p:blipFill>
+          <a:blip r:embed="rId2"/>
+          <a:stretch>
+            <a:fillRect/>
+          </a:stretch>
+        </p:blipFill>
+        <p:spPr>
+          <a:xfrm>
+            <a:off x="10149840" y="411480"/>
+            <a:ext cx="1371600" cy="293914"/>
+          </a:xfrm>
+          <a:prstGeom prst="rect">
+            <a:avLst/>
+          </a:prstGeom>
+        </p:spPr>
+      </p:pic>
+      <p:sp>
+        <p:nvSpPr>
+          <p:cNvPr id="7" name="Rounded Rectangle 6"/>
+          <p:cNvSpPr/>
+          <p:nvPr/>
+        </p:nvSpPr>
+        <p:spPr>
+          <a:xfrm>
+            <a:off x="731520" y="1828800"/>
+            <a:ext cx="3429000" cy="4297680"/>
+          </a:xfrm>
+          <a:prstGeom prst="roundRect">
+            <a:avLst/>
+          </a:prstGeom>
+          <a:solidFill>
+            <a:srgbClr val="FFFFFF"/>
+          </a:solidFill>
+          <a:ln w="15240">
+            <a:solidFill>
+              <a:srgbClr val="D2DCD4"/>
+            </a:solidFill>
+          </a:ln>
+        </p:spPr>
+        <p:style>
+          <a:lnRef idx="1">
+            <a:schemeClr val="accent1"/>
+          </a:lnRef>
+          <a:fillRef idx="3">
+            <a:schemeClr val="accent1"/>
+          </a:fillRef>
+          <a:effectRef idx="2">
+            <a:schemeClr val="accent1"/>
+          </a:effectRef>
+          <a:fontRef idx="minor">
+            <a:schemeClr val="lt1"/>
+          </a:fontRef>
+        </p:style>
+        <p:txBody>
+          <a:bodyPr rtlCol="0" anchor="ctr" lIns="274320" rIns="274320" tIns="274320"/>
+          <a:lstStyle/>
+          <a:p>
+            <a:pPr algn="ctr">
+              <a:defRPr b="1" sz="1600">
+                <a:solidFill>
+                  <a:srgbClr val="C0392B"/>
+                </a:solidFill>
+              </a:defRPr>
+            </a:pPr>
+            <a:r>
+              <a:t>The Token Bloat Trap</a:t>
+            </a:r>
+          </a:p>
+          <a:p>
+            <a:pPr>
+              <a:spcBef>
+                <a:spcPts val="400"/>
+              </a:spcBef>
+              <a:defRPr b="1" sz="1100">
+                <a:solidFill>
+                  <a:srgbClr val="1B3E24"/>
+                </a:solidFill>
+              </a:defRPr>
+            </a:pPr>
+            <a:r>
+              <a:t>Raw FHIR in LLM Contexts</a:t>
+            </a:r>
+          </a:p>
+          <a:p>
+            <a:pPr>
+              <a:spcBef>
+                <a:spcPts val="1000"/>
+              </a:spcBef>
+              <a:defRPr sz="1050">
+                <a:solidFill>
+                  <a:srgbClr val="142118"/>
+                </a:solidFill>
+              </a:defRPr>
+            </a:pPr>
+            <a:r>
+              <a:t>A single FHIR Observation consumes 300–500 tokens of nested schema boilerplate (`resourceType`, `system`, `coding`).</a:t>
+            </a:r>
+            <a:br/>
+            <a:br/>
+            <a:r>
+              <a:t>Dumping an entire patient chart burns 50,000+ tokens, diluting clinical signal and increasing hallucination risks.</a:t>
+            </a:r>
+          </a:p>
+        </p:txBody>
+      </p:sp>
+      <p:sp>
+        <p:nvSpPr>
+          <p:cNvPr id="8" name="Rounded Rectangle 7"/>
+          <p:cNvSpPr/>
+          <p:nvPr/>
+        </p:nvSpPr>
+        <p:spPr>
+          <a:xfrm>
+            <a:off x="4343400" y="1828800"/>
+            <a:ext cx="3429000" cy="4297680"/>
+          </a:xfrm>
+          <a:prstGeom prst="roundRect">
+            <a:avLst/>
+          </a:prstGeom>
+          <a:solidFill>
+            <a:srgbClr val="FFFFFF"/>
+          </a:solidFill>
+          <a:ln w="15240">
+            <a:solidFill>
+              <a:srgbClr val="D2DCD4"/>
+            </a:solidFill>
+          </a:ln>
+        </p:spPr>
+        <p:style>
+          <a:lnRef idx="1">
+            <a:schemeClr val="accent1"/>
+          </a:lnRef>
+          <a:fillRef idx="3">
+            <a:schemeClr val="accent1"/>
+          </a:fillRef>
+          <a:effectRef idx="2">
+            <a:schemeClr val="accent1"/>
+          </a:effectRef>
+          <a:fontRef idx="minor">
+            <a:schemeClr val="lt1"/>
+          </a:fontRef>
+        </p:style>
+        <p:txBody>
+          <a:bodyPr rtlCol="0" anchor="ctr" lIns="274320" rIns="274320" tIns="274320"/>
+          <a:lstStyle/>
+          <a:p>
+            <a:pPr algn="ctr">
+              <a:defRPr b="1" sz="1600">
+                <a:solidFill>
+                  <a:srgbClr val="285C36"/>
+                </a:solidFill>
+              </a:defRPr>
+            </a:pPr>
+            <a:r>
+              <a:t>Emerging Context Formats</a:t>
+            </a:r>
+          </a:p>
+          <a:p>
+            <a:pPr>
+              <a:spcBef>
+                <a:spcPts val="400"/>
+              </a:spcBef>
+              <a:defRPr b="1" sz="1100">
+                <a:solidFill>
+                  <a:srgbClr val="1B3E24"/>
+                </a:solidFill>
+              </a:defRPr>
+            </a:pPr>
+            <a:r>
+              <a:t>Markdown &amp; Vector RAG</a:t>
+            </a:r>
+          </a:p>
+          <a:p>
+            <a:pPr>
+              <a:spcBef>
+                <a:spcPts val="1000"/>
+              </a:spcBef>
+              <a:defRPr sz="1050">
+                <a:solidFill>
+                  <a:srgbClr val="142118"/>
+                </a:solidFill>
+              </a:defRPr>
+            </a:pPr>
+            <a:r>
+              <a:t>• Markdown (.md): Transforming FHIR JSON into clean markdown tables reduces token overhead by 60–75% while boosting LLM reasoning.</a:t>
+            </a:r>
+            <a:br/>
+            <a:br/>
+            <a:r>
+              <a:t>• Clinical RAG: Semantic search over vector databases (e.g. pgvector, Chroma) retrieves relevant clinical notes and guidelines.</a:t>
+            </a:r>
+          </a:p>
+        </p:txBody>
+      </p:sp>
+      <p:sp>
+        <p:nvSpPr>
+          <p:cNvPr id="9" name="Rounded Rectangle 8"/>
+          <p:cNvSpPr/>
+          <p:nvPr/>
+        </p:nvSpPr>
+        <p:spPr>
+          <a:xfrm>
+            <a:off x="7955280" y="1828800"/>
+            <a:ext cx="3429000" cy="4297680"/>
+          </a:xfrm>
+          <a:prstGeom prst="roundRect">
+            <a:avLst/>
+          </a:prstGeom>
+          <a:solidFill>
+            <a:srgbClr val="FFFFFF"/>
+          </a:solidFill>
+          <a:ln w="15240">
+            <a:solidFill>
+              <a:srgbClr val="D2DCD4"/>
+            </a:solidFill>
+          </a:ln>
+        </p:spPr>
+        <p:style>
+          <a:lnRef idx="1">
+            <a:schemeClr val="accent1"/>
+          </a:lnRef>
+          <a:fillRef idx="3">
+            <a:schemeClr val="accent1"/>
+          </a:fillRef>
+          <a:effectRef idx="2">
+            <a:schemeClr val="accent1"/>
+          </a:effectRef>
+          <a:fontRef idx="minor">
+            <a:schemeClr val="lt1"/>
+          </a:fontRef>
+        </p:style>
+        <p:txBody>
+          <a:bodyPr rtlCol="0" anchor="ctr" lIns="274320" rIns="274320" tIns="274320"/>
+          <a:lstStyle/>
+          <a:p>
+            <a:pPr algn="ctr">
+              <a:defRPr b="1" sz="1600">
+                <a:solidFill>
+                  <a:srgbClr val="94BA33"/>
+                </a:solidFill>
+              </a:defRPr>
+            </a:pPr>
+            <a:r>
+              <a:t>Agentic Tool-Calling</a:t>
+            </a:r>
+          </a:p>
+          <a:p>
+            <a:pPr>
+              <a:spcBef>
+                <a:spcPts val="400"/>
+              </a:spcBef>
+              <a:defRPr b="1" sz="1100">
+                <a:solidFill>
+                  <a:srgbClr val="1B3E24"/>
+                </a:solidFill>
+              </a:defRPr>
+            </a:pPr>
+            <a:r>
+              <a:t>Model Context Protocol (MCP)</a:t>
+            </a:r>
+          </a:p>
+          <a:p>
+            <a:pPr>
+              <a:spcBef>
+                <a:spcPts val="1000"/>
+              </a:spcBef>
+              <a:defRPr sz="1050">
+                <a:solidFill>
+                  <a:srgbClr val="142118"/>
+                </a:solidFill>
+              </a:defRPr>
+            </a:pPr>
+            <a:r>
+              <a:t>Instead of large prompt dumps, autonomous clinical agents query structured tools on-demand:</a:t>
+            </a:r>
+            <a:br/>
+            <a:br/>
+            <a:r>
+              <a:t>• get_patient_labs(id, 'glucose')</a:t>
+            </a:r>
+            <a:br/>
+            <a:r>
+              <a:t>• check_drug_interaction(rx_a, rx_b)</a:t>
+            </a:r>
+            <a:br/>
+            <a:br/>
+            <a:r>
+              <a:t>Ensures scoped, auditable, and deterministic tool execution.</a:t>
+            </a:r>
+          </a:p>
+        </p:txBody>
+      </p:sp>
+    </p:spTree>
+  </p:cSld>
+  <p:clrMapOvr>
+    <a:masterClrMapping/>
+  </p:clrMapOvr>
+</p:sld>
+</file>
+
+<file path=ppt/slides/slide26.xml><?xml version="1.0" encoding="utf-8"?>
+<p:sld xmlns:a="http://schemas.openxmlformats.org/drawingml/2006/main" xmlns:p="http://schemas.openxmlformats.org/presentationml/2006/main" xmlns:r="http://schemas.openxmlformats.org/officeDocument/2006/relationships">
+  <p:cSld>
+    <p:spTree>
+      <p:nvGrpSpPr>
+        <p:cNvPr id="1" name=""/>
+        <p:cNvGrpSpPr/>
+        <p:nvPr/>
+      </p:nvGrpSpPr>
+      <p:grpSpPr/>
+      <p:sp>
+        <p:nvSpPr>
+          <p:cNvPr id="2" name="Rectangle 1"/>
+          <p:cNvSpPr/>
+          <p:nvPr/>
+        </p:nvSpPr>
+        <p:spPr>
+          <a:xfrm>
+            <a:off x="0" y="0"/>
+            <a:ext cx="12191695" cy="6858000"/>
+          </a:xfrm>
+          <a:prstGeom prst="rect">
+            <a:avLst/>
+          </a:prstGeom>
+          <a:solidFill>
+            <a:srgbClr val="F5F7F5"/>
+          </a:solidFill>
+          <a:ln>
+            <a:noFill/>
+          </a:ln>
+        </p:spPr>
+        <p:style>
+          <a:lnRef idx="1">
+            <a:schemeClr val="accent1"/>
+          </a:lnRef>
+          <a:fillRef idx="3">
+            <a:schemeClr val="accent1"/>
+          </a:fillRef>
+          <a:effectRef idx="2">
+            <a:schemeClr val="accent1"/>
+          </a:effectRef>
+          <a:fontRef idx="minor">
+            <a:schemeClr val="lt1"/>
+          </a:fontRef>
+        </p:style>
+        <p:txBody>
+          <a:bodyPr rtlCol="0" anchor="ctr"/>
+          <a:lstStyle/>
+          <a:p>
+            <a:pPr algn="ctr"/>
+          </a:p>
+        </p:txBody>
+      </p:sp>
+      <p:sp>
+        <p:nvSpPr>
+          <p:cNvPr id="3" name="TextBox 2"/>
+          <p:cNvSpPr txBox="1"/>
+          <p:nvPr/>
+        </p:nvSpPr>
+        <p:spPr>
+          <a:xfrm>
+            <a:off x="731520" y="365760"/>
+            <a:ext cx="7772400" cy="320040"/>
+          </a:xfrm>
+          <a:prstGeom prst="rect">
+            <a:avLst/>
+          </a:prstGeom>
+          <a:noFill/>
+        </p:spPr>
+        <p:txBody>
+          <a:bodyPr wrap="square" lIns="0" rIns="0" tIns="0" bIns="0">
+            <a:spAutoFit/>
+          </a:bodyPr>
+          <a:lstStyle/>
+          <a:p>
+            <a:pPr>
+              <a:defRPr sz="1000" b="1">
+                <a:solidFill>
+                  <a:srgbClr val="285C36"/>
+                </a:solidFill>
+                <a:latin typeface="Arial"/>
+              </a:defRPr>
+            </a:pPr>
+            <a:r>
+              <a:t>THE NEXT EVOLUTION</a:t>
+            </a:r>
+          </a:p>
+        </p:txBody>
+      </p:sp>
+      <p:sp>
+        <p:nvSpPr>
+          <p:cNvPr id="4" name="TextBox 3"/>
+          <p:cNvSpPr txBox="1"/>
+          <p:nvPr/>
+        </p:nvSpPr>
+        <p:spPr>
+          <a:xfrm>
+            <a:off x="731520" y="658368"/>
+            <a:ext cx="8961120" cy="594360"/>
+          </a:xfrm>
+          <a:prstGeom prst="rect">
+            <a:avLst/>
+          </a:prstGeom>
+          <a:noFill/>
+        </p:spPr>
+        <p:txBody>
+          <a:bodyPr wrap="square" lIns="0" rIns="0" tIns="0" bIns="0">
+            <a:spAutoFit/>
+          </a:bodyPr>
+          <a:lstStyle/>
+          <a:p>
+            <a:pPr>
+              <a:defRPr sz="2100" b="1">
+                <a:solidFill>
+                  <a:srgbClr val="1B3E24"/>
+                </a:solidFill>
+                <a:latin typeface="Arial"/>
+              </a:defRPr>
+            </a:pPr>
+            <a:r>
+              <a:t>Towards AI-Native Health Data Standards</a:t>
+            </a:r>
+          </a:p>
+        </p:txBody>
+      </p:sp>
+      <p:sp>
+        <p:nvSpPr>
+          <p:cNvPr id="5" name="TextBox 4"/>
+          <p:cNvSpPr txBox="1"/>
+          <p:nvPr/>
+        </p:nvSpPr>
+        <p:spPr>
+          <a:xfrm>
+            <a:off x="731520" y="1261872"/>
+            <a:ext cx="9144000" cy="365760"/>
+          </a:xfrm>
+          <a:prstGeom prst="rect">
+            <a:avLst/>
+          </a:prstGeom>
+          <a:noFill/>
+        </p:spPr>
+        <p:txBody>
+          <a:bodyPr wrap="square" lIns="0" rIns="0" tIns="0" bIns="0">
+            <a:spAutoFit/>
+          </a:bodyPr>
+          <a:lstStyle/>
+          <a:p>
+            <a:pPr>
+              <a:defRPr sz="1200">
+                <a:solidFill>
+                  <a:srgbClr val="526458"/>
+                </a:solidFill>
+                <a:latin typeface="Arial"/>
+              </a:defRPr>
+            </a:pPr>
+            <a:r>
+              <a:t>Will healthcare need a new standard designed for machine learning and autonomous agents?</a:t>
+            </a:r>
+          </a:p>
+        </p:txBody>
+      </p:sp>
+      <p:pic>
+        <p:nvPicPr>
+          <p:cNvPr id="6" name="Picture 5" descr="ait_logo.png"/>
+          <p:cNvPicPr>
+            <a:picLocks noChangeAspect="1"/>
+          </p:cNvPicPr>
+          <p:nvPr/>
+        </p:nvPicPr>
+        <p:blipFill>
+          <a:blip r:embed="rId2"/>
+          <a:stretch>
+            <a:fillRect/>
+          </a:stretch>
+        </p:blipFill>
+        <p:spPr>
+          <a:xfrm>
+            <a:off x="10149840" y="411480"/>
+            <a:ext cx="1371600" cy="293914"/>
+          </a:xfrm>
+          <a:prstGeom prst="rect">
+            <a:avLst/>
+          </a:prstGeom>
+        </p:spPr>
+      </p:pic>
+      <p:sp>
+        <p:nvSpPr>
+          <p:cNvPr id="7" name="Rounded Rectangle 6"/>
+          <p:cNvSpPr/>
+          <p:nvPr/>
+        </p:nvSpPr>
+        <p:spPr>
+          <a:xfrm>
+            <a:off x="731520" y="1828800"/>
+            <a:ext cx="5120640" cy="4389120"/>
+          </a:xfrm>
+          <a:prstGeom prst="roundRect">
+            <a:avLst/>
+          </a:prstGeom>
+          <a:solidFill>
+            <a:srgbClr val="FFFFFF"/>
+          </a:solidFill>
+          <a:ln w="15240">
+            <a:solidFill>
+              <a:srgbClr val="D2DCD4"/>
+            </a:solidFill>
+          </a:ln>
+        </p:spPr>
+        <p:style>
+          <a:lnRef idx="1">
+            <a:schemeClr val="accent1"/>
+          </a:lnRef>
+          <a:fillRef idx="3">
+            <a:schemeClr val="accent1"/>
+          </a:fillRef>
+          <a:effectRef idx="2">
+            <a:schemeClr val="accent1"/>
+          </a:effectRef>
+          <a:fontRef idx="minor">
+            <a:schemeClr val="lt1"/>
+          </a:fontRef>
+        </p:style>
+        <p:txBody>
+          <a:bodyPr rtlCol="0" anchor="ctr" lIns="320040" rIns="320040" tIns="320040"/>
+          <a:lstStyle/>
+          <a:p>
+            <a:pPr algn="ctr">
+              <a:defRPr b="1" sz="1100">
+                <a:solidFill>
+                  <a:srgbClr val="285C36"/>
+                </a:solidFill>
+              </a:defRPr>
+            </a:pPr>
+            <a:r>
+              <a:t>THE THREE ERAS OF HEALTH DATA</a:t>
+            </a:r>
+          </a:p>
+          <a:p>
+            <a:pPr>
+              <a:spcBef>
+                <a:spcPts val="600"/>
+              </a:spcBef>
+              <a:defRPr b="1" sz="1800">
+                <a:solidFill>
+                  <a:srgbClr val="1B3E24"/>
+                </a:solidFill>
+              </a:defRPr>
+            </a:pPr>
+            <a:r>
+              <a:t>From Hardware Sockets to Autonomous Agents</a:t>
+            </a:r>
+          </a:p>
+          <a:p>
+            <a:pPr>
+              <a:spcBef>
+                <a:spcPts val="1000"/>
+              </a:spcBef>
+              <a:defRPr b="1" sz="1100">
+                <a:solidFill>
+                  <a:srgbClr val="142118"/>
+                </a:solidFill>
+              </a:defRPr>
+            </a:pPr>
+            <a:r>
+              <a:t>• Era 1: 1989–2011 (Local Machines):</a:t>
+            </a:r>
+            <a:br/>
+            <a:r>
+              <a:rPr b="0">
+                <a:solidFill>
+                  <a:srgbClr val="526458"/>
+                </a:solidFill>
+              </a:rPr>
+              <a:t>HL7 v2: Pipe-delimited ASCII strings over TCP sockets for local hospital LANs.</a:t>
+            </a:r>
+          </a:p>
+          <a:p>
+            <a:pPr>
+              <a:spcBef>
+                <a:spcPts val="1000"/>
+              </a:spcBef>
+              <a:defRPr b="1" sz="1100">
+                <a:solidFill>
+                  <a:srgbClr val="142118"/>
+                </a:solidFill>
+              </a:defRPr>
+            </a:pPr>
+            <a:r>
+              <a:t>• Era 2: 2014–2025 (Web &amp; Mobile):</a:t>
+            </a:r>
+            <a:br/>
+            <a:r>
+              <a:rPr b="0">
+                <a:solidFill>
+                  <a:srgbClr val="526458"/>
+                </a:solidFill>
+              </a:rPr>
+              <a:t>HL7 FHIR: JSON REST APIs and web standards for apps, clinicians, and portals.</a:t>
+            </a:r>
+          </a:p>
+          <a:p>
+            <a:pPr>
+              <a:spcBef>
+                <a:spcPts val="1000"/>
+              </a:spcBef>
+              <a:defRPr b="1" sz="1100">
+                <a:solidFill>
+                  <a:srgbClr val="142118"/>
+                </a:solidFill>
+              </a:defRPr>
+            </a:pPr>
+            <a:r>
+              <a:t>• Era 3: 2026+ (Artificial Intelligence):</a:t>
+            </a:r>
+            <a:br/>
+            <a:r>
+              <a:rPr b="0">
+                <a:solidFill>
+                  <a:srgbClr val="526458"/>
+                </a:solidFill>
+              </a:rPr>
+              <a:t>AI-Native Stack: Vector embeddings, token-optimized Markdown, and Agentic MCP tool protocols.</a:t>
+            </a:r>
+          </a:p>
+        </p:txBody>
+      </p:sp>
+      <p:sp>
+        <p:nvSpPr>
+          <p:cNvPr id="8" name="Rounded Rectangle 7"/>
+          <p:cNvSpPr/>
+          <p:nvPr/>
+        </p:nvSpPr>
+        <p:spPr>
+          <a:xfrm>
+            <a:off x="6217920" y="1828800"/>
+            <a:ext cx="5212080" cy="4389120"/>
+          </a:xfrm>
+          <a:prstGeom prst="roundRect">
+            <a:avLst/>
+          </a:prstGeom>
+          <a:solidFill>
+            <a:srgbClr val="FFFFFF"/>
+          </a:solidFill>
+          <a:ln w="15240">
+            <a:solidFill>
+              <a:srgbClr val="D2DCD4"/>
+            </a:solidFill>
+          </a:ln>
+        </p:spPr>
+        <p:style>
+          <a:lnRef idx="1">
+            <a:schemeClr val="accent1"/>
+          </a:lnRef>
+          <a:fillRef idx="3">
+            <a:schemeClr val="accent1"/>
+          </a:fillRef>
+          <a:effectRef idx="2">
+            <a:schemeClr val="accent1"/>
+          </a:effectRef>
+          <a:fontRef idx="minor">
+            <a:schemeClr val="lt1"/>
+          </a:fontRef>
+        </p:style>
+        <p:txBody>
+          <a:bodyPr rtlCol="0" anchor="ctr" lIns="320040" rIns="320040" tIns="320040"/>
+          <a:lstStyle/>
+          <a:p>
+            <a:pPr algn="ctr">
+              <a:defRPr b="1" sz="1100">
+                <a:solidFill>
+                  <a:srgbClr val="94BA33"/>
+                </a:solidFill>
+              </a:defRPr>
+            </a:pPr>
+            <a:r>
+              <a:t>THE EMERGING SOLUTION</a:t>
+            </a:r>
+          </a:p>
+          <a:p>
+            <a:pPr>
+              <a:spcBef>
+                <a:spcPts val="600"/>
+              </a:spcBef>
+              <a:defRPr b="1" sz="1800">
+                <a:solidFill>
+                  <a:srgbClr val="1B3E24"/>
+                </a:solidFill>
+              </a:defRPr>
+            </a:pPr>
+            <a:r>
+              <a:t>The Dual-Stack Health Architecture</a:t>
+            </a:r>
+          </a:p>
+          <a:p>
+            <a:pPr>
+              <a:spcBef>
+                <a:spcPts val="1000"/>
+              </a:spcBef>
+              <a:defRPr b="1" sz="1100">
+                <a:solidFill>
+                  <a:srgbClr val="142118"/>
+                </a:solidFill>
+              </a:defRPr>
+            </a:pPr>
+            <a:r>
+              <a:t>• Layer A · System of Record (FHIR):</a:t>
+            </a:r>
+            <a:br/>
+            <a:r>
+              <a:rPr b="0">
+                <a:solidFill>
+                  <a:srgbClr val="526458"/>
+                </a:solidFill>
+              </a:rPr>
+              <a:t>FHIR remains the authoritative, legally audited, and human-verified patient ledger for billing, medication safety, and clinical charts.</a:t>
+            </a:r>
+          </a:p>
+          <a:p>
+            <a:pPr>
+              <a:spcBef>
+                <a:spcPts val="1000"/>
+              </a:spcBef>
+              <a:defRPr b="1" sz="1100">
+                <a:solidFill>
+                  <a:srgbClr val="142118"/>
+                </a:solidFill>
+              </a:defRPr>
+            </a:pPr>
+            <a:r>
+              <a:t>• Layer B · System of Intelligence (AI Store):</a:t>
+            </a:r>
+            <a:br/>
+            <a:r>
+              <a:rPr b="0">
+                <a:solidFill>
+                  <a:srgbClr val="526458"/>
+                </a:solidFill>
+              </a:rPr>
+              <a:t>High-performance vector stores and feature stores (e.g. Feast, pgvector) continuously ingest FHIR streams, serving ML models and LLM agents in milliseconds.</a:t>
+            </a:r>
+          </a:p>
+          <a:p>
+            <a:pPr>
+              <a:spcBef>
+                <a:spcPts val="1000"/>
+              </a:spcBef>
+              <a:defRPr b="1" sz="1100">
+                <a:solidFill>
+                  <a:srgbClr val="142118"/>
+                </a:solidFill>
+              </a:defRPr>
+            </a:pPr>
+            <a:r>
+              <a:t>• Health MCP Protocol Standard:</a:t>
+            </a:r>
+            <a:br/>
+            <a:r>
+              <a:rPr b="0">
+                <a:solidFill>
+                  <a:srgbClr val="526458"/>
+                </a:solidFill>
+              </a:rPr>
+              <a:t>Standardizing tool schemas so any clinical AI agent can query and propose treatment orders across any hospital safely.</a:t>
+            </a:r>
+          </a:p>
+        </p:txBody>
+      </p:sp>
+    </p:spTree>
+  </p:cSld>
+  <p:clrMapOvr>
+    <a:masterClrMapping/>
+  </p:clrMapOvr>
+</p:sld>
+</file>
+
+<file path=ppt/slides/slide27.xml><?xml version="1.0" encoding="utf-8"?>
 <p:sld xmlns:a="http://schemas.openxmlformats.org/drawingml/2006/main" xmlns:p="http://schemas.openxmlformats.org/presentationml/2006/main" xmlns:r="http://schemas.openxmlformats.org/officeDocument/2006/relationships">
   <p:cSld>
     <p:spTree>

--- a/slides-morning/orientation-and-health-ai-foundations.pptx
+++ b/slides-morning/orientation-and-health-ai-foundations.pptx
@@ -34,6 +34,7 @@
     <p:sldId id="282" r:id="rId33"/>
     <p:sldId id="283" r:id="rId34"/>
     <p:sldId id="284" r:id="rId35"/>
+    <p:sldId id="285" r:id="rId36"/>
   </p:sldIdLst>
   <p:sldSz cx="12191695" cy="6858000" type="screen4x3"/>
   <p:notesSz cx="6858000" cy="9144000"/>
@@ -5259,7 +5260,7 @@
               </a:defRPr>
             </a:pPr>
             <a:r>
-              <a:t>PHASE 1 · HISTORY OF HOSPITAL IT</a:t>
+              <a:t>COMPUTER SCIENCE &amp; AI</a:t>
             </a:r>
           </a:p>
         </p:txBody>
@@ -5295,7 +5296,7 @@
               </a:defRPr>
             </a:pPr>
             <a:r>
-              <a:t>Global Adoption: From Federal Law to Thailand</a:t>
+              <a:t>FHIR, The Semantic Web &amp; KRR (Knowledge Representation)</a:t>
             </a:r>
           </a:p>
         </p:txBody>
@@ -5331,7 +5332,7 @@
               </a:defRPr>
             </a:pPr>
             <a:r>
-              <a:t>Where FHIR is legally mandated, and the reality of legacy hospital engines</a:t>
+              <a:t>How FHIR implements W3C Linked Data, RDF Triples, and Description Logic reasoning in production</a:t>
             </a:r>
           </a:p>
         </p:txBody>
@@ -5409,7 +5410,7 @@
               </a:defRPr>
             </a:pPr>
             <a:r>
-              <a:t>MANDATED BY LAW</a:t>
+              <a:t>THE SEMANTIC WEB (W3C LINKED DATA)</a:t>
             </a:r>
           </a:p>
           <a:p>
@@ -5424,7 +5425,7 @@
               </a:defRPr>
             </a:pPr>
             <a:r>
-              <a:t>United States &amp; Europe</a:t>
+              <a:t>URIs &amp; The RDF Knowledge Graph</a:t>
             </a:r>
           </a:p>
           <a:p>
@@ -5439,7 +5440,7 @@
               </a:defRPr>
             </a:pPr>
             <a:r>
-              <a:t>• US 21st Century Cures Act:</a:t>
+              <a:t>• Universal Resource Identifiers (URIs):</a:t>
             </a:r>
             <a:br/>
             <a:r>
@@ -5448,7 +5449,7 @@
                   <a:srgbClr val="526458"/>
                 </a:solidFill>
               </a:rPr>
-              <a:t>Made clinical 'data blocking' illegal. Certified hospital software MUST expose standardized FHIR APIs (SMART on FHIR). Apple Health connects directly to thousands of US clinics via FHIR.</a:t>
+              <a:t>Nothing in FHIR is a loose string. Every concept, coding system, and extension is anchored to a globally resolvable URI (e.g. http://loinc.org|2339-0).</a:t>
             </a:r>
           </a:p>
           <a:p>
@@ -5463,7 +5464,7 @@
               </a:defRPr>
             </a:pPr>
             <a:r>
-              <a:t>• European Health Data Space (EHDS):</a:t>
+              <a:t>• RDF Triples in Practice:</a:t>
             </a:r>
             <a:br/>
             <a:r>
@@ -5472,7 +5473,31 @@
                   <a:srgbClr val="526458"/>
                 </a:solidFill>
               </a:rPr>
-              <a:t>Mandates cross-border clinical record exchange across all EU member states using FHIR.</a:t>
+              <a:t>FHIR references form directed graph triples: Subject (Observation/obs-01) -&gt; Predicate (subject) -&gt; Object (Patient/P0001). Zero duplication; infinite traversal.</a:t>
+            </a:r>
+          </a:p>
+          <a:p>
+            <a:pPr>
+              <a:spcBef>
+                <a:spcPts val="1000"/>
+              </a:spcBef>
+              <a:defRPr b="1" sz="1100">
+                <a:solidFill>
+                  <a:srgbClr val="142118"/>
+                </a:solidFill>
+              </a:defRPr>
+            </a:pPr>
+            <a:r>
+              <a:t>• W3C RDF/Turtle Standard:</a:t>
+            </a:r>
+            <a:br/>
+            <a:r>
+              <a:rPr b="0">
+                <a:solidFill>
+                  <a:srgbClr val="526458"/>
+                </a:solidFill>
+              </a:rPr>
+              <a:t>HL7 and W3C officially standardized the FHIR RDF specification (fhir/rdf.html). Entire hospital populations can be queried as a unified knowledge graph via SPARQL.</a:t>
             </a:r>
           </a:p>
         </p:txBody>
@@ -5526,7 +5551,7 @@
               </a:defRPr>
             </a:pPr>
             <a:r>
-              <a:t>LOCAL &amp; REGIONAL REALITY</a:t>
+              <a:t>KRR (KNOWLEDGE REPRESENTATION &amp; REASONING)</a:t>
             </a:r>
           </a:p>
           <a:p>
@@ -5541,7 +5566,7 @@
               </a:defRPr>
             </a:pPr>
             <a:r>
-              <a:t>Thailand &amp; Legacy Systems</a:t>
+              <a:t>Description Logics &amp; Automated Deduction</a:t>
             </a:r>
           </a:p>
           <a:p>
@@ -5556,7 +5581,7 @@
               </a:defRPr>
             </a:pPr>
             <a:r>
-              <a:t>• Thailand MOPH Initiatives:</a:t>
+              <a:t>• Formal Ontologies (SNOMED CT):</a:t>
             </a:r>
             <a:br/>
             <a:r>
@@ -5565,7 +5590,7 @@
                   <a:srgbClr val="526458"/>
                 </a:solidFill>
               </a:rPr>
-              <a:t>The Ministry of Public Health and Thai health-tech agencies are actively implementing FHIR-based Health Information Exchanges (HIE) for national universal coverage digital claims.</a:t>
+              <a:t>SNOMED CT is mathematically structured in Description Logic (the EL++ profile of OWL 2). Concepts possess formal relationships and subsumption hierarchies (Is-A).</a:t>
             </a:r>
           </a:p>
           <a:p>
@@ -5580,7 +5605,7 @@
               </a:defRPr>
             </a:pPr>
             <a:r>
-              <a:t>• The Hybrid Reality:</a:t>
+              <a:t>• Automated Logical Inference:</a:t>
             </a:r>
             <a:br/>
             <a:r>
@@ -5589,7 +5614,31 @@
                   <a:srgbClr val="526458"/>
                 </a:solidFill>
               </a:rPr>
-              <a:t>Replacing hospital databases costs millions. Many provincial hospitals still run HL7 v2 and MySQL engines; FHIR is deployed as an API Gateway wrapper sitting on top.</a:t>
+              <a:t>If an AI clinical rule states 'Alert if patient has Respiratory Infection', a reasoner infers that Bacterial Pneumonia is a subclass of Respiratory Infection and fires the alert—even if those words never appear in the chart!</a:t>
+            </a:r>
+          </a:p>
+          <a:p>
+            <a:pPr>
+              <a:spcBef>
+                <a:spcPts val="1000"/>
+              </a:spcBef>
+              <a:defRPr b="1" sz="1100">
+                <a:solidFill>
+                  <a:srgbClr val="142118"/>
+                </a:solidFill>
+              </a:defRPr>
+            </a:pPr>
+            <a:r>
+              <a:t>• Pragmatic KRR Success:</a:t>
+            </a:r>
+            <a:br/>
+            <a:r>
+              <a:rPr b="0">
+                <a:solidFill>
+                  <a:srgbClr val="526458"/>
+                </a:solidFill>
+              </a:rPr>
+              <a:t>FHIR succeeded where academic Semantic Web stalled: it hid complex Description Logics under clean, friendly JSON REST APIs that web developers love.</a:t>
             </a:r>
           </a:p>
         </p:txBody>
@@ -5627,7 +5676,7 @@
             <a:avLst/>
           </a:prstGeom>
           <a:solidFill>
-            <a:srgbClr val="1B3E24"/>
+            <a:srgbClr val="F5F7F5"/>
           </a:solidFill>
           <a:ln>
             <a:noFill/>
@@ -5657,23 +5706,157 @@
       </p:sp>
       <p:sp>
         <p:nvSpPr>
-          <p:cNvPr id="3" name="Rounded Rectangle 2"/>
+          <p:cNvPr id="3" name="TextBox 2"/>
+          <p:cNvSpPr txBox="1"/>
+          <p:nvPr/>
+        </p:nvSpPr>
+        <p:spPr>
+          <a:xfrm>
+            <a:off x="731520" y="365760"/>
+            <a:ext cx="7772400" cy="320040"/>
+          </a:xfrm>
+          <a:prstGeom prst="rect">
+            <a:avLst/>
+          </a:prstGeom>
+          <a:noFill/>
+        </p:spPr>
+        <p:txBody>
+          <a:bodyPr wrap="square" lIns="0" rIns="0" tIns="0" bIns="0">
+            <a:spAutoFit/>
+          </a:bodyPr>
+          <a:lstStyle/>
+          <a:p>
+            <a:pPr>
+              <a:defRPr sz="1000" b="1">
+                <a:solidFill>
+                  <a:srgbClr val="285C36"/>
+                </a:solidFill>
+                <a:latin typeface="Arial"/>
+              </a:defRPr>
+            </a:pPr>
+            <a:r>
+              <a:t>PHASE 1 · HISTORY OF HOSPITAL IT</a:t>
+            </a:r>
+          </a:p>
+        </p:txBody>
+      </p:sp>
+      <p:sp>
+        <p:nvSpPr>
+          <p:cNvPr id="4" name="TextBox 3"/>
+          <p:cNvSpPr txBox="1"/>
+          <p:nvPr/>
+        </p:nvSpPr>
+        <p:spPr>
+          <a:xfrm>
+            <a:off x="731520" y="658368"/>
+            <a:ext cx="8961120" cy="594360"/>
+          </a:xfrm>
+          <a:prstGeom prst="rect">
+            <a:avLst/>
+          </a:prstGeom>
+          <a:noFill/>
+        </p:spPr>
+        <p:txBody>
+          <a:bodyPr wrap="square" lIns="0" rIns="0" tIns="0" bIns="0">
+            <a:spAutoFit/>
+          </a:bodyPr>
+          <a:lstStyle/>
+          <a:p>
+            <a:pPr>
+              <a:defRPr sz="2100" b="1">
+                <a:solidFill>
+                  <a:srgbClr val="1B3E24"/>
+                </a:solidFill>
+                <a:latin typeface="Arial"/>
+              </a:defRPr>
+            </a:pPr>
+            <a:r>
+              <a:t>Global Adoption: From Federal Law to Thailand</a:t>
+            </a:r>
+          </a:p>
+        </p:txBody>
+      </p:sp>
+      <p:sp>
+        <p:nvSpPr>
+          <p:cNvPr id="5" name="TextBox 4"/>
+          <p:cNvSpPr txBox="1"/>
+          <p:nvPr/>
+        </p:nvSpPr>
+        <p:spPr>
+          <a:xfrm>
+            <a:off x="731520" y="1261872"/>
+            <a:ext cx="9144000" cy="365760"/>
+          </a:xfrm>
+          <a:prstGeom prst="rect">
+            <a:avLst/>
+          </a:prstGeom>
+          <a:noFill/>
+        </p:spPr>
+        <p:txBody>
+          <a:bodyPr wrap="square" lIns="0" rIns="0" tIns="0" bIns="0">
+            <a:spAutoFit/>
+          </a:bodyPr>
+          <a:lstStyle/>
+          <a:p>
+            <a:pPr>
+              <a:defRPr sz="1200">
+                <a:solidFill>
+                  <a:srgbClr val="526458"/>
+                </a:solidFill>
+                <a:latin typeface="Arial"/>
+              </a:defRPr>
+            </a:pPr>
+            <a:r>
+              <a:t>Where FHIR is legally mandated, and the reality of legacy hospital engines</a:t>
+            </a:r>
+          </a:p>
+        </p:txBody>
+      </p:sp>
+      <p:pic>
+        <p:nvPicPr>
+          <p:cNvPr id="6" name="Picture 5" descr="ait_logo.png"/>
+          <p:cNvPicPr>
+            <a:picLocks noChangeAspect="1"/>
+          </p:cNvPicPr>
+          <p:nvPr/>
+        </p:nvPicPr>
+        <p:blipFill>
+          <a:blip r:embed="rId2"/>
+          <a:stretch>
+            <a:fillRect/>
+          </a:stretch>
+        </p:blipFill>
+        <p:spPr>
+          <a:xfrm>
+            <a:off x="10149840" y="411480"/>
+            <a:ext cx="1371600" cy="293914"/>
+          </a:xfrm>
+          <a:prstGeom prst="rect">
+            <a:avLst/>
+          </a:prstGeom>
+        </p:spPr>
+      </p:pic>
+      <p:sp>
+        <p:nvSpPr>
+          <p:cNvPr id="7" name="Rounded Rectangle 6"/>
           <p:cNvSpPr/>
           <p:nvPr/>
         </p:nvSpPr>
         <p:spPr>
           <a:xfrm>
-            <a:off x="822960" y="1645920"/>
-            <a:ext cx="5486400" cy="411480"/>
+            <a:off x="731520" y="1828800"/>
+            <a:ext cx="5120640" cy="4389120"/>
           </a:xfrm>
           <a:prstGeom prst="roundRect">
             <a:avLst/>
           </a:prstGeom>
           <a:solidFill>
-            <a:srgbClr val="285C36"/>
+            <a:srgbClr val="FFFFFF"/>
           </a:solidFill>
-          <a:ln>
-            <a:noFill/>
+          <a:ln w="15240">
+            <a:solidFill>
+              <a:srgbClr val="D2DCD4"/>
+            </a:solidFill>
           </a:ln>
         </p:spPr>
         <p:style>
@@ -5691,91 +5874,106 @@
           </a:fontRef>
         </p:style>
         <p:txBody>
-          <a:bodyPr rtlCol="0" anchor="ctr" lIns="182880"/>
+          <a:bodyPr rtlCol="0" anchor="ctr" lIns="320040" rIns="320040" tIns="320040"/>
           <a:lstStyle/>
           <a:p>
             <a:pPr algn="ctr">
-              <a:defRPr b="1" sz="1000">
-                <a:solidFill>
-                  <a:srgbClr val="FFFFFF"/>
-                </a:solidFill>
-              </a:defRPr>
-            </a:pPr>
-            <a:r>
-              <a:t>PHASE 2 · CLINICAL DATA MODALITIES FOR AI</a:t>
-            </a:r>
-          </a:p>
-        </p:txBody>
-      </p:sp>
-      <p:sp>
-        <p:nvSpPr>
-          <p:cNvPr id="4" name="TextBox 3"/>
-          <p:cNvSpPr txBox="1"/>
-          <p:nvPr/>
-        </p:nvSpPr>
-        <p:spPr>
-          <a:xfrm>
-            <a:off x="822960" y="2286000"/>
-            <a:ext cx="10515600" cy="2011680"/>
-          </a:xfrm>
-          <a:prstGeom prst="rect">
-            <a:avLst/>
-          </a:prstGeom>
-          <a:noFill/>
-        </p:spPr>
-        <p:txBody>
-          <a:bodyPr wrap="square">
-            <a:spAutoFit/>
-          </a:bodyPr>
-          <a:lstStyle/>
-          <a:p>
-            <a:pPr>
-              <a:defRPr b="1" sz="3800">
-                <a:solidFill>
-                  <a:srgbClr val="FFFFFF"/>
-                </a:solidFill>
-              </a:defRPr>
-            </a:pPr>
-            <a:r>
-              <a:t>The Four Modalities of Health AI</a:t>
-            </a:r>
-          </a:p>
-          <a:p>
-            <a:pPr>
-              <a:spcBef>
-                <a:spcPts val="1200"/>
-              </a:spcBef>
-              <a:defRPr sz="1700">
-                <a:solidFill>
-                  <a:srgbClr val="94BA33"/>
-                </a:solidFill>
-              </a:defRPr>
-            </a:pPr>
-            <a:r>
-              <a:t>From 2D Tabular Feature Matrices to Spatial Tensors, Signal Telemetry, and LLM Agents</a:t>
-            </a:r>
-          </a:p>
-        </p:txBody>
-      </p:sp>
-      <p:sp>
-        <p:nvSpPr>
-          <p:cNvPr id="5" name="Rounded Rectangle 4"/>
+              <a:defRPr b="1" sz="1100">
+                <a:solidFill>
+                  <a:srgbClr val="285C36"/>
+                </a:solidFill>
+              </a:defRPr>
+            </a:pPr>
+            <a:r>
+              <a:t>MANDATED BY LAW</a:t>
+            </a:r>
+          </a:p>
+          <a:p>
+            <a:pPr>
+              <a:spcBef>
+                <a:spcPts val="600"/>
+              </a:spcBef>
+              <a:defRPr b="1" sz="1800">
+                <a:solidFill>
+                  <a:srgbClr val="1B3E24"/>
+                </a:solidFill>
+              </a:defRPr>
+            </a:pPr>
+            <a:r>
+              <a:t>United States &amp; Europe</a:t>
+            </a:r>
+          </a:p>
+          <a:p>
+            <a:pPr>
+              <a:spcBef>
+                <a:spcPts val="1000"/>
+              </a:spcBef>
+              <a:defRPr b="1" sz="1100">
+                <a:solidFill>
+                  <a:srgbClr val="142118"/>
+                </a:solidFill>
+              </a:defRPr>
+            </a:pPr>
+            <a:r>
+              <a:t>• US 21st Century Cures Act:</a:t>
+            </a:r>
+            <a:br/>
+            <a:r>
+              <a:rPr b="0">
+                <a:solidFill>
+                  <a:srgbClr val="526458"/>
+                </a:solidFill>
+              </a:rPr>
+              <a:t>Made clinical 'data blocking' illegal. Certified hospital software MUST expose standardized FHIR APIs (SMART on FHIR). Apple Health connects directly to thousands of US clinics via FHIR.</a:t>
+            </a:r>
+          </a:p>
+          <a:p>
+            <a:pPr>
+              <a:spcBef>
+                <a:spcPts val="1000"/>
+              </a:spcBef>
+              <a:defRPr b="1" sz="1100">
+                <a:solidFill>
+                  <a:srgbClr val="142118"/>
+                </a:solidFill>
+              </a:defRPr>
+            </a:pPr>
+            <a:r>
+              <a:t>• European Health Data Space (EHDS):</a:t>
+            </a:r>
+            <a:br/>
+            <a:r>
+              <a:rPr b="0">
+                <a:solidFill>
+                  <a:srgbClr val="526458"/>
+                </a:solidFill>
+              </a:rPr>
+              <a:t>Mandates cross-border clinical record exchange across all EU member states using FHIR.</a:t>
+            </a:r>
+          </a:p>
+        </p:txBody>
+      </p:sp>
+      <p:sp>
+        <p:nvSpPr>
+          <p:cNvPr id="8" name="Rounded Rectangle 7"/>
           <p:cNvSpPr/>
           <p:nvPr/>
         </p:nvSpPr>
         <p:spPr>
           <a:xfrm>
-            <a:off x="822960" y="4572000"/>
-            <a:ext cx="10515600" cy="1463040"/>
+            <a:off x="6217920" y="1828800"/>
+            <a:ext cx="5212080" cy="4389120"/>
           </a:xfrm>
           <a:prstGeom prst="roundRect">
             <a:avLst/>
           </a:prstGeom>
           <a:solidFill>
-            <a:srgbClr val="285C36"/>
+            <a:srgbClr val="FFFFFF"/>
           </a:solidFill>
-          <a:ln>
-            <a:noFill/>
+          <a:ln w="15240">
+            <a:solidFill>
+              <a:srgbClr val="D2DCD4"/>
+            </a:solidFill>
           </a:ln>
         </p:spPr>
         <p:style>
@@ -5793,33 +5991,81 @@
           </a:fontRef>
         </p:style>
         <p:txBody>
-          <a:bodyPr rtlCol="0" anchor="ctr" lIns="274320" tIns="182880"/>
+          <a:bodyPr rtlCol="0" anchor="ctr" lIns="320040" rIns="320040" tIns="320040"/>
           <a:lstStyle/>
           <a:p>
             <a:pPr algn="ctr">
-              <a:defRPr b="1" sz="1300">
+              <a:defRPr b="1" sz="1100">
                 <a:solidFill>
                   <a:srgbClr val="94BA33"/>
                 </a:solidFill>
               </a:defRPr>
             </a:pPr>
             <a:r>
-              <a:t>Different Math, Different Algorithms:</a:t>
-            </a:r>
-          </a:p>
-          <a:p>
-            <a:pPr>
-              <a:spcBef>
-                <a:spcPts val="400"/>
-              </a:spcBef>
-              <a:defRPr b="1" sz="1350">
-                <a:solidFill>
-                  <a:srgbClr val="FFFFFF"/>
-                </a:solidFill>
-              </a:defRPr>
-            </a:pPr>
-            <a:r>
-              <a:t>There is no single 'Health AI algorithm.' Tabular data requires gradient trees; radiology requires 3D convolution; telemetry requires temporal state spaces; notes require LLMs.</a:t>
+              <a:t>LOCAL &amp; REGIONAL REALITY</a:t>
+            </a:r>
+          </a:p>
+          <a:p>
+            <a:pPr>
+              <a:spcBef>
+                <a:spcPts val="600"/>
+              </a:spcBef>
+              <a:defRPr b="1" sz="1800">
+                <a:solidFill>
+                  <a:srgbClr val="1B3E24"/>
+                </a:solidFill>
+              </a:defRPr>
+            </a:pPr>
+            <a:r>
+              <a:t>Thailand &amp; Legacy Systems</a:t>
+            </a:r>
+          </a:p>
+          <a:p>
+            <a:pPr>
+              <a:spcBef>
+                <a:spcPts val="1000"/>
+              </a:spcBef>
+              <a:defRPr b="1" sz="1100">
+                <a:solidFill>
+                  <a:srgbClr val="142118"/>
+                </a:solidFill>
+              </a:defRPr>
+            </a:pPr>
+            <a:r>
+              <a:t>• Thailand MOPH Initiatives:</a:t>
+            </a:r>
+            <a:br/>
+            <a:r>
+              <a:rPr b="0">
+                <a:solidFill>
+                  <a:srgbClr val="526458"/>
+                </a:solidFill>
+              </a:rPr>
+              <a:t>The Ministry of Public Health and Thai health-tech agencies are actively implementing FHIR-based Health Information Exchanges (HIE) for national universal coverage digital claims.</a:t>
+            </a:r>
+          </a:p>
+          <a:p>
+            <a:pPr>
+              <a:spcBef>
+                <a:spcPts val="1000"/>
+              </a:spcBef>
+              <a:defRPr b="1" sz="1100">
+                <a:solidFill>
+                  <a:srgbClr val="142118"/>
+                </a:solidFill>
+              </a:defRPr>
+            </a:pPr>
+            <a:r>
+              <a:t>• The Hybrid Reality:</a:t>
+            </a:r>
+            <a:br/>
+            <a:r>
+              <a:rPr b="0">
+                <a:solidFill>
+                  <a:srgbClr val="526458"/>
+                </a:solidFill>
+              </a:rPr>
+              <a:t>Replacing hospital databases costs millions. Many provincial hospitals still run HL7 v2 and MySQL engines; FHIR is deployed as an API Gateway wrapper sitting on top.</a:t>
             </a:r>
           </a:p>
         </p:txBody>
@@ -5857,7 +6103,7 @@
             <a:avLst/>
           </a:prstGeom>
           <a:solidFill>
-            <a:srgbClr val="F5F7F5"/>
+            <a:srgbClr val="1B3E24"/>
           </a:solidFill>
           <a:ln>
             <a:noFill/>
@@ -5887,157 +6133,23 @@
       </p:sp>
       <p:sp>
         <p:nvSpPr>
-          <p:cNvPr id="3" name="TextBox 2"/>
-          <p:cNvSpPr txBox="1"/>
-          <p:nvPr/>
-        </p:nvSpPr>
-        <p:spPr>
-          <a:xfrm>
-            <a:off x="731520" y="365760"/>
-            <a:ext cx="7772400" cy="320040"/>
-          </a:xfrm>
-          <a:prstGeom prst="rect">
-            <a:avLst/>
-          </a:prstGeom>
-          <a:noFill/>
-        </p:spPr>
-        <p:txBody>
-          <a:bodyPr wrap="square" lIns="0" rIns="0" tIns="0" bIns="0">
-            <a:spAutoFit/>
-          </a:bodyPr>
-          <a:lstStyle/>
-          <a:p>
-            <a:pPr>
-              <a:defRPr sz="1000" b="1">
-                <a:solidFill>
-                  <a:srgbClr val="285C36"/>
-                </a:solidFill>
-                <a:latin typeface="Arial"/>
-              </a:defRPr>
-            </a:pPr>
-            <a:r>
-              <a:t>PHASE 2 · MODALITY 1</a:t>
-            </a:r>
-          </a:p>
-        </p:txBody>
-      </p:sp>
-      <p:sp>
-        <p:nvSpPr>
-          <p:cNvPr id="4" name="TextBox 3"/>
-          <p:cNvSpPr txBox="1"/>
-          <p:nvPr/>
-        </p:nvSpPr>
-        <p:spPr>
-          <a:xfrm>
-            <a:off x="731520" y="658368"/>
-            <a:ext cx="8961120" cy="594360"/>
-          </a:xfrm>
-          <a:prstGeom prst="rect">
-            <a:avLst/>
-          </a:prstGeom>
-          <a:noFill/>
-        </p:spPr>
-        <p:txBody>
-          <a:bodyPr wrap="square" lIns="0" rIns="0" tIns="0" bIns="0">
-            <a:spAutoFit/>
-          </a:bodyPr>
-          <a:lstStyle/>
-          <a:p>
-            <a:pPr>
-              <a:defRPr sz="2100" b="1">
-                <a:solidFill>
-                  <a:srgbClr val="1B3E24"/>
-                </a:solidFill>
-                <a:latin typeface="Arial"/>
-              </a:defRPr>
-            </a:pPr>
-            <a:r>
-              <a:t>Tabular Data: The Classical Machine Learning Engine</a:t>
-            </a:r>
-          </a:p>
-        </p:txBody>
-      </p:sp>
-      <p:sp>
-        <p:nvSpPr>
-          <p:cNvPr id="5" name="TextBox 4"/>
-          <p:cNvSpPr txBox="1"/>
-          <p:nvPr/>
-        </p:nvSpPr>
-        <p:spPr>
-          <a:xfrm>
-            <a:off x="731520" y="1261872"/>
-            <a:ext cx="9144000" cy="365760"/>
-          </a:xfrm>
-          <a:prstGeom prst="rect">
-            <a:avLst/>
-          </a:prstGeom>
-          <a:noFill/>
-        </p:spPr>
-        <p:txBody>
-          <a:bodyPr wrap="square" lIns="0" rIns="0" tIns="0" bIns="0">
-            <a:spAutoFit/>
-          </a:bodyPr>
-          <a:lstStyle/>
-          <a:p>
-            <a:pPr>
-              <a:defRPr sz="1200">
-                <a:solidFill>
-                  <a:srgbClr val="526458"/>
-                </a:solidFill>
-                <a:latin typeface="Arial"/>
-              </a:defRPr>
-            </a:pPr>
-            <a:r>
-              <a:t>Structured numeric matrices powering clinical risk stratification and lab assays</a:t>
-            </a:r>
-          </a:p>
-        </p:txBody>
-      </p:sp>
-      <p:pic>
-        <p:nvPicPr>
-          <p:cNvPr id="6" name="Picture 5" descr="ait_logo.png"/>
-          <p:cNvPicPr>
-            <a:picLocks noChangeAspect="1"/>
-          </p:cNvPicPr>
-          <p:nvPr/>
-        </p:nvPicPr>
-        <p:blipFill>
-          <a:blip r:embed="rId2"/>
-          <a:stretch>
-            <a:fillRect/>
-          </a:stretch>
-        </p:blipFill>
-        <p:spPr>
-          <a:xfrm>
-            <a:off x="10149840" y="411480"/>
-            <a:ext cx="1371600" cy="293914"/>
-          </a:xfrm>
-          <a:prstGeom prst="rect">
-            <a:avLst/>
-          </a:prstGeom>
-        </p:spPr>
-      </p:pic>
-      <p:sp>
-        <p:nvSpPr>
-          <p:cNvPr id="7" name="Rounded Rectangle 6"/>
+          <p:cNvPr id="3" name="Rounded Rectangle 2"/>
           <p:cNvSpPr/>
           <p:nvPr/>
         </p:nvSpPr>
         <p:spPr>
           <a:xfrm>
-            <a:off x="731520" y="1828800"/>
-            <a:ext cx="5120640" cy="4389120"/>
+            <a:off x="822960" y="1645920"/>
+            <a:ext cx="5486400" cy="411480"/>
           </a:xfrm>
           <a:prstGeom prst="roundRect">
             <a:avLst/>
           </a:prstGeom>
           <a:solidFill>
-            <a:srgbClr val="FFFFFF"/>
+            <a:srgbClr val="285C36"/>
           </a:solidFill>
-          <a:ln w="15240">
-            <a:solidFill>
-              <a:srgbClr val="D2DCD4"/>
-            </a:solidFill>
+          <a:ln>
+            <a:noFill/>
           </a:ln>
         </p:spPr>
         <p:style>
@@ -6055,127 +6167,91 @@
           </a:fontRef>
         </p:style>
         <p:txBody>
-          <a:bodyPr rtlCol="0" anchor="ctr" lIns="320040" rIns="320040" tIns="320040"/>
+          <a:bodyPr rtlCol="0" anchor="ctr" lIns="182880"/>
           <a:lstStyle/>
           <a:p>
             <a:pPr algn="ctr">
-              <a:defRPr b="1" sz="1100">
-                <a:solidFill>
-                  <a:srgbClr val="285C36"/>
-                </a:solidFill>
-              </a:defRPr>
-            </a:pPr>
-            <a:r>
-              <a:t>DATA REPRESENTATION</a:t>
-            </a:r>
-          </a:p>
-          <a:p>
-            <a:pPr>
-              <a:spcBef>
-                <a:spcPts val="600"/>
-              </a:spcBef>
-              <a:defRPr b="1" sz="1800">
-                <a:solidFill>
-                  <a:srgbClr val="1B3E24"/>
-                </a:solidFill>
-              </a:defRPr>
-            </a:pPr>
-            <a:r>
-              <a:t>2D Matrices: X in R^{N x D}</a:t>
-            </a:r>
-          </a:p>
-          <a:p>
-            <a:pPr>
-              <a:spcBef>
-                <a:spcPts val="1000"/>
-              </a:spcBef>
-              <a:defRPr b="1" sz="1100">
-                <a:solidFill>
-                  <a:srgbClr val="142118"/>
-                </a:solidFill>
-              </a:defRPr>
-            </a:pPr>
-            <a:r>
-              <a:t>• Clinical Sources: </a:t>
-            </a:r>
-            <a:r>
-              <a:rPr b="0">
-                <a:solidFill>
-                  <a:srgbClr val="526458"/>
-                </a:solidFill>
-              </a:rPr>
-              <a:t>Automated lab panels (glucose, creatinine), vital signs, cell morphometry from biopsies, and patient demographics.</a:t>
-            </a:r>
-          </a:p>
-          <a:p>
-            <a:pPr>
-              <a:spcBef>
-                <a:spcPts val="1000"/>
-              </a:spcBef>
-              <a:defRPr b="1" sz="1100">
-                <a:solidFill>
-                  <a:srgbClr val="142118"/>
-                </a:solidFill>
-              </a:defRPr>
-            </a:pPr>
-            <a:r>
-              <a:t>• Mathematical Structure: </a:t>
-            </a:r>
-            <a:r>
-              <a:rPr b="0">
-                <a:solidFill>
-                  <a:srgbClr val="526458"/>
-                </a:solidFill>
-              </a:rPr>
-              <a:t>A rectangular table of N patients (rows) by D features (columns). Targets y in {0, 1}.</a:t>
-            </a:r>
-          </a:p>
-          <a:p>
-            <a:pPr>
-              <a:spcBef>
-                <a:spcPts val="1000"/>
-              </a:spcBef>
-              <a:defRPr b="1" sz="1100">
-                <a:solidFill>
-                  <a:srgbClr val="142118"/>
-                </a:solidFill>
-              </a:defRPr>
-            </a:pPr>
-            <a:r>
-              <a:t>• Strict Requirements: </a:t>
-            </a:r>
-            <a:r>
-              <a:rPr b="0">
-                <a:solidFill>
-                  <a:srgbClr val="526458"/>
-                </a:solidFill>
-              </a:rPr>
-              <a:t>Every cell must be a valid float. Algorithms cannot handle raw nested JSON or string codes without preprocessing.</a:t>
-            </a:r>
-          </a:p>
-        </p:txBody>
-      </p:sp>
-      <p:sp>
-        <p:nvSpPr>
-          <p:cNvPr id="8" name="Rounded Rectangle 7"/>
+              <a:defRPr b="1" sz="1000">
+                <a:solidFill>
+                  <a:srgbClr val="FFFFFF"/>
+                </a:solidFill>
+              </a:defRPr>
+            </a:pPr>
+            <a:r>
+              <a:t>PHASE 2 · CLINICAL DATA MODALITIES FOR AI</a:t>
+            </a:r>
+          </a:p>
+        </p:txBody>
+      </p:sp>
+      <p:sp>
+        <p:nvSpPr>
+          <p:cNvPr id="4" name="TextBox 3"/>
+          <p:cNvSpPr txBox="1"/>
+          <p:nvPr/>
+        </p:nvSpPr>
+        <p:spPr>
+          <a:xfrm>
+            <a:off x="822960" y="2286000"/>
+            <a:ext cx="10515600" cy="2011680"/>
+          </a:xfrm>
+          <a:prstGeom prst="rect">
+            <a:avLst/>
+          </a:prstGeom>
+          <a:noFill/>
+        </p:spPr>
+        <p:txBody>
+          <a:bodyPr wrap="square">
+            <a:spAutoFit/>
+          </a:bodyPr>
+          <a:lstStyle/>
+          <a:p>
+            <a:pPr>
+              <a:defRPr b="1" sz="3800">
+                <a:solidFill>
+                  <a:srgbClr val="FFFFFF"/>
+                </a:solidFill>
+              </a:defRPr>
+            </a:pPr>
+            <a:r>
+              <a:t>The Four Modalities of Health AI</a:t>
+            </a:r>
+          </a:p>
+          <a:p>
+            <a:pPr>
+              <a:spcBef>
+                <a:spcPts val="1200"/>
+              </a:spcBef>
+              <a:defRPr sz="1700">
+                <a:solidFill>
+                  <a:srgbClr val="94BA33"/>
+                </a:solidFill>
+              </a:defRPr>
+            </a:pPr>
+            <a:r>
+              <a:t>From 2D Tabular Feature Matrices to Spatial Tensors, Signal Telemetry, and LLM Agents</a:t>
+            </a:r>
+          </a:p>
+        </p:txBody>
+      </p:sp>
+      <p:sp>
+        <p:nvSpPr>
+          <p:cNvPr id="5" name="Rounded Rectangle 4"/>
           <p:cNvSpPr/>
           <p:nvPr/>
         </p:nvSpPr>
         <p:spPr>
           <a:xfrm>
-            <a:off x="6217920" y="1828800"/>
-            <a:ext cx="5212080" cy="4389120"/>
+            <a:off x="822960" y="4572000"/>
+            <a:ext cx="10515600" cy="1463040"/>
           </a:xfrm>
           <a:prstGeom prst="roundRect">
             <a:avLst/>
           </a:prstGeom>
           <a:solidFill>
-            <a:srgbClr val="FFFFFF"/>
+            <a:srgbClr val="285C36"/>
           </a:solidFill>
-          <a:ln w="15240">
-            <a:solidFill>
-              <a:srgbClr val="D2DCD4"/>
-            </a:solidFill>
+          <a:ln>
+            <a:noFill/>
           </a:ln>
         </p:spPr>
         <p:style>
@@ -6193,102 +6269,33 @@
           </a:fontRef>
         </p:style>
         <p:txBody>
-          <a:bodyPr rtlCol="0" anchor="ctr" lIns="320040" rIns="320040" tIns="320040"/>
+          <a:bodyPr rtlCol="0" anchor="ctr" lIns="274320" tIns="182880"/>
           <a:lstStyle/>
           <a:p>
             <a:pPr algn="ctr">
-              <a:defRPr b="1" sz="1100">
+              <a:defRPr b="1" sz="1300">
                 <a:solidFill>
                   <a:srgbClr val="94BA33"/>
                 </a:solidFill>
               </a:defRPr>
             </a:pPr>
             <a:r>
-              <a:t>ALGORITHMS &amp; WORKSHOP LINK</a:t>
-            </a:r>
-          </a:p>
-          <a:p>
-            <a:pPr>
-              <a:spcBef>
-                <a:spcPts val="600"/>
-              </a:spcBef>
-              <a:defRPr b="1" sz="1800">
-                <a:solidFill>
-                  <a:srgbClr val="1B3E24"/>
-                </a:solidFill>
-              </a:defRPr>
-            </a:pPr>
-            <a:r>
-              <a:t>Afternoon Workshop Focus</a:t>
-            </a:r>
-          </a:p>
-          <a:p>
-            <a:pPr>
-              <a:spcBef>
-                <a:spcPts val="1000"/>
-              </a:spcBef>
-              <a:defRPr b="1" sz="1100">
-                <a:solidFill>
-                  <a:srgbClr val="142118"/>
-                </a:solidFill>
-              </a:defRPr>
-            </a:pPr>
-            <a:r>
-              <a:t>• Core Models: </a:t>
-            </a:r>
-            <a:r>
-              <a:rPr b="0">
-                <a:solidFill>
-                  <a:srgbClr val="526458"/>
-                </a:solidFill>
-              </a:rPr>
-              <a:t>Logistic Regression, Random Forests, XGBoost, and k-Means Clustering.</a:t>
-            </a:r>
-          </a:p>
-          <a:p>
-            <a:pPr>
-              <a:spcBef>
-                <a:spcPts val="1000"/>
-              </a:spcBef>
-              <a:defRPr b="1" sz="1100">
-                <a:solidFill>
-                  <a:srgbClr val="142118"/>
-                </a:solidFill>
-              </a:defRPr>
-            </a:pPr>
-            <a:r>
-              <a:t>• Step 1 (Flatten FHIR): </a:t>
-            </a:r>
-            <a:r>
-              <a:rPr b="0">
-                <a:solidFill>
-                  <a:srgbClr val="526458"/>
-                </a:solidFill>
-              </a:rPr>
-              <a:t>In scripts/01_fhir_to_table.py, we parse real FHIR bundles and extract LOINC observations into tabular columns.</a:t>
-            </a:r>
-          </a:p>
-          <a:p>
-            <a:pPr>
-              <a:spcBef>
-                <a:spcPts val="1000"/>
-              </a:spcBef>
-              <a:defRPr b="1" sz="1100">
-                <a:solidFill>
-                  <a:srgbClr val="142118"/>
-                </a:solidFill>
-              </a:defRPr>
-            </a:pPr>
-            <a:r>
-              <a:t>• Step 3 (Train Pipelines): </a:t>
-            </a:r>
-            <a:r>
-              <a:rPr b="0">
-                <a:solidFill>
-                  <a:srgbClr val="526458"/>
-                </a:solidFill>
-              </a:rPr>
-              <a:t>We fit Logistic Regression and Random Forest models to predict malignancy from 30 cell nucleus features.</a:t>
+              <a:t>Different Math, Different Algorithms:</a:t>
+            </a:r>
+          </a:p>
+          <a:p>
+            <a:pPr>
+              <a:spcBef>
+                <a:spcPts val="400"/>
+              </a:spcBef>
+              <a:defRPr b="1" sz="1350">
+                <a:solidFill>
+                  <a:srgbClr val="FFFFFF"/>
+                </a:solidFill>
+              </a:defRPr>
+            </a:pPr>
+            <a:r>
+              <a:t>There is no single 'Health AI algorithm.' Tabular data requires gradient trees; radiology requires 3D convolution; telemetry requires temporal state spaces; notes require LLMs.</a:t>
             </a:r>
           </a:p>
         </p:txBody>
@@ -6385,7 +6392,7 @@
               </a:defRPr>
             </a:pPr>
             <a:r>
-              <a:t>PHASE 2 · MODALITY 2</a:t>
+              <a:t>PHASE 2 · MODALITY 1</a:t>
             </a:r>
           </a:p>
         </p:txBody>
@@ -6421,7 +6428,7 @@
               </a:defRPr>
             </a:pPr>
             <a:r>
-              <a:t>Spatial &amp; Imaging Data: Computer Vision in Medicine</a:t>
+              <a:t>Tabular Data: The Classical Machine Learning Engine</a:t>
             </a:r>
           </a:p>
         </p:txBody>
@@ -6457,7 +6464,7 @@
               </a:defRPr>
             </a:pPr>
             <a:r>
-              <a:t>Radiographs, 3D CT/MRI scans, and gigapixel histology whole-slide images</a:t>
+              <a:t>Structured numeric matrices powering clinical risk stratification and lab assays</a:t>
             </a:r>
           </a:p>
         </p:txBody>
@@ -6495,7 +6502,7 @@
         <p:spPr>
           <a:xfrm>
             <a:off x="731520" y="1828800"/>
-            <a:ext cx="10698480" cy="4389120"/>
+            <a:ext cx="5120640" cy="4389120"/>
           </a:xfrm>
           <a:prstGeom prst="roundRect">
             <a:avLst/>
@@ -6524,7 +6531,7 @@
           </a:fontRef>
         </p:style>
         <p:txBody>
-          <a:bodyPr rtlCol="0" anchor="ctr" lIns="365760" rIns="365760" tIns="365760"/>
+          <a:bodyPr rtlCol="0" anchor="ctr" lIns="320040" rIns="320040" tIns="320040"/>
           <a:lstStyle/>
           <a:p>
             <a:pPr algn="ctr">
@@ -6535,7 +6542,7 @@
               </a:defRPr>
             </a:pPr>
             <a:r>
-              <a:t>HIGH-DIMENSIONAL SPATIAL TENSORS</a:t>
+              <a:t>DATA REPRESENTATION</a:t>
             </a:r>
           </a:p>
           <a:p>
@@ -6543,14 +6550,14 @@
               <a:spcBef>
                 <a:spcPts val="600"/>
               </a:spcBef>
-              <a:defRPr b="1" sz="2000">
+              <a:defRPr b="1" sz="1800">
                 <a:solidFill>
                   <a:srgbClr val="1B3E24"/>
                 </a:solidFill>
               </a:defRPr>
             </a:pPr>
             <a:r>
-              <a:t>From 2D X-Rays to 3D/4D Volumetric Tensors</a:t>
+              <a:t>2D Matrices: X in R^{N x D}</a:t>
             </a:r>
           </a:p>
           <a:p>
@@ -6558,14 +6565,14 @@
               <a:spcBef>
                 <a:spcPts val="1000"/>
               </a:spcBef>
-              <a:defRPr b="1" sz="1150">
+              <a:defRPr b="1" sz="1100">
                 <a:solidFill>
                   <a:srgbClr val="142118"/>
                 </a:solidFill>
               </a:defRPr>
             </a:pPr>
             <a:r>
-              <a:t>• The DICOM Standard: </a:t>
+              <a:t>• Clinical Sources: </a:t>
             </a:r>
             <a:r>
               <a:rPr b="0">
@@ -6573,7 +6580,7 @@
                   <a:srgbClr val="526458"/>
                 </a:solidFill>
               </a:rPr>
-              <a:t>Medical images are not simple JPEGs. They are DICOM files storing calibrated pixel arrays alongside spatial metadata (slice thickness, magnetic field strength, patient positioning).</a:t>
+              <a:t>Automated lab panels (glucose, creatinine), vital signs, cell morphometry from biopsies, and patient demographics.</a:t>
             </a:r>
           </a:p>
           <a:p>
@@ -6581,14 +6588,14 @@
               <a:spcBef>
                 <a:spcPts val="1000"/>
               </a:spcBef>
-              <a:defRPr b="1" sz="1150">
+              <a:defRPr b="1" sz="1100">
                 <a:solidFill>
                   <a:srgbClr val="142118"/>
                 </a:solidFill>
               </a:defRPr>
             </a:pPr>
             <a:r>
-              <a:t>• Mathematical Format: </a:t>
+              <a:t>• Mathematical Structure: </a:t>
             </a:r>
             <a:r>
               <a:rPr b="0">
@@ -6596,7 +6603,7 @@
                   <a:srgbClr val="526458"/>
                 </a:solidFill>
               </a:rPr>
-              <a:t>Tensors in R^{C x D x H x W} where C = Channels/Sequences, D = Depth/Slices, H, W = Image dimensions. Whole Slide Images (WSI) reach 100,000 x 100,000 pixels.</a:t>
+              <a:t>A rectangular table of N patients (rows) by D features (columns). Targets y in {0, 1}.</a:t>
             </a:r>
           </a:p>
           <a:p>
@@ -6604,14 +6611,14 @@
               <a:spcBef>
                 <a:spcPts val="1000"/>
               </a:spcBef>
-              <a:defRPr b="1" sz="1150">
+              <a:defRPr b="1" sz="1100">
                 <a:solidFill>
                   <a:srgbClr val="142118"/>
                 </a:solidFill>
               </a:defRPr>
             </a:pPr>
             <a:r>
-              <a:t>• AI Architectures: </a:t>
+              <a:t>• Strict Requirements: </a:t>
             </a:r>
             <a:r>
               <a:rPr b="0">
@@ -6619,7 +6626,76 @@
                   <a:srgbClr val="526458"/>
                 </a:solidFill>
               </a:rPr>
-              <a:t>Convolutional Neural Networks (ResNet, EfficientNet), Vision Transformers (ViT), and U-Net encoder-decoder models for anatomical tumor segmentation.</a:t>
+              <a:t>Every cell must be a valid float. Algorithms cannot handle raw nested JSON or string codes without preprocessing.</a:t>
+            </a:r>
+          </a:p>
+        </p:txBody>
+      </p:sp>
+      <p:sp>
+        <p:nvSpPr>
+          <p:cNvPr id="8" name="Rounded Rectangle 7"/>
+          <p:cNvSpPr/>
+          <p:nvPr/>
+        </p:nvSpPr>
+        <p:spPr>
+          <a:xfrm>
+            <a:off x="6217920" y="1828800"/>
+            <a:ext cx="5212080" cy="4389120"/>
+          </a:xfrm>
+          <a:prstGeom prst="roundRect">
+            <a:avLst/>
+          </a:prstGeom>
+          <a:solidFill>
+            <a:srgbClr val="FFFFFF"/>
+          </a:solidFill>
+          <a:ln w="15240">
+            <a:solidFill>
+              <a:srgbClr val="D2DCD4"/>
+            </a:solidFill>
+          </a:ln>
+        </p:spPr>
+        <p:style>
+          <a:lnRef idx="1">
+            <a:schemeClr val="accent1"/>
+          </a:lnRef>
+          <a:fillRef idx="3">
+            <a:schemeClr val="accent1"/>
+          </a:fillRef>
+          <a:effectRef idx="2">
+            <a:schemeClr val="accent1"/>
+          </a:effectRef>
+          <a:fontRef idx="minor">
+            <a:schemeClr val="lt1"/>
+          </a:fontRef>
+        </p:style>
+        <p:txBody>
+          <a:bodyPr rtlCol="0" anchor="ctr" lIns="320040" rIns="320040" tIns="320040"/>
+          <a:lstStyle/>
+          <a:p>
+            <a:pPr algn="ctr">
+              <a:defRPr b="1" sz="1100">
+                <a:solidFill>
+                  <a:srgbClr val="94BA33"/>
+                </a:solidFill>
+              </a:defRPr>
+            </a:pPr>
+            <a:r>
+              <a:t>ALGORITHMS &amp; WORKSHOP LINK</a:t>
+            </a:r>
+          </a:p>
+          <a:p>
+            <a:pPr>
+              <a:spcBef>
+                <a:spcPts val="600"/>
+              </a:spcBef>
+              <a:defRPr b="1" sz="1800">
+                <a:solidFill>
+                  <a:srgbClr val="1B3E24"/>
+                </a:solidFill>
+              </a:defRPr>
+            </a:pPr>
+            <a:r>
+              <a:t>Afternoon Workshop Focus</a:t>
             </a:r>
           </a:p>
           <a:p>
@@ -6627,14 +6703,14 @@
               <a:spcBef>
                 <a:spcPts val="1000"/>
               </a:spcBef>
-              <a:defRPr b="1" sz="1150">
+              <a:defRPr b="1" sz="1100">
                 <a:solidFill>
                   <a:srgbClr val="142118"/>
                 </a:solidFill>
               </a:defRPr>
             </a:pPr>
             <a:r>
-              <a:t>• Clinical Challenge: </a:t>
+              <a:t>• Core Models: </a:t>
             </a:r>
             <a:r>
               <a:rPr b="0">
@@ -6642,7 +6718,53 @@
                   <a:srgbClr val="526458"/>
                 </a:solidFill>
               </a:rPr>
-              <a:t>Multi-gigabyte file sizes, spatial resolution vs compute memory trade-offs, and requirement for expert radiologist pixel-level annotations.</a:t>
+              <a:t>Logistic Regression, Random Forests, XGBoost, and k-Means Clustering.</a:t>
+            </a:r>
+          </a:p>
+          <a:p>
+            <a:pPr>
+              <a:spcBef>
+                <a:spcPts val="1000"/>
+              </a:spcBef>
+              <a:defRPr b="1" sz="1100">
+                <a:solidFill>
+                  <a:srgbClr val="142118"/>
+                </a:solidFill>
+              </a:defRPr>
+            </a:pPr>
+            <a:r>
+              <a:t>• Step 1 (Flatten FHIR): </a:t>
+            </a:r>
+            <a:r>
+              <a:rPr b="0">
+                <a:solidFill>
+                  <a:srgbClr val="526458"/>
+                </a:solidFill>
+              </a:rPr>
+              <a:t>In scripts/01_fhir_to_table.py, we parse real FHIR bundles and extract LOINC observations into tabular columns.</a:t>
+            </a:r>
+          </a:p>
+          <a:p>
+            <a:pPr>
+              <a:spcBef>
+                <a:spcPts val="1000"/>
+              </a:spcBef>
+              <a:defRPr b="1" sz="1100">
+                <a:solidFill>
+                  <a:srgbClr val="142118"/>
+                </a:solidFill>
+              </a:defRPr>
+            </a:pPr>
+            <a:r>
+              <a:t>• Step 3 (Train Pipelines): </a:t>
+            </a:r>
+            <a:r>
+              <a:rPr b="0">
+                <a:solidFill>
+                  <a:srgbClr val="526458"/>
+                </a:solidFill>
+              </a:rPr>
+              <a:t>We fit Logistic Regression and Random Forest models to predict malignancy from 30 cell nucleus features.</a:t>
             </a:r>
           </a:p>
         </p:txBody>
@@ -6739,7 +6861,7 @@
               </a:defRPr>
             </a:pPr>
             <a:r>
-              <a:t>PHASE 2 · MODALITY 3</a:t>
+              <a:t>PHASE 2 · MODALITY 2</a:t>
             </a:r>
           </a:p>
         </p:txBody>
@@ -6775,7 +6897,7 @@
               </a:defRPr>
             </a:pPr>
             <a:r>
-              <a:t>Time-Series &amp; Telemetry: Continuous Physiological Streams</a:t>
+              <a:t>Spatial &amp; Imaging Data: Computer Vision in Medicine</a:t>
             </a:r>
           </a:p>
         </p:txBody>
@@ -6811,7 +6933,7 @@
               </a:defRPr>
             </a:pPr>
             <a:r>
-              <a:t>High-frequency sensor waveforms from ICU monitors, ECG leads, and wearable devices</a:t>
+              <a:t>Radiographs, 3D CT/MRI scans, and gigapixel histology whole-slide images</a:t>
             </a:r>
           </a:p>
         </p:txBody>
@@ -6884,12 +7006,12 @@
             <a:pPr algn="ctr">
               <a:defRPr b="1" sz="1100">
                 <a:solidFill>
-                  <a:srgbClr val="94BA33"/>
-                </a:solidFill>
-              </a:defRPr>
-            </a:pPr>
-            <a:r>
-              <a:t>SEQUENTIAL TEMPORAL SIGNALS</a:t>
+                  <a:srgbClr val="285C36"/>
+                </a:solidFill>
+              </a:defRPr>
+            </a:pPr>
+            <a:r>
+              <a:t>HIGH-DIMENSIONAL SPATIAL TENSORS</a:t>
             </a:r>
           </a:p>
           <a:p>
@@ -6904,7 +7026,7 @@
               </a:defRPr>
             </a:pPr>
             <a:r>
-              <a:t>Streaming Signals at 250 Hz to 1 Sample/Hour</a:t>
+              <a:t>From 2D X-Rays to 3D/4D Volumetric Tensors</a:t>
             </a:r>
           </a:p>
           <a:p>
@@ -6919,7 +7041,7 @@
               </a:defRPr>
             </a:pPr>
             <a:r>
-              <a:t>• Clinical Telemetry Streams: </a:t>
+              <a:t>• The DICOM Standard: </a:t>
             </a:r>
             <a:r>
               <a:rPr b="0">
@@ -6927,7 +7049,7 @@
                   <a:srgbClr val="526458"/>
                 </a:solidFill>
               </a:rPr>
-              <a:t>12-lead Electrocardiography (ECG), continuous arterial blood pressure in ICUs, pulse oximetry (PPG), and Continuous Glucose Monitors (CGM).</a:t>
+              <a:t>Medical images are not simple JPEGs. They are DICOM files storing calibrated pixel arrays alongside spatial metadata (slice thickness, magnetic field strength, patient positioning).</a:t>
             </a:r>
           </a:p>
           <a:p>
@@ -6942,7 +7064,7 @@
               </a:defRPr>
             </a:pPr>
             <a:r>
-              <a:t>• Mathematical Representation: </a:t>
+              <a:t>• Mathematical Format: </a:t>
             </a:r>
             <a:r>
               <a:rPr b="0">
@@ -6950,7 +7072,7 @@
                   <a:srgbClr val="526458"/>
                 </a:solidFill>
               </a:rPr>
-              <a:t>1D sequential arrays x(t) sampled at high frequency. Processed via sliding windows, Fast Fourier Transforms (FFT), or Continuous Wavelet Transforms.</a:t>
+              <a:t>Tensors in R^{C x D x H x W} where C = Channels/Sequences, D = Depth/Slices, H, W = Image dimensions. Whole Slide Images (WSI) reach 100,000 x 100,000 pixels.</a:t>
             </a:r>
           </a:p>
           <a:p>
@@ -6965,7 +7087,7 @@
               </a:defRPr>
             </a:pPr>
             <a:r>
-              <a:t>• Algorithms: </a:t>
+              <a:t>• AI Architectures: </a:t>
             </a:r>
             <a:r>
               <a:rPr b="0">
@@ -6973,7 +7095,7 @@
                   <a:srgbClr val="526458"/>
                 </a:solidFill>
               </a:rPr>
-              <a:t>Recurrent Neural Networks (LSTMs), 1D Temporal Convolutional Networks (TCN), and modern State Space Models (Mamba) for predicting acute sepsis 6 hours in advance.</a:t>
+              <a:t>Convolutional Neural Networks (ResNet, EfficientNet), Vision Transformers (ViT), and U-Net encoder-decoder models for anatomical tumor segmentation.</a:t>
             </a:r>
           </a:p>
           <a:p>
@@ -6988,7 +7110,7 @@
               </a:defRPr>
             </a:pPr>
             <a:r>
-              <a:t>• Engineering Reality: </a:t>
+              <a:t>• Clinical Challenge: </a:t>
             </a:r>
             <a:r>
               <a:rPr b="0">
@@ -6996,7 +7118,7 @@
                   <a:srgbClr val="526458"/>
                 </a:solidFill>
               </a:rPr>
-              <a:t>Sensor motion artifacts, loose electrodes, and non-stationary baseline drift require heavy digital signal processing before ML.</a:t>
+              <a:t>Multi-gigabyte file sizes, spatial resolution vs compute memory trade-offs, and requirement for expert radiologist pixel-level annotations.</a:t>
             </a:r>
           </a:p>
         </p:txBody>
@@ -7093,7 +7215,7 @@
               </a:defRPr>
             </a:pPr>
             <a:r>
-              <a:t>PHASE 2 · MODALITY 4</a:t>
+              <a:t>PHASE 2 · MODALITY 3</a:t>
             </a:r>
           </a:p>
         </p:txBody>
@@ -7129,7 +7251,7 @@
               </a:defRPr>
             </a:pPr>
             <a:r>
-              <a:t>Unstructured Text: What 90% of People Mean by 'AI'</a:t>
+              <a:t>Time-Series &amp; Telemetry: Continuous Physiological Streams</a:t>
             </a:r>
           </a:p>
         </p:txBody>
@@ -7165,7 +7287,7 @@
               </a:defRPr>
             </a:pPr>
             <a:r>
-              <a:t>Physician progress notes, discharge summaries, operative logs, and clinical LLMs</a:t>
+              <a:t>High-frequency sensor waveforms from ICU monitors, ECG leads, and wearable devices</a:t>
             </a:r>
           </a:p>
         </p:txBody>
@@ -7203,7 +7325,7 @@
         <p:spPr>
           <a:xfrm>
             <a:off x="731520" y="1828800"/>
-            <a:ext cx="5120640" cy="4389120"/>
+            <a:ext cx="10698480" cy="4389120"/>
           </a:xfrm>
           <a:prstGeom prst="roundRect">
             <a:avLst/>
@@ -7232,18 +7354,18 @@
           </a:fontRef>
         </p:style>
         <p:txBody>
-          <a:bodyPr rtlCol="0" anchor="ctr" lIns="320040" rIns="320040" tIns="320040"/>
+          <a:bodyPr rtlCol="0" anchor="ctr" lIns="365760" rIns="365760" tIns="365760"/>
           <a:lstStyle/>
           <a:p>
             <a:pPr algn="ctr">
               <a:defRPr b="1" sz="1100">
                 <a:solidFill>
-                  <a:srgbClr val="285C36"/>
-                </a:solidFill>
-              </a:defRPr>
-            </a:pPr>
-            <a:r>
-              <a:t>THE UNSTRUCTURED MAJORITY</a:t>
+                  <a:srgbClr val="94BA33"/>
+                </a:solidFill>
+              </a:defRPr>
+            </a:pPr>
+            <a:r>
+              <a:t>SEQUENTIAL TEMPORAL SIGNALS</a:t>
             </a:r>
           </a:p>
           <a:p>
@@ -7251,14 +7373,14 @@
               <a:spcBef>
                 <a:spcPts val="600"/>
               </a:spcBef>
-              <a:defRPr b="1" sz="1800">
+              <a:defRPr b="1" sz="2000">
                 <a:solidFill>
                   <a:srgbClr val="1B3E24"/>
                 </a:solidFill>
               </a:defRPr>
             </a:pPr>
             <a:r>
-              <a:t>80% of Health Data Lives in Text</a:t>
+              <a:t>Streaming Signals at 250 Hz to 1 Sample/Hour</a:t>
             </a:r>
           </a:p>
           <a:p>
@@ -7266,14 +7388,14 @@
               <a:spcBef>
                 <a:spcPts val="1000"/>
               </a:spcBef>
-              <a:defRPr b="1" sz="1100">
+              <a:defRPr b="1" sz="1150">
                 <a:solidFill>
                   <a:srgbClr val="142118"/>
                 </a:solidFill>
               </a:defRPr>
             </a:pPr>
             <a:r>
-              <a:t>• Clinical Narratives: </a:t>
+              <a:t>• Clinical Telemetry Streams: </a:t>
             </a:r>
             <a:r>
               <a:rPr b="0">
@@ -7281,7 +7403,7 @@
                   <a:srgbClr val="526458"/>
                 </a:solidFill>
               </a:rPr>
-              <a:t>Doctors do not fill out structured dropdown forms; they write narrative stories explaining clinical reasoning, nuance, and history.</a:t>
+              <a:t>12-lead Electrocardiography (ECG), continuous arterial blood pressure in ICUs, pulse oximetry (PPG), and Continuous Glucose Monitors (CGM).</a:t>
             </a:r>
           </a:p>
           <a:p>
@@ -7289,14 +7411,14 @@
               <a:spcBef>
                 <a:spcPts val="1000"/>
               </a:spcBef>
-              <a:defRPr b="1" sz="1100">
+              <a:defRPr b="1" sz="1150">
                 <a:solidFill>
                   <a:srgbClr val="142118"/>
                 </a:solidFill>
               </a:defRPr>
             </a:pPr>
             <a:r>
-              <a:t>• Complex Medical Jargon: </a:t>
+              <a:t>• Mathematical Representation: </a:t>
             </a:r>
             <a:r>
               <a:rPr b="0">
@@ -7304,7 +7426,7 @@
                   <a:srgbClr val="526458"/>
                 </a:solidFill>
               </a:rPr>
-              <a:t>Heavy abbreviations ('sob' = shortness of breath, not an insult!), medical shorthand, and typos make rule-based parsers fail.</a:t>
+              <a:t>1D sequential arrays x(t) sampled at high frequency. Processed via sliding windows, Fast Fourier Transforms (FFT), or Continuous Wavelet Transforms.</a:t>
             </a:r>
           </a:p>
           <a:p>
@@ -7312,14 +7434,14 @@
               <a:spcBef>
                 <a:spcPts val="1000"/>
               </a:spcBef>
-              <a:defRPr b="1" sz="1100">
+              <a:defRPr b="1" sz="1150">
                 <a:solidFill>
                   <a:srgbClr val="142118"/>
                 </a:solidFill>
               </a:defRPr>
             </a:pPr>
             <a:r>
-              <a:t>• Rich Hidden Signal: </a:t>
+              <a:t>• Algorithms: </a:t>
             </a:r>
             <a:r>
               <a:rPr b="0">
@@ -7327,76 +7449,7 @@
                   <a:srgbClr val="526458"/>
                 </a:solidFill>
               </a:rPr>
-              <a:t>Social determinants of health (living alone, smoking history) are only documented in free-text clinical notes.</a:t>
-            </a:r>
-          </a:p>
-        </p:txBody>
-      </p:sp>
-      <p:sp>
-        <p:nvSpPr>
-          <p:cNvPr id="8" name="Rounded Rectangle 7"/>
-          <p:cNvSpPr/>
-          <p:nvPr/>
-        </p:nvSpPr>
-        <p:spPr>
-          <a:xfrm>
-            <a:off x="6217920" y="1828800"/>
-            <a:ext cx="5212080" cy="4389120"/>
-          </a:xfrm>
-          <a:prstGeom prst="roundRect">
-            <a:avLst/>
-          </a:prstGeom>
-          <a:solidFill>
-            <a:srgbClr val="FFFFFF"/>
-          </a:solidFill>
-          <a:ln w="15240">
-            <a:solidFill>
-              <a:srgbClr val="D2DCD4"/>
-            </a:solidFill>
-          </a:ln>
-        </p:spPr>
-        <p:style>
-          <a:lnRef idx="1">
-            <a:schemeClr val="accent1"/>
-          </a:lnRef>
-          <a:fillRef idx="3">
-            <a:schemeClr val="accent1"/>
-          </a:fillRef>
-          <a:effectRef idx="2">
-            <a:schemeClr val="accent1"/>
-          </a:effectRef>
-          <a:fontRef idx="minor">
-            <a:schemeClr val="lt1"/>
-          </a:fontRef>
-        </p:style>
-        <p:txBody>
-          <a:bodyPr rtlCol="0" anchor="ctr" lIns="320040" rIns="320040" tIns="320040"/>
-          <a:lstStyle/>
-          <a:p>
-            <a:pPr algn="ctr">
-              <a:defRPr b="1" sz="1100">
-                <a:solidFill>
-                  <a:srgbClr val="94BA33"/>
-                </a:solidFill>
-              </a:defRPr>
-            </a:pPr>
-            <a:r>
-              <a:t>THE GENAI PARADIGM</a:t>
-            </a:r>
-          </a:p>
-          <a:p>
-            <a:pPr>
-              <a:spcBef>
-                <a:spcPts val="600"/>
-              </a:spcBef>
-              <a:defRPr b="1" sz="1800">
-                <a:solidFill>
-                  <a:srgbClr val="1B3E24"/>
-                </a:solidFill>
-              </a:defRPr>
-            </a:pPr>
-            <a:r>
-              <a:t>Clinical LLMs &amp; Copilots</a:t>
+              <a:t>Recurrent Neural Networks (LSTMs), 1D Temporal Convolutional Networks (TCN), and modern State Space Models (Mamba) for predicting acute sepsis 6 hours in advance.</a:t>
             </a:r>
           </a:p>
           <a:p>
@@ -7404,14 +7457,14 @@
               <a:spcBef>
                 <a:spcPts val="1000"/>
               </a:spcBef>
-              <a:defRPr b="1" sz="1100">
+              <a:defRPr b="1" sz="1150">
                 <a:solidFill>
                   <a:srgbClr val="142118"/>
                 </a:solidFill>
               </a:defRPr>
             </a:pPr>
             <a:r>
-              <a:t>• Medical Foundation Models: </a:t>
+              <a:t>• Engineering Reality: </a:t>
             </a:r>
             <a:r>
               <a:rPr b="0">
@@ -7419,53 +7472,7 @@
                   <a:srgbClr val="526458"/>
                 </a:solidFill>
               </a:rPr>
-              <a:t>Specialized models (Med-PaLM 2, BioGPT, ClinicalBERT) trained on medical literature and clinical corpora.</a:t>
-            </a:r>
-          </a:p>
-          <a:p>
-            <a:pPr>
-              <a:spcBef>
-                <a:spcPts val="1000"/>
-              </a:spcBef>
-              <a:defRPr b="1" sz="1100">
-                <a:solidFill>
-                  <a:srgbClr val="142118"/>
-                </a:solidFill>
-              </a:defRPr>
-            </a:pPr>
-            <a:r>
-              <a:t>• Ambient Clinical Scribing: </a:t>
-            </a:r>
-            <a:r>
-              <a:rPr b="0">
-                <a:solidFill>
-                  <a:srgbClr val="526458"/>
-                </a:solidFill>
-              </a:rPr>
-              <a:t>Microphones listen to doctor-patient conversation in real time and automatically draft the clinical note into the EHR.</a:t>
-            </a:r>
-          </a:p>
-          <a:p>
-            <a:pPr>
-              <a:spcBef>
-                <a:spcPts val="1000"/>
-              </a:spcBef>
-              <a:defRPr b="1" sz="1100">
-                <a:solidFill>
-                  <a:srgbClr val="142118"/>
-                </a:solidFill>
-              </a:defRPr>
-            </a:pPr>
-            <a:r>
-              <a:t>• Clinical Question Answering: </a:t>
-            </a:r>
-            <a:r>
-              <a:rPr b="0">
-                <a:solidFill>
-                  <a:srgbClr val="526458"/>
-                </a:solidFill>
-              </a:rPr>
-              <a:t>Synthesizing complex multi-year patient records into concise diagnostic briefings for busy clinicians.</a:t>
+              <a:t>Sensor motion artifacts, loose electrodes, and non-stationary baseline drift require heavy digital signal processing before ML.</a:t>
             </a:r>
           </a:p>
         </p:txBody>
@@ -8058,7 +8065,7 @@
               </a:defRPr>
             </a:pPr>
             <a:r>
-              <a:t>PHASE 2 · LLMS &amp; FORMATS</a:t>
+              <a:t>PHASE 2 · MODALITY 4</a:t>
             </a:r>
           </a:p>
         </p:txBody>
@@ -8094,7 +8101,7 @@
               </a:defRPr>
             </a:pPr>
             <a:r>
-              <a:t>The Formatting Dilemma: Why LLMs Choke on Raw FHIR</a:t>
+              <a:t>Unstructured Text: What 90% of People Mean by 'AI'</a:t>
             </a:r>
           </a:p>
         </p:txBody>
@@ -8130,7 +8137,7 @@
               </a:defRPr>
             </a:pPr>
             <a:r>
-              <a:t>Nested JSON metadata dilutes clinical signal; Markdown tables provide the cure</a:t>
+              <a:t>Physician progress notes, discharge summaries, operative logs, and clinical LLMs</a:t>
             </a:r>
           </a:p>
         </p:txBody>
@@ -8169,144 +8176,6 @@
           <a:xfrm>
             <a:off x="731520" y="1828800"/>
             <a:ext cx="5120640" cy="4389120"/>
-          </a:xfrm>
-          <a:prstGeom prst="roundRect">
-            <a:avLst/>
-          </a:prstGeom>
-          <a:solidFill>
-            <a:srgbClr val="FFFFFF"/>
-          </a:solidFill>
-          <a:ln w="15240">
-            <a:solidFill>
-              <a:srgbClr val="C0392B"/>
-            </a:solidFill>
-          </a:ln>
-        </p:spPr>
-        <p:style>
-          <a:lnRef idx="1">
-            <a:schemeClr val="accent1"/>
-          </a:lnRef>
-          <a:fillRef idx="3">
-            <a:schemeClr val="accent1"/>
-          </a:fillRef>
-          <a:effectRef idx="2">
-            <a:schemeClr val="accent1"/>
-          </a:effectRef>
-          <a:fontRef idx="minor">
-            <a:schemeClr val="lt1"/>
-          </a:fontRef>
-        </p:style>
-        <p:txBody>
-          <a:bodyPr rtlCol="0" anchor="ctr" lIns="320040" rIns="320040" tIns="320040"/>
-          <a:lstStyle/>
-          <a:p>
-            <a:pPr algn="ctr">
-              <a:defRPr b="1" sz="1100">
-                <a:solidFill>
-                  <a:srgbClr val="C0392B"/>
-                </a:solidFill>
-              </a:defRPr>
-            </a:pPr>
-            <a:r>
-              <a:t>THE RAW JSON TRAP</a:t>
-            </a:r>
-          </a:p>
-          <a:p>
-            <a:pPr>
-              <a:spcBef>
-                <a:spcPts val="600"/>
-              </a:spcBef>
-              <a:defRPr b="1" sz="1800">
-                <a:solidFill>
-                  <a:srgbClr val="1B3E24"/>
-                </a:solidFill>
-              </a:defRPr>
-            </a:pPr>
-            <a:r>
-              <a:t>Token Bloat &amp; Hallucination</a:t>
-            </a:r>
-          </a:p>
-          <a:p>
-            <a:pPr>
-              <a:spcBef>
-                <a:spcPts val="1000"/>
-              </a:spcBef>
-              <a:defRPr b="1" sz="1100">
-                <a:solidFill>
-                  <a:srgbClr val="142118"/>
-                </a:solidFill>
-              </a:defRPr>
-            </a:pPr>
-            <a:r>
-              <a:t>• Severe Token Overhead: </a:t>
-            </a:r>
-            <a:r>
-              <a:rPr b="0">
-                <a:solidFill>
-                  <a:srgbClr val="526458"/>
-                </a:solidFill>
-              </a:rPr>
-              <a:t>A single FHIR Observation consumes 300–500 tokens of nested boilerplate (resourceType, meta, system, coding). A patient chart burns 50,000+ tokens!</a:t>
-            </a:r>
-          </a:p>
-          <a:p>
-            <a:pPr>
-              <a:spcBef>
-                <a:spcPts val="1000"/>
-              </a:spcBef>
-              <a:defRPr b="1" sz="1100">
-                <a:solidFill>
-                  <a:srgbClr val="142118"/>
-                </a:solidFill>
-              </a:defRPr>
-            </a:pPr>
-            <a:r>
-              <a:t>• Diluted Clinical Signal: </a:t>
-            </a:r>
-            <a:r>
-              <a:rPr b="0">
-                <a:solidFill>
-                  <a:srgbClr val="526458"/>
-                </a:solidFill>
-              </a:rPr>
-              <a:t>The critical clinical number ('Glucose: 118') is buried inside hundreds of curly braces, degrading LLM attention.</a:t>
-            </a:r>
-          </a:p>
-          <a:p>
-            <a:pPr>
-              <a:spcBef>
-                <a:spcPts val="1000"/>
-              </a:spcBef>
-              <a:defRPr b="1" sz="1100">
-                <a:solidFill>
-                  <a:srgbClr val="142118"/>
-                </a:solidFill>
-              </a:defRPr>
-            </a:pPr>
-            <a:r>
-              <a:t>• Hallucination Risk: </a:t>
-            </a:r>
-            <a:r>
-              <a:rPr b="0">
-                <a:solidFill>
-                  <a:srgbClr val="526458"/>
-                </a:solidFill>
-              </a:rPr>
-              <a:t>High token boilerplate increases the probability that an LLM misassociates a test value with the wrong timestamp.</a:t>
-            </a:r>
-          </a:p>
-        </p:txBody>
-      </p:sp>
-      <p:sp>
-        <p:nvSpPr>
-          <p:cNvPr id="8" name="Rounded Rectangle 7"/>
-          <p:cNvSpPr/>
-          <p:nvPr/>
-        </p:nvSpPr>
-        <p:spPr>
-          <a:xfrm>
-            <a:off x="6217920" y="1828800"/>
-            <a:ext cx="5212080" cy="4389120"/>
           </a:xfrm>
           <a:prstGeom prst="roundRect">
             <a:avLst/>
@@ -8341,12 +8210,150 @@
             <a:pPr algn="ctr">
               <a:defRPr b="1" sz="1100">
                 <a:solidFill>
+                  <a:srgbClr val="285C36"/>
+                </a:solidFill>
+              </a:defRPr>
+            </a:pPr>
+            <a:r>
+              <a:t>THE UNSTRUCTURED MAJORITY</a:t>
+            </a:r>
+          </a:p>
+          <a:p>
+            <a:pPr>
+              <a:spcBef>
+                <a:spcPts val="600"/>
+              </a:spcBef>
+              <a:defRPr b="1" sz="1800">
+                <a:solidFill>
+                  <a:srgbClr val="1B3E24"/>
+                </a:solidFill>
+              </a:defRPr>
+            </a:pPr>
+            <a:r>
+              <a:t>80% of Health Data Lives in Text</a:t>
+            </a:r>
+          </a:p>
+          <a:p>
+            <a:pPr>
+              <a:spcBef>
+                <a:spcPts val="1000"/>
+              </a:spcBef>
+              <a:defRPr b="1" sz="1100">
+                <a:solidFill>
+                  <a:srgbClr val="142118"/>
+                </a:solidFill>
+              </a:defRPr>
+            </a:pPr>
+            <a:r>
+              <a:t>• Clinical Narratives: </a:t>
+            </a:r>
+            <a:r>
+              <a:rPr b="0">
+                <a:solidFill>
+                  <a:srgbClr val="526458"/>
+                </a:solidFill>
+              </a:rPr>
+              <a:t>Doctors do not fill out structured dropdown forms; they write narrative stories explaining clinical reasoning, nuance, and history.</a:t>
+            </a:r>
+          </a:p>
+          <a:p>
+            <a:pPr>
+              <a:spcBef>
+                <a:spcPts val="1000"/>
+              </a:spcBef>
+              <a:defRPr b="1" sz="1100">
+                <a:solidFill>
+                  <a:srgbClr val="142118"/>
+                </a:solidFill>
+              </a:defRPr>
+            </a:pPr>
+            <a:r>
+              <a:t>• Complex Medical Jargon: </a:t>
+            </a:r>
+            <a:r>
+              <a:rPr b="0">
+                <a:solidFill>
+                  <a:srgbClr val="526458"/>
+                </a:solidFill>
+              </a:rPr>
+              <a:t>Heavy abbreviations ('sob' = shortness of breath, not an insult!), medical shorthand, and typos make rule-based parsers fail.</a:t>
+            </a:r>
+          </a:p>
+          <a:p>
+            <a:pPr>
+              <a:spcBef>
+                <a:spcPts val="1000"/>
+              </a:spcBef>
+              <a:defRPr b="1" sz="1100">
+                <a:solidFill>
+                  <a:srgbClr val="142118"/>
+                </a:solidFill>
+              </a:defRPr>
+            </a:pPr>
+            <a:r>
+              <a:t>• Rich Hidden Signal: </a:t>
+            </a:r>
+            <a:r>
+              <a:rPr b="0">
+                <a:solidFill>
+                  <a:srgbClr val="526458"/>
+                </a:solidFill>
+              </a:rPr>
+              <a:t>Social determinants of health (living alone, smoking history) are only documented in free-text clinical notes.</a:t>
+            </a:r>
+          </a:p>
+        </p:txBody>
+      </p:sp>
+      <p:sp>
+        <p:nvSpPr>
+          <p:cNvPr id="8" name="Rounded Rectangle 7"/>
+          <p:cNvSpPr/>
+          <p:nvPr/>
+        </p:nvSpPr>
+        <p:spPr>
+          <a:xfrm>
+            <a:off x="6217920" y="1828800"/>
+            <a:ext cx="5212080" cy="4389120"/>
+          </a:xfrm>
+          <a:prstGeom prst="roundRect">
+            <a:avLst/>
+          </a:prstGeom>
+          <a:solidFill>
+            <a:srgbClr val="FFFFFF"/>
+          </a:solidFill>
+          <a:ln w="15240">
+            <a:solidFill>
+              <a:srgbClr val="D2DCD4"/>
+            </a:solidFill>
+          </a:ln>
+        </p:spPr>
+        <p:style>
+          <a:lnRef idx="1">
+            <a:schemeClr val="accent1"/>
+          </a:lnRef>
+          <a:fillRef idx="3">
+            <a:schemeClr val="accent1"/>
+          </a:fillRef>
+          <a:effectRef idx="2">
+            <a:schemeClr val="accent1"/>
+          </a:effectRef>
+          <a:fontRef idx="minor">
+            <a:schemeClr val="lt1"/>
+          </a:fontRef>
+        </p:style>
+        <p:txBody>
+          <a:bodyPr rtlCol="0" anchor="ctr" lIns="320040" rIns="320040" tIns="320040"/>
+          <a:lstStyle/>
+          <a:p>
+            <a:pPr algn="ctr">
+              <a:defRPr b="1" sz="1100">
+                <a:solidFill>
                   <a:srgbClr val="94BA33"/>
                 </a:solidFill>
               </a:defRPr>
             </a:pPr>
             <a:r>
-              <a:t>THE MODERN SOLUTION</a:t>
+              <a:t>THE GENAI PARADIGM</a:t>
             </a:r>
           </a:p>
           <a:p>
@@ -8361,7 +8368,7 @@
               </a:defRPr>
             </a:pPr>
             <a:r>
-              <a:t>Clean Markdown (.md) Tables</a:t>
+              <a:t>Clinical LLMs &amp; Copilots</a:t>
             </a:r>
           </a:p>
           <a:p>
@@ -8376,7 +8383,7 @@
               </a:defRPr>
             </a:pPr>
             <a:r>
-              <a:t>• 60–75% Token Reduction: </a:t>
+              <a:t>• Medical Foundation Models: </a:t>
             </a:r>
             <a:r>
               <a:rPr b="0">
@@ -8384,7 +8391,7 @@
                   <a:srgbClr val="526458"/>
                 </a:solidFill>
               </a:rPr>
-              <a:t>Converting FHIR resources into clean Markdown tables preserves semantic clarity while stripping thousands of redundant JSON lines.</a:t>
+              <a:t>Specialized models (Med-PaLM 2, BioGPT, ClinicalBERT) trained on medical literature and clinical corpora.</a:t>
             </a:r>
           </a:p>
           <a:p>
@@ -8399,7 +8406,7 @@
               </a:defRPr>
             </a:pPr>
             <a:r>
-              <a:t>• Superior LLM Recall: </a:t>
+              <a:t>• Ambient Clinical Scribing: </a:t>
             </a:r>
             <a:r>
               <a:rPr b="0">
@@ -8407,7 +8414,7 @@
                   <a:srgbClr val="526458"/>
                 </a:solidFill>
               </a:rPr>
-              <a:t>Foundation models are pre-trained heavily on Markdown tables and bulleted text, leading to faster inference and zero syntactic hallucinations.</a:t>
+              <a:t>Microphones listen to doctor-patient conversation in real time and automatically draft the clinical note into the EHR.</a:t>
             </a:r>
           </a:p>
           <a:p>
@@ -8422,7 +8429,7 @@
               </a:defRPr>
             </a:pPr>
             <a:r>
-              <a:t>• Clean Architecture: </a:t>
+              <a:t>• Clinical Question Answering: </a:t>
             </a:r>
             <a:r>
               <a:rPr b="0">
@@ -8430,7 +8437,7 @@
                   <a:srgbClr val="526458"/>
                 </a:solidFill>
               </a:rPr>
-              <a:t>FHIR remains the backend database protocol; Markdown is the token-efficient presentation layer for LLM prompts.</a:t>
+              <a:t>Synthesizing complex multi-year patient records into concise diagnostic briefings for busy clinicians.</a:t>
             </a:r>
           </a:p>
         </p:txBody>
@@ -8527,7 +8534,7 @@
               </a:defRPr>
             </a:pPr>
             <a:r>
-              <a:t>PHASE 2 · AI AGENTS</a:t>
+              <a:t>PHASE 2 · LLMS &amp; FORMATS</a:t>
             </a:r>
           </a:p>
         </p:txBody>
@@ -8563,7 +8570,7 @@
               </a:defRPr>
             </a:pPr>
             <a:r>
-              <a:t>Clinical AI Agents: RAG &amp; Model Context Protocol (MCP)</a:t>
+              <a:t>The Formatting Dilemma: Why LLMs Choke on Raw FHIR</a:t>
             </a:r>
           </a:p>
         </p:txBody>
@@ -8599,7 +8606,7 @@
               </a:defRPr>
             </a:pPr>
             <a:r>
-              <a:t>Moving from passive chatbots to autonomous clinical copilots with deterministic tools</a:t>
+              <a:t>Nested JSON metadata dilutes clinical signal; Markdown tables provide the cure</a:t>
             </a:r>
           </a:p>
         </p:txBody>
@@ -8638,6 +8645,144 @@
           <a:xfrm>
             <a:off x="731520" y="1828800"/>
             <a:ext cx="5120640" cy="4389120"/>
+          </a:xfrm>
+          <a:prstGeom prst="roundRect">
+            <a:avLst/>
+          </a:prstGeom>
+          <a:solidFill>
+            <a:srgbClr val="FFFFFF"/>
+          </a:solidFill>
+          <a:ln w="15240">
+            <a:solidFill>
+              <a:srgbClr val="C0392B"/>
+            </a:solidFill>
+          </a:ln>
+        </p:spPr>
+        <p:style>
+          <a:lnRef idx="1">
+            <a:schemeClr val="accent1"/>
+          </a:lnRef>
+          <a:fillRef idx="3">
+            <a:schemeClr val="accent1"/>
+          </a:fillRef>
+          <a:effectRef idx="2">
+            <a:schemeClr val="accent1"/>
+          </a:effectRef>
+          <a:fontRef idx="minor">
+            <a:schemeClr val="lt1"/>
+          </a:fontRef>
+        </p:style>
+        <p:txBody>
+          <a:bodyPr rtlCol="0" anchor="ctr" lIns="320040" rIns="320040" tIns="320040"/>
+          <a:lstStyle/>
+          <a:p>
+            <a:pPr algn="ctr">
+              <a:defRPr b="1" sz="1100">
+                <a:solidFill>
+                  <a:srgbClr val="C0392B"/>
+                </a:solidFill>
+              </a:defRPr>
+            </a:pPr>
+            <a:r>
+              <a:t>THE RAW JSON TRAP</a:t>
+            </a:r>
+          </a:p>
+          <a:p>
+            <a:pPr>
+              <a:spcBef>
+                <a:spcPts val="600"/>
+              </a:spcBef>
+              <a:defRPr b="1" sz="1800">
+                <a:solidFill>
+                  <a:srgbClr val="1B3E24"/>
+                </a:solidFill>
+              </a:defRPr>
+            </a:pPr>
+            <a:r>
+              <a:t>Token Bloat &amp; Hallucination</a:t>
+            </a:r>
+          </a:p>
+          <a:p>
+            <a:pPr>
+              <a:spcBef>
+                <a:spcPts val="1000"/>
+              </a:spcBef>
+              <a:defRPr b="1" sz="1100">
+                <a:solidFill>
+                  <a:srgbClr val="142118"/>
+                </a:solidFill>
+              </a:defRPr>
+            </a:pPr>
+            <a:r>
+              <a:t>• Severe Token Overhead: </a:t>
+            </a:r>
+            <a:r>
+              <a:rPr b="0">
+                <a:solidFill>
+                  <a:srgbClr val="526458"/>
+                </a:solidFill>
+              </a:rPr>
+              <a:t>A single FHIR Observation consumes 300–500 tokens of nested boilerplate (resourceType, meta, system, coding). A patient chart burns 50,000+ tokens!</a:t>
+            </a:r>
+          </a:p>
+          <a:p>
+            <a:pPr>
+              <a:spcBef>
+                <a:spcPts val="1000"/>
+              </a:spcBef>
+              <a:defRPr b="1" sz="1100">
+                <a:solidFill>
+                  <a:srgbClr val="142118"/>
+                </a:solidFill>
+              </a:defRPr>
+            </a:pPr>
+            <a:r>
+              <a:t>• Diluted Clinical Signal: </a:t>
+            </a:r>
+            <a:r>
+              <a:rPr b="0">
+                <a:solidFill>
+                  <a:srgbClr val="526458"/>
+                </a:solidFill>
+              </a:rPr>
+              <a:t>The critical clinical number ('Glucose: 118') is buried inside hundreds of curly braces, degrading LLM attention.</a:t>
+            </a:r>
+          </a:p>
+          <a:p>
+            <a:pPr>
+              <a:spcBef>
+                <a:spcPts val="1000"/>
+              </a:spcBef>
+              <a:defRPr b="1" sz="1100">
+                <a:solidFill>
+                  <a:srgbClr val="142118"/>
+                </a:solidFill>
+              </a:defRPr>
+            </a:pPr>
+            <a:r>
+              <a:t>• Hallucination Risk: </a:t>
+            </a:r>
+            <a:r>
+              <a:rPr b="0">
+                <a:solidFill>
+                  <a:srgbClr val="526458"/>
+                </a:solidFill>
+              </a:rPr>
+              <a:t>High token boilerplate increases the probability that an LLM misassociates a test value with the wrong timestamp.</a:t>
+            </a:r>
+          </a:p>
+        </p:txBody>
+      </p:sp>
+      <p:sp>
+        <p:nvSpPr>
+          <p:cNvPr id="8" name="Rounded Rectangle 7"/>
+          <p:cNvSpPr/>
+          <p:nvPr/>
+        </p:nvSpPr>
+        <p:spPr>
+          <a:xfrm>
+            <a:off x="6217920" y="1828800"/>
+            <a:ext cx="5212080" cy="4389120"/>
           </a:xfrm>
           <a:prstGeom prst="roundRect">
             <a:avLst/>
@@ -8672,12 +8817,12 @@
             <a:pPr algn="ctr">
               <a:defRPr b="1" sz="1100">
                 <a:solidFill>
-                  <a:srgbClr val="285C36"/>
-                </a:solidFill>
-              </a:defRPr>
-            </a:pPr>
-            <a:r>
-              <a:t>KNOWLEDGE RETRIEVAL</a:t>
+                  <a:srgbClr val="94BA33"/>
+                </a:solidFill>
+              </a:defRPr>
+            </a:pPr>
+            <a:r>
+              <a:t>THE MODERN SOLUTION</a:t>
             </a:r>
           </a:p>
           <a:p>
@@ -8692,7 +8837,7 @@
               </a:defRPr>
             </a:pPr>
             <a:r>
-              <a:t>Clinical RAG &amp; Vector DBs</a:t>
+              <a:t>Clean Markdown (.md) Tables</a:t>
             </a:r>
           </a:p>
           <a:p>
@@ -8707,7 +8852,7 @@
               </a:defRPr>
             </a:pPr>
             <a:r>
-              <a:t>• Semantic Embeddings: </a:t>
+              <a:t>• 60–75% Token Reduction: </a:t>
             </a:r>
             <a:r>
               <a:rPr b="0">
@@ -8715,7 +8860,7 @@
                   <a:srgbClr val="526458"/>
                 </a:solidFill>
               </a:rPr>
-              <a:t>Clinical narrative notes and medical guidelines are chunked and converted into vector embeddings via clinical embedding models.</a:t>
+              <a:t>Converting FHIR resources into clean Markdown tables preserves semantic clarity while stripping thousands of redundant JSON lines.</a:t>
             </a:r>
           </a:p>
           <a:p>
@@ -8730,7 +8875,7 @@
               </a:defRPr>
             </a:pPr>
             <a:r>
-              <a:t>• Vector Databases: </a:t>
+              <a:t>• Superior LLM Recall: </a:t>
             </a:r>
             <a:r>
               <a:rPr b="0">
@@ -8738,7 +8883,7 @@
                   <a:srgbClr val="526458"/>
                 </a:solidFill>
               </a:rPr>
-              <a:t>Stored in high-speed vector stores (pgvector, Chroma, Pinecone) for sub-millisecond similarity search.</a:t>
+              <a:t>Foundation models are pre-trained heavily on Markdown tables and bulleted text, leading to faster inference and zero syntactic hallucinations.</a:t>
             </a:r>
           </a:p>
           <a:p>
@@ -8753,7 +8898,7 @@
               </a:defRPr>
             </a:pPr>
             <a:r>
-              <a:t>• Grounded Answers: </a:t>
+              <a:t>• Clean Architecture: </a:t>
             </a:r>
             <a:r>
               <a:rPr b="0">
@@ -8761,145 +8906,7 @@
                   <a:srgbClr val="526458"/>
                 </a:solidFill>
               </a:rPr>
-              <a:t>When an agent answers a question, it retrieves the top-3 most relevant patient notes and clinical trial guidelines to prevent hallucinations.</a:t>
-            </a:r>
-          </a:p>
-        </p:txBody>
-      </p:sp>
-      <p:sp>
-        <p:nvSpPr>
-          <p:cNvPr id="8" name="Rounded Rectangle 7"/>
-          <p:cNvSpPr/>
-          <p:nvPr/>
-        </p:nvSpPr>
-        <p:spPr>
-          <a:xfrm>
-            <a:off x="6217920" y="1828800"/>
-            <a:ext cx="5212080" cy="4389120"/>
-          </a:xfrm>
-          <a:prstGeom prst="roundRect">
-            <a:avLst/>
-          </a:prstGeom>
-          <a:solidFill>
-            <a:srgbClr val="FFFFFF"/>
-          </a:solidFill>
-          <a:ln w="15240">
-            <a:solidFill>
-              <a:srgbClr val="D2DCD4"/>
-            </a:solidFill>
-          </a:ln>
-        </p:spPr>
-        <p:style>
-          <a:lnRef idx="1">
-            <a:schemeClr val="accent1"/>
-          </a:lnRef>
-          <a:fillRef idx="3">
-            <a:schemeClr val="accent1"/>
-          </a:fillRef>
-          <a:effectRef idx="2">
-            <a:schemeClr val="accent1"/>
-          </a:effectRef>
-          <a:fontRef idx="minor">
-            <a:schemeClr val="lt1"/>
-          </a:fontRef>
-        </p:style>
-        <p:txBody>
-          <a:bodyPr rtlCol="0" anchor="ctr" lIns="320040" rIns="320040" tIns="320040"/>
-          <a:lstStyle/>
-          <a:p>
-            <a:pPr algn="ctr">
-              <a:defRPr b="1" sz="1100">
-                <a:solidFill>
-                  <a:srgbClr val="94BA33"/>
-                </a:solidFill>
-              </a:defRPr>
-            </a:pPr>
-            <a:r>
-              <a:t>DETERMINISTIC ACTION</a:t>
-            </a:r>
-          </a:p>
-          <a:p>
-            <a:pPr>
-              <a:spcBef>
-                <a:spcPts val="600"/>
-              </a:spcBef>
-              <a:defRPr b="1" sz="1800">
-                <a:solidFill>
-                  <a:srgbClr val="1B3E24"/>
-                </a:solidFill>
-              </a:defRPr>
-            </a:pPr>
-            <a:r>
-              <a:t>Model Context Protocol (MCP)</a:t>
-            </a:r>
-          </a:p>
-          <a:p>
-            <a:pPr>
-              <a:spcBef>
-                <a:spcPts val="1000"/>
-              </a:spcBef>
-              <a:defRPr b="1" sz="1100">
-                <a:solidFill>
-                  <a:srgbClr val="142118"/>
-                </a:solidFill>
-              </a:defRPr>
-            </a:pPr>
-            <a:r>
-              <a:t>• Tool-Calling Paradigm: </a:t>
-            </a:r>
-            <a:r>
-              <a:rPr b="0">
-                <a:solidFill>
-                  <a:srgbClr val="526458"/>
-                </a:solidFill>
-              </a:rPr>
-              <a:t>Agents do not guess; they invoke structured tools: get_patient_labs(patient_id='P0001', code='2339-0').</a:t>
-            </a:r>
-          </a:p>
-          <a:p>
-            <a:pPr>
-              <a:spcBef>
-                <a:spcPts val="1000"/>
-              </a:spcBef>
-              <a:defRPr b="1" sz="1100">
-                <a:solidFill>
-                  <a:srgbClr val="142118"/>
-                </a:solidFill>
-              </a:defRPr>
-            </a:pPr>
-            <a:r>
-              <a:t>• Scoped &amp; Auditable: </a:t>
-            </a:r>
-            <a:r>
-              <a:rPr b="0">
-                <a:solidFill>
-                  <a:srgbClr val="526458"/>
-                </a:solidFill>
-              </a:rPr>
-              <a:t>Every action an agent takes is logged, authenticated, and constrained by role-based access control.</a:t>
-            </a:r>
-          </a:p>
-          <a:p>
-            <a:pPr>
-              <a:spcBef>
-                <a:spcPts val="1000"/>
-              </a:spcBef>
-              <a:defRPr b="1" sz="1100">
-                <a:solidFill>
-                  <a:srgbClr val="142118"/>
-                </a:solidFill>
-              </a:defRPr>
-            </a:pPr>
-            <a:r>
-              <a:t>• The Future Standard: </a:t>
-            </a:r>
-            <a:r>
-              <a:rPr b="0">
-                <a:solidFill>
-                  <a:srgbClr val="526458"/>
-                </a:solidFill>
-              </a:rPr>
-              <a:t>MCP provides the open protocol for connecting AI agents to hospital databases and diagnostic instruments safely.</a:t>
+              <a:t>FHIR remains the backend database protocol; Markdown is the token-efficient presentation layer for LLM prompts.</a:t>
             </a:r>
           </a:p>
         </p:txBody>
@@ -8996,7 +9003,7 @@
               </a:defRPr>
             </a:pPr>
             <a:r>
-              <a:t>PHASE 2 · DATA ARCHITECTURE</a:t>
+              <a:t>PHASE 2 · AI AGENTS</a:t>
             </a:r>
           </a:p>
         </p:txBody>
@@ -9032,7 +9039,7 @@
               </a:defRPr>
             </a:pPr>
             <a:r>
-              <a:t>The Fundamental Data Impedance Mismatch</a:t>
+              <a:t>Clinical AI Agents: RAG &amp; Model Context Protocol (MCP)</a:t>
             </a:r>
           </a:p>
         </p:txBody>
@@ -9068,7 +9075,7 @@
               </a:defRPr>
             </a:pPr>
             <a:r>
-              <a:t>Why machine learning frameworks cannot directly ingest clinical FHIR standards</a:t>
+              <a:t>Moving from passive chatbots to autonomous clinical copilots with deterministic tools</a:t>
             </a:r>
           </a:p>
         </p:txBody>
@@ -9146,7 +9153,7 @@
               </a:defRPr>
             </a:pPr>
             <a:r>
-              <a:t>HOW HOSPITALS STORE DATA</a:t>
+              <a:t>KNOWLEDGE RETRIEVAL</a:t>
             </a:r>
           </a:p>
           <a:p>
@@ -9161,7 +9168,7 @@
               </a:defRPr>
             </a:pPr>
             <a:r>
-              <a:t>Hierarchical Clinical Events (FHIR)</a:t>
+              <a:t>Clinical RAG &amp; Vector DBs</a:t>
             </a:r>
           </a:p>
           <a:p>
@@ -9176,16 +9183,15 @@
               </a:defRPr>
             </a:pPr>
             <a:r>
-              <a:t>• Data Structure:</a:t>
-            </a:r>
-            <a:br/>
+              <a:t>• Semantic Embeddings: </a:t>
+            </a:r>
             <a:r>
               <a:rPr b="0">
                 <a:solidFill>
                   <a:srgbClr val="526458"/>
                 </a:solidFill>
               </a:rPr>
-              <a:t>Deeply nested JSON resource trees linked by logical URIs and references.</a:t>
+              <a:t>Clinical narrative notes and medical guidelines are chunked and converted into vector embeddings via clinical embedding models.</a:t>
             </a:r>
           </a:p>
           <a:p>
@@ -9200,16 +9206,15 @@
               </a:defRPr>
             </a:pPr>
             <a:r>
-              <a:t>• Temporal Characteristics:</a:t>
-            </a:r>
-            <a:br/>
+              <a:t>• Vector Databases: </a:t>
+            </a:r>
             <a:r>
               <a:rPr b="0">
                 <a:solidFill>
                   <a:srgbClr val="526458"/>
                 </a:solidFill>
               </a:rPr>
-              <a:t>Variable-length event histories over months or years. Irregular sampling intervals.</a:t>
+              <a:t>Stored in high-speed vector stores (pgvector, Chroma, Pinecone) for sub-millisecond similarity search.</a:t>
             </a:r>
           </a:p>
           <a:p>
@@ -9224,16 +9229,15 @@
               </a:defRPr>
             </a:pPr>
             <a:r>
-              <a:t>• Heterogeneity:</a:t>
-            </a:r>
-            <a:br/>
+              <a:t>• Grounded Answers: </a:t>
+            </a:r>
             <a:r>
               <a:rPr b="0">
                 <a:solidFill>
                   <a:srgbClr val="526458"/>
                 </a:solidFill>
               </a:rPr>
-              <a:t>Mix of coded observations, narrative clinical notes, and multi-value panels.</a:t>
+              <a:t>When an agent answers a question, it retrieves the top-3 most relevant patient notes and clinical trial guidelines to prevent hallucinations.</a:t>
             </a:r>
           </a:p>
         </p:txBody>
@@ -9287,7 +9291,7 @@
               </a:defRPr>
             </a:pPr>
             <a:r>
-              <a:t>WHAT MACHINE LEARNING REQUIRES</a:t>
+              <a:t>DETERMINISTIC ACTION</a:t>
             </a:r>
           </a:p>
           <a:p>
@@ -9302,7 +9306,7 @@
               </a:defRPr>
             </a:pPr>
             <a:r>
-              <a:t>2D Numerical Feature Matrices</a:t>
+              <a:t>Model Context Protocol (MCP)</a:t>
             </a:r>
           </a:p>
           <a:p>
@@ -9317,16 +9321,15 @@
               </a:defRPr>
             </a:pPr>
             <a:r>
-              <a:t>• Data Structure:</a:t>
-            </a:r>
-            <a:br/>
+              <a:t>• Tool-Calling Paradigm: </a:t>
+            </a:r>
             <a:r>
               <a:rPr b="0">
                 <a:solidFill>
                   <a:srgbClr val="526458"/>
                 </a:solidFill>
               </a:rPr>
-              <a:t>Rigid 2D arrays: Feature matrix X in R^{N x D} and target label vector y in {0, 1}.</a:t>
+              <a:t>Agents do not guess; they invoke structured tools: get_patient_labs(patient_id='P0001', code='2339-0').</a:t>
             </a:r>
           </a:p>
           <a:p>
@@ -9341,16 +9344,15 @@
               </a:defRPr>
             </a:pPr>
             <a:r>
-              <a:t>• Strict Demands:</a:t>
-            </a:r>
-            <a:br/>
+              <a:t>• Scoped &amp; Auditable: </a:t>
+            </a:r>
             <a:r>
               <a:rPr b="0">
                 <a:solidFill>
                   <a:srgbClr val="526458"/>
                 </a:solidFill>
               </a:rPr>
-              <a:t>Every patient must have exactly D columns. Algorithms like Logistic Regression cannot handle raw JSON.</a:t>
+              <a:t>Every action an agent takes is logged, authenticated, and constrained by role-based access control.</a:t>
             </a:r>
           </a:p>
           <a:p>
@@ -9365,16 +9367,15 @@
               </a:defRPr>
             </a:pPr>
             <a:r>
-              <a:t>• The Workshop Core:</a:t>
-            </a:r>
-            <a:br/>
+              <a:t>• The Future Standard: </a:t>
+            </a:r>
             <a:r>
               <a:rPr b="0">
                 <a:solidFill>
                   <a:srgbClr val="526458"/>
                 </a:solidFill>
               </a:rPr>
-              <a:t>Step 1 this afternoon (scripts/01_fhir_to_table.py) is the bridge that turns hierarchical FHIR into flat tabular features!</a:t>
+              <a:t>MCP provides the open protocol for connecting AI agents to hospital databases and diagnostic instruments safely.</a:t>
             </a:r>
           </a:p>
         </p:txBody>
@@ -9471,7 +9472,7 @@
               </a:defRPr>
             </a:pPr>
             <a:r>
-              <a:t>PHASE 2 · DATA REALITIES</a:t>
+              <a:t>PHASE 2 · DATA ARCHITECTURE</a:t>
             </a:r>
           </a:p>
         </p:txBody>
@@ -9507,7 +9508,7 @@
               </a:defRPr>
             </a:pPr>
             <a:r>
-              <a:t>Clinical Realities: Informative Missingness &amp; Class Imbalance</a:t>
+              <a:t>The Fundamental Data Impedance Mismatch</a:t>
             </a:r>
           </a:p>
         </p:txBody>
@@ -9543,7 +9544,7 @@
               </a:defRPr>
             </a:pPr>
             <a:r>
-              <a:t>Healthcare data is not sampled at random; absence of evidence is clinical information</a:t>
+              <a:t>Why machine learning frameworks cannot directly ingest clinical FHIR standards</a:t>
             </a:r>
           </a:p>
         </p:txBody>
@@ -9582,123 +9583,6 @@
           <a:xfrm>
             <a:off x="731520" y="1828800"/>
             <a:ext cx="5120640" cy="4389120"/>
-          </a:xfrm>
-          <a:prstGeom prst="roundRect">
-            <a:avLst/>
-          </a:prstGeom>
-          <a:solidFill>
-            <a:srgbClr val="FFFFFF"/>
-          </a:solidFill>
-          <a:ln w="15240">
-            <a:solidFill>
-              <a:srgbClr val="C0392B"/>
-            </a:solidFill>
-          </a:ln>
-        </p:spPr>
-        <p:style>
-          <a:lnRef idx="1">
-            <a:schemeClr val="accent1"/>
-          </a:lnRef>
-          <a:fillRef idx="3">
-            <a:schemeClr val="accent1"/>
-          </a:fillRef>
-          <a:effectRef idx="2">
-            <a:schemeClr val="accent1"/>
-          </a:effectRef>
-          <a:fontRef idx="minor">
-            <a:schemeClr val="lt1"/>
-          </a:fontRef>
-        </p:style>
-        <p:txBody>
-          <a:bodyPr rtlCol="0" anchor="ctr" lIns="320040" rIns="320040" tIns="320040"/>
-          <a:lstStyle/>
-          <a:p>
-            <a:pPr algn="ctr">
-              <a:defRPr b="1" sz="1100">
-                <a:solidFill>
-                  <a:srgbClr val="C0392B"/>
-                </a:solidFill>
-              </a:defRPr>
-            </a:pPr>
-            <a:r>
-              <a:t>DATA QUALITY REALITY</a:t>
-            </a:r>
-          </a:p>
-          <a:p>
-            <a:pPr>
-              <a:spcBef>
-                <a:spcPts val="600"/>
-              </a:spcBef>
-              <a:defRPr b="1" sz="1800">
-                <a:solidFill>
-                  <a:srgbClr val="1B3E24"/>
-                </a:solidFill>
-              </a:defRPr>
-            </a:pPr>
-            <a:r>
-              <a:t>Informative Missingness</a:t>
-            </a:r>
-          </a:p>
-          <a:p>
-            <a:pPr>
-              <a:spcBef>
-                <a:spcPts val="1000"/>
-              </a:spcBef>
-              <a:defRPr b="1" sz="1100">
-                <a:solidFill>
-                  <a:srgbClr val="142118"/>
-                </a:solidFill>
-              </a:defRPr>
-            </a:pPr>
-            <a:r>
-              <a:t>• Tests Ordered for Sick Patients:</a:t>
-            </a:r>
-            <a:br/>
-            <a:r>
-              <a:rPr b="0">
-                <a:solidFill>
-                  <a:srgbClr val="526458"/>
-                </a:solidFill>
-              </a:rPr>
-              <a:t>In sensors, missing data is hardware loss. In medicine, a troponin test or biopsy is ordered because disease is suspected! Healthy patients lack tests because they are healthy.</a:t>
-            </a:r>
-          </a:p>
-          <a:p>
-            <a:pPr>
-              <a:spcBef>
-                <a:spcPts val="1000"/>
-              </a:spcBef>
-              <a:defRPr b="1" sz="1100">
-                <a:solidFill>
-                  <a:srgbClr val="142118"/>
-                </a:solidFill>
-              </a:defRPr>
-            </a:pPr>
-            <a:r>
-              <a:t>• The Imputation Trap:</a:t>
-            </a:r>
-            <a:br/>
-            <a:r>
-              <a:rPr b="0">
-                <a:solidFill>
-                  <a:srgbClr val="526458"/>
-                </a:solidFill>
-              </a:rPr>
-              <a:t>Imputing missing values with population mean assigns sick values to healthy people. Must be handled deliberately via SimpleImputer inside cross-validation folds.</a:t>
-            </a:r>
-          </a:p>
-        </p:txBody>
-      </p:sp>
-      <p:sp>
-        <p:nvSpPr>
-          <p:cNvPr id="8" name="Rounded Rectangle 7"/>
-          <p:cNvSpPr/>
-          <p:nvPr/>
-        </p:nvSpPr>
-        <p:spPr>
-          <a:xfrm>
-            <a:off x="6217920" y="1828800"/>
-            <a:ext cx="5212080" cy="4389120"/>
           </a:xfrm>
           <a:prstGeom prst="roundRect">
             <a:avLst/>
@@ -9733,12 +9617,153 @@
             <a:pPr algn="ctr">
               <a:defRPr b="1" sz="1100">
                 <a:solidFill>
+                  <a:srgbClr val="285C36"/>
+                </a:solidFill>
+              </a:defRPr>
+            </a:pPr>
+            <a:r>
+              <a:t>HOW HOSPITALS STORE DATA</a:t>
+            </a:r>
+          </a:p>
+          <a:p>
+            <a:pPr>
+              <a:spcBef>
+                <a:spcPts val="600"/>
+              </a:spcBef>
+              <a:defRPr b="1" sz="1800">
+                <a:solidFill>
+                  <a:srgbClr val="1B3E24"/>
+                </a:solidFill>
+              </a:defRPr>
+            </a:pPr>
+            <a:r>
+              <a:t>Hierarchical Clinical Events (FHIR)</a:t>
+            </a:r>
+          </a:p>
+          <a:p>
+            <a:pPr>
+              <a:spcBef>
+                <a:spcPts val="1000"/>
+              </a:spcBef>
+              <a:defRPr b="1" sz="1100">
+                <a:solidFill>
+                  <a:srgbClr val="142118"/>
+                </a:solidFill>
+              </a:defRPr>
+            </a:pPr>
+            <a:r>
+              <a:t>• Data Structure:</a:t>
+            </a:r>
+            <a:br/>
+            <a:r>
+              <a:rPr b="0">
+                <a:solidFill>
+                  <a:srgbClr val="526458"/>
+                </a:solidFill>
+              </a:rPr>
+              <a:t>Deeply nested JSON resource trees linked by logical URIs and references.</a:t>
+            </a:r>
+          </a:p>
+          <a:p>
+            <a:pPr>
+              <a:spcBef>
+                <a:spcPts val="1000"/>
+              </a:spcBef>
+              <a:defRPr b="1" sz="1100">
+                <a:solidFill>
+                  <a:srgbClr val="142118"/>
+                </a:solidFill>
+              </a:defRPr>
+            </a:pPr>
+            <a:r>
+              <a:t>• Temporal Characteristics:</a:t>
+            </a:r>
+            <a:br/>
+            <a:r>
+              <a:rPr b="0">
+                <a:solidFill>
+                  <a:srgbClr val="526458"/>
+                </a:solidFill>
+              </a:rPr>
+              <a:t>Variable-length event histories over months or years. Irregular sampling intervals.</a:t>
+            </a:r>
+          </a:p>
+          <a:p>
+            <a:pPr>
+              <a:spcBef>
+                <a:spcPts val="1000"/>
+              </a:spcBef>
+              <a:defRPr b="1" sz="1100">
+                <a:solidFill>
+                  <a:srgbClr val="142118"/>
+                </a:solidFill>
+              </a:defRPr>
+            </a:pPr>
+            <a:r>
+              <a:t>• Heterogeneity:</a:t>
+            </a:r>
+            <a:br/>
+            <a:r>
+              <a:rPr b="0">
+                <a:solidFill>
+                  <a:srgbClr val="526458"/>
+                </a:solidFill>
+              </a:rPr>
+              <a:t>Mix of coded observations, narrative clinical notes, and multi-value panels.</a:t>
+            </a:r>
+          </a:p>
+        </p:txBody>
+      </p:sp>
+      <p:sp>
+        <p:nvSpPr>
+          <p:cNvPr id="8" name="Rounded Rectangle 7"/>
+          <p:cNvSpPr/>
+          <p:nvPr/>
+        </p:nvSpPr>
+        <p:spPr>
+          <a:xfrm>
+            <a:off x="6217920" y="1828800"/>
+            <a:ext cx="5212080" cy="4389120"/>
+          </a:xfrm>
+          <a:prstGeom prst="roundRect">
+            <a:avLst/>
+          </a:prstGeom>
+          <a:solidFill>
+            <a:srgbClr val="FFFFFF"/>
+          </a:solidFill>
+          <a:ln w="15240">
+            <a:solidFill>
+              <a:srgbClr val="D2DCD4"/>
+            </a:solidFill>
+          </a:ln>
+        </p:spPr>
+        <p:style>
+          <a:lnRef idx="1">
+            <a:schemeClr val="accent1"/>
+          </a:lnRef>
+          <a:fillRef idx="3">
+            <a:schemeClr val="accent1"/>
+          </a:fillRef>
+          <a:effectRef idx="2">
+            <a:schemeClr val="accent1"/>
+          </a:effectRef>
+          <a:fontRef idx="minor">
+            <a:schemeClr val="lt1"/>
+          </a:fontRef>
+        </p:style>
+        <p:txBody>
+          <a:bodyPr rtlCol="0" anchor="ctr" lIns="320040" rIns="320040" tIns="320040"/>
+          <a:lstStyle/>
+          <a:p>
+            <a:pPr algn="ctr">
+              <a:defRPr b="1" sz="1100">
+                <a:solidFill>
                   <a:srgbClr val="94BA33"/>
                 </a:solidFill>
               </a:defRPr>
             </a:pPr>
             <a:r>
-              <a:t>EVALUATION PITFALL</a:t>
+              <a:t>WHAT MACHINE LEARNING REQUIRES</a:t>
             </a:r>
           </a:p>
           <a:p>
@@ -9753,7 +9778,7 @@
               </a:defRPr>
             </a:pPr>
             <a:r>
-              <a:t>Class Imbalance (63% Trap)</a:t>
+              <a:t>2D Numerical Feature Matrices</a:t>
             </a:r>
           </a:p>
           <a:p>
@@ -9768,7 +9793,7 @@
               </a:defRPr>
             </a:pPr>
             <a:r>
-              <a:t>• The Baseline Illusion:</a:t>
+              <a:t>• Data Structure:</a:t>
             </a:r>
             <a:br/>
             <a:r>
@@ -9777,7 +9802,7 @@
                   <a:srgbClr val="526458"/>
                 </a:solidFill>
               </a:rPr>
-              <a:t>In cancer screening, 63% (or 95%) of patients are benign. A dummy model predicting 'benign' every time achieves 63% accuracy while failing 100% of cancer cases!</a:t>
+              <a:t>Rigid 2D arrays: Feature matrix X in R^{N x D} and target label vector y in {0, 1}.</a:t>
             </a:r>
           </a:p>
           <a:p>
@@ -9792,7 +9817,7 @@
               </a:defRPr>
             </a:pPr>
             <a:r>
-              <a:t>• Metric Requirements:</a:t>
+              <a:t>• Strict Demands:</a:t>
             </a:r>
             <a:br/>
             <a:r>
@@ -9801,7 +9826,31 @@
                   <a:srgbClr val="526458"/>
                 </a:solidFill>
               </a:rPr>
-              <a:t>Accuracy is dangerous. We evaluate models using Recall (Sensitivity), ROC-AUC, and tune the classification threshold deliberately.</a:t>
+              <a:t>Every patient must have exactly D columns. Algorithms like Logistic Regression cannot handle raw JSON.</a:t>
+            </a:r>
+          </a:p>
+          <a:p>
+            <a:pPr>
+              <a:spcBef>
+                <a:spcPts val="1000"/>
+              </a:spcBef>
+              <a:defRPr b="1" sz="1100">
+                <a:solidFill>
+                  <a:srgbClr val="142118"/>
+                </a:solidFill>
+              </a:defRPr>
+            </a:pPr>
+            <a:r>
+              <a:t>• The Workshop Core:</a:t>
+            </a:r>
+            <a:br/>
+            <a:r>
+              <a:rPr b="0">
+                <a:solidFill>
+                  <a:srgbClr val="526458"/>
+                </a:solidFill>
+              </a:rPr>
+              <a:t>Step 1 this afternoon (scripts/01_fhir_to_table.py) is the bridge that turns hierarchical FHIR into flat tabular features!</a:t>
             </a:r>
           </a:p>
         </p:txBody>
@@ -9898,7 +9947,7 @@
               </a:defRPr>
             </a:pPr>
             <a:r>
-              <a:t>PHASE 2 · FUTURE ARCHITECTURE</a:t>
+              <a:t>PHASE 2 · DATA REALITIES</a:t>
             </a:r>
           </a:p>
         </p:txBody>
@@ -9934,7 +9983,7 @@
               </a:defRPr>
             </a:pPr>
             <a:r>
-              <a:t>Towards AI-Native Health Data Standards</a:t>
+              <a:t>Clinical Realities: Informative Missingness &amp; Class Imbalance</a:t>
             </a:r>
           </a:p>
         </p:txBody>
@@ -9970,7 +10019,7 @@
               </a:defRPr>
             </a:pPr>
             <a:r>
-              <a:t>The emerging Dual-Stack Architecture uniting legal compliance and continuous learning</a:t>
+              <a:t>Healthcare data is not sampled at random; absence of evidence is clinical information</a:t>
             </a:r>
           </a:p>
         </p:txBody>
@@ -10009,6 +10058,123 @@
           <a:xfrm>
             <a:off x="731520" y="1828800"/>
             <a:ext cx="5120640" cy="4389120"/>
+          </a:xfrm>
+          <a:prstGeom prst="roundRect">
+            <a:avLst/>
+          </a:prstGeom>
+          <a:solidFill>
+            <a:srgbClr val="FFFFFF"/>
+          </a:solidFill>
+          <a:ln w="15240">
+            <a:solidFill>
+              <a:srgbClr val="C0392B"/>
+            </a:solidFill>
+          </a:ln>
+        </p:spPr>
+        <p:style>
+          <a:lnRef idx="1">
+            <a:schemeClr val="accent1"/>
+          </a:lnRef>
+          <a:fillRef idx="3">
+            <a:schemeClr val="accent1"/>
+          </a:fillRef>
+          <a:effectRef idx="2">
+            <a:schemeClr val="accent1"/>
+          </a:effectRef>
+          <a:fontRef idx="minor">
+            <a:schemeClr val="lt1"/>
+          </a:fontRef>
+        </p:style>
+        <p:txBody>
+          <a:bodyPr rtlCol="0" anchor="ctr" lIns="320040" rIns="320040" tIns="320040"/>
+          <a:lstStyle/>
+          <a:p>
+            <a:pPr algn="ctr">
+              <a:defRPr b="1" sz="1100">
+                <a:solidFill>
+                  <a:srgbClr val="C0392B"/>
+                </a:solidFill>
+              </a:defRPr>
+            </a:pPr>
+            <a:r>
+              <a:t>DATA QUALITY REALITY</a:t>
+            </a:r>
+          </a:p>
+          <a:p>
+            <a:pPr>
+              <a:spcBef>
+                <a:spcPts val="600"/>
+              </a:spcBef>
+              <a:defRPr b="1" sz="1800">
+                <a:solidFill>
+                  <a:srgbClr val="1B3E24"/>
+                </a:solidFill>
+              </a:defRPr>
+            </a:pPr>
+            <a:r>
+              <a:t>Informative Missingness</a:t>
+            </a:r>
+          </a:p>
+          <a:p>
+            <a:pPr>
+              <a:spcBef>
+                <a:spcPts val="1000"/>
+              </a:spcBef>
+              <a:defRPr b="1" sz="1100">
+                <a:solidFill>
+                  <a:srgbClr val="142118"/>
+                </a:solidFill>
+              </a:defRPr>
+            </a:pPr>
+            <a:r>
+              <a:t>• Tests Ordered for Sick Patients:</a:t>
+            </a:r>
+            <a:br/>
+            <a:r>
+              <a:rPr b="0">
+                <a:solidFill>
+                  <a:srgbClr val="526458"/>
+                </a:solidFill>
+              </a:rPr>
+              <a:t>In sensors, missing data is hardware loss. In medicine, a troponin test or biopsy is ordered because disease is suspected! Healthy patients lack tests because they are healthy.</a:t>
+            </a:r>
+          </a:p>
+          <a:p>
+            <a:pPr>
+              <a:spcBef>
+                <a:spcPts val="1000"/>
+              </a:spcBef>
+              <a:defRPr b="1" sz="1100">
+                <a:solidFill>
+                  <a:srgbClr val="142118"/>
+                </a:solidFill>
+              </a:defRPr>
+            </a:pPr>
+            <a:r>
+              <a:t>• The Imputation Trap:</a:t>
+            </a:r>
+            <a:br/>
+            <a:r>
+              <a:rPr b="0">
+                <a:solidFill>
+                  <a:srgbClr val="526458"/>
+                </a:solidFill>
+              </a:rPr>
+              <a:t>Imputing missing values with population mean assigns sick values to healthy people. Must be handled deliberately via SimpleImputer inside cross-validation folds.</a:t>
+            </a:r>
+          </a:p>
+        </p:txBody>
+      </p:sp>
+      <p:sp>
+        <p:nvSpPr>
+          <p:cNvPr id="8" name="Rounded Rectangle 7"/>
+          <p:cNvSpPr/>
+          <p:nvPr/>
+        </p:nvSpPr>
+        <p:spPr>
+          <a:xfrm>
+            <a:off x="6217920" y="1828800"/>
+            <a:ext cx="5212080" cy="4389120"/>
           </a:xfrm>
           <a:prstGeom prst="roundRect">
             <a:avLst/>
@@ -10043,12 +10209,12 @@
             <a:pPr algn="ctr">
               <a:defRPr b="1" sz="1100">
                 <a:solidFill>
-                  <a:srgbClr val="285C36"/>
-                </a:solidFill>
-              </a:defRPr>
-            </a:pPr>
-            <a:r>
-              <a:t>THE THREE ERAS OF HEALTH DATA</a:t>
+                  <a:srgbClr val="94BA33"/>
+                </a:solidFill>
+              </a:defRPr>
+            </a:pPr>
+            <a:r>
+              <a:t>EVALUATION PITFALL</a:t>
             </a:r>
           </a:p>
           <a:p>
@@ -10063,7 +10229,7 @@
               </a:defRPr>
             </a:pPr>
             <a:r>
-              <a:t>From Sockets to Autonomous AI</a:t>
+              <a:t>Class Imbalance (63% Trap)</a:t>
             </a:r>
           </a:p>
           <a:p>
@@ -10078,7 +10244,7 @@
               </a:defRPr>
             </a:pPr>
             <a:r>
-              <a:t>• Era 1: 1989–2011 (Local Machines):</a:t>
+              <a:t>• The Baseline Illusion:</a:t>
             </a:r>
             <a:br/>
             <a:r>
@@ -10087,7 +10253,7 @@
                   <a:srgbClr val="526458"/>
                 </a:solidFill>
               </a:rPr>
-              <a:t>HL7 v2: Pipe-delimited ASCII strings over TCP sockets for local hospital LANs.</a:t>
+              <a:t>In cancer screening, 63% (or 95%) of patients are benign. A dummy model predicting 'benign' every time achieves 63% accuracy while failing 100% of cancer cases!</a:t>
             </a:r>
           </a:p>
           <a:p>
@@ -10102,7 +10268,7 @@
               </a:defRPr>
             </a:pPr>
             <a:r>
-              <a:t>• Era 2: 2014–2025 (Web &amp; Mobile):</a:t>
+              <a:t>• Metric Requirements:</a:t>
             </a:r>
             <a:br/>
             <a:r>
@@ -10111,172 +10277,7 @@
                   <a:srgbClr val="526458"/>
                 </a:solidFill>
               </a:rPr>
-              <a:t>HL7 FHIR: JSON REST APIs and web standards for apps, clinicians, and portals.</a:t>
-            </a:r>
-          </a:p>
-          <a:p>
-            <a:pPr>
-              <a:spcBef>
-                <a:spcPts val="1000"/>
-              </a:spcBef>
-              <a:defRPr b="1" sz="1100">
-                <a:solidFill>
-                  <a:srgbClr val="142118"/>
-                </a:solidFill>
-              </a:defRPr>
-            </a:pPr>
-            <a:r>
-              <a:t>• Era 3: 2026+ (Artificial Intelligence):</a:t>
-            </a:r>
-            <a:br/>
-            <a:r>
-              <a:rPr b="0">
-                <a:solidFill>
-                  <a:srgbClr val="526458"/>
-                </a:solidFill>
-              </a:rPr>
-              <a:t>AI-Native Stack: Vector embeddings, token-optimized Markdown, and Agentic MCP tool protocols.</a:t>
-            </a:r>
-          </a:p>
-        </p:txBody>
-      </p:sp>
-      <p:sp>
-        <p:nvSpPr>
-          <p:cNvPr id="8" name="Rounded Rectangle 7"/>
-          <p:cNvSpPr/>
-          <p:nvPr/>
-        </p:nvSpPr>
-        <p:spPr>
-          <a:xfrm>
-            <a:off x="6217920" y="1828800"/>
-            <a:ext cx="5212080" cy="4389120"/>
-          </a:xfrm>
-          <a:prstGeom prst="roundRect">
-            <a:avLst/>
-          </a:prstGeom>
-          <a:solidFill>
-            <a:srgbClr val="FFFFFF"/>
-          </a:solidFill>
-          <a:ln w="15240">
-            <a:solidFill>
-              <a:srgbClr val="D2DCD4"/>
-            </a:solidFill>
-          </a:ln>
-        </p:spPr>
-        <p:style>
-          <a:lnRef idx="1">
-            <a:schemeClr val="accent1"/>
-          </a:lnRef>
-          <a:fillRef idx="3">
-            <a:schemeClr val="accent1"/>
-          </a:fillRef>
-          <a:effectRef idx="2">
-            <a:schemeClr val="accent1"/>
-          </a:effectRef>
-          <a:fontRef idx="minor">
-            <a:schemeClr val="lt1"/>
-          </a:fontRef>
-        </p:style>
-        <p:txBody>
-          <a:bodyPr rtlCol="0" anchor="ctr" lIns="320040" rIns="320040" tIns="320040"/>
-          <a:lstStyle/>
-          <a:p>
-            <a:pPr algn="ctr">
-              <a:defRPr b="1" sz="1100">
-                <a:solidFill>
-                  <a:srgbClr val="94BA33"/>
-                </a:solidFill>
-              </a:defRPr>
-            </a:pPr>
-            <a:r>
-              <a:t>THE DUAL-STACK SOLUTION</a:t>
-            </a:r>
-          </a:p>
-          <a:p>
-            <a:pPr>
-              <a:spcBef>
-                <a:spcPts val="600"/>
-              </a:spcBef>
-              <a:defRPr b="1" sz="1800">
-                <a:solidFill>
-                  <a:srgbClr val="1B3E24"/>
-                </a:solidFill>
-              </a:defRPr>
-            </a:pPr>
-            <a:r>
-              <a:t>Record Layer + Intelligence Layer</a:t>
-            </a:r>
-          </a:p>
-          <a:p>
-            <a:pPr>
-              <a:spcBef>
-                <a:spcPts val="1000"/>
-              </a:spcBef>
-              <a:defRPr b="1" sz="1100">
-                <a:solidFill>
-                  <a:srgbClr val="142118"/>
-                </a:solidFill>
-              </a:defRPr>
-            </a:pPr>
-            <a:r>
-              <a:t>• Layer A · System of Record (FHIR):</a:t>
-            </a:r>
-            <a:br/>
-            <a:r>
-              <a:rPr b="0">
-                <a:solidFill>
-                  <a:srgbClr val="526458"/>
-                </a:solidFill>
-              </a:rPr>
-              <a:t>FHIR remains the authoritative, legally audited, and human-verified patient ledger for billing, medication safety, and clinical charts.</a:t>
-            </a:r>
-          </a:p>
-          <a:p>
-            <a:pPr>
-              <a:spcBef>
-                <a:spcPts val="1000"/>
-              </a:spcBef>
-              <a:defRPr b="1" sz="1100">
-                <a:solidFill>
-                  <a:srgbClr val="142118"/>
-                </a:solidFill>
-              </a:defRPr>
-            </a:pPr>
-            <a:r>
-              <a:t>• Layer B · System of Intelligence (AI Store):</a:t>
-            </a:r>
-            <a:br/>
-            <a:r>
-              <a:rPr b="0">
-                <a:solidFill>
-                  <a:srgbClr val="526458"/>
-                </a:solidFill>
-              </a:rPr>
-              <a:t>High-performance vector stores and feature stores (e.g. Feast, pgvector) continuously ingest FHIR streams, serving ML models and LLM agents in milliseconds.</a:t>
-            </a:r>
-          </a:p>
-          <a:p>
-            <a:pPr>
-              <a:spcBef>
-                <a:spcPts val="1000"/>
-              </a:spcBef>
-              <a:defRPr b="1" sz="1100">
-                <a:solidFill>
-                  <a:srgbClr val="142118"/>
-                </a:solidFill>
-              </a:defRPr>
-            </a:pPr>
-            <a:r>
-              <a:t>• Health MCP Protocol Standard:</a:t>
-            </a:r>
-            <a:br/>
-            <a:r>
-              <a:rPr b="0">
-                <a:solidFill>
-                  <a:srgbClr val="526458"/>
-                </a:solidFill>
-              </a:rPr>
-              <a:t>Standardizing tool schemas so any clinical AI agent can query and propose treatment orders across any hospital safely.</a:t>
+              <a:t>Accuracy is dangerous. We evaluate models using Recall (Sensitivity), ROC-AUC, and tune the classification threshold deliberately.</a:t>
             </a:r>
           </a:p>
         </p:txBody>
@@ -10314,7 +10315,7 @@
             <a:avLst/>
           </a:prstGeom>
           <a:solidFill>
-            <a:srgbClr val="1B3E24"/>
+            <a:srgbClr val="F5F7F5"/>
           </a:solidFill>
           <a:ln>
             <a:noFill/>
@@ -10344,23 +10345,157 @@
       </p:sp>
       <p:sp>
         <p:nvSpPr>
-          <p:cNvPr id="3" name="Rounded Rectangle 2"/>
+          <p:cNvPr id="3" name="TextBox 2"/>
+          <p:cNvSpPr txBox="1"/>
+          <p:nvPr/>
+        </p:nvSpPr>
+        <p:spPr>
+          <a:xfrm>
+            <a:off x="731520" y="365760"/>
+            <a:ext cx="7772400" cy="320040"/>
+          </a:xfrm>
+          <a:prstGeom prst="rect">
+            <a:avLst/>
+          </a:prstGeom>
+          <a:noFill/>
+        </p:spPr>
+        <p:txBody>
+          <a:bodyPr wrap="square" lIns="0" rIns="0" tIns="0" bIns="0">
+            <a:spAutoFit/>
+          </a:bodyPr>
+          <a:lstStyle/>
+          <a:p>
+            <a:pPr>
+              <a:defRPr sz="1000" b="1">
+                <a:solidFill>
+                  <a:srgbClr val="285C36"/>
+                </a:solidFill>
+                <a:latin typeface="Arial"/>
+              </a:defRPr>
+            </a:pPr>
+            <a:r>
+              <a:t>PHASE 2 · FUTURE ARCHITECTURE</a:t>
+            </a:r>
+          </a:p>
+        </p:txBody>
+      </p:sp>
+      <p:sp>
+        <p:nvSpPr>
+          <p:cNvPr id="4" name="TextBox 3"/>
+          <p:cNvSpPr txBox="1"/>
+          <p:nvPr/>
+        </p:nvSpPr>
+        <p:spPr>
+          <a:xfrm>
+            <a:off x="731520" y="658368"/>
+            <a:ext cx="8961120" cy="594360"/>
+          </a:xfrm>
+          <a:prstGeom prst="rect">
+            <a:avLst/>
+          </a:prstGeom>
+          <a:noFill/>
+        </p:spPr>
+        <p:txBody>
+          <a:bodyPr wrap="square" lIns="0" rIns="0" tIns="0" bIns="0">
+            <a:spAutoFit/>
+          </a:bodyPr>
+          <a:lstStyle/>
+          <a:p>
+            <a:pPr>
+              <a:defRPr sz="2100" b="1">
+                <a:solidFill>
+                  <a:srgbClr val="1B3E24"/>
+                </a:solidFill>
+                <a:latin typeface="Arial"/>
+              </a:defRPr>
+            </a:pPr>
+            <a:r>
+              <a:t>Towards AI-Native Health Data Standards</a:t>
+            </a:r>
+          </a:p>
+        </p:txBody>
+      </p:sp>
+      <p:sp>
+        <p:nvSpPr>
+          <p:cNvPr id="5" name="TextBox 4"/>
+          <p:cNvSpPr txBox="1"/>
+          <p:nvPr/>
+        </p:nvSpPr>
+        <p:spPr>
+          <a:xfrm>
+            <a:off x="731520" y="1261872"/>
+            <a:ext cx="9144000" cy="365760"/>
+          </a:xfrm>
+          <a:prstGeom prst="rect">
+            <a:avLst/>
+          </a:prstGeom>
+          <a:noFill/>
+        </p:spPr>
+        <p:txBody>
+          <a:bodyPr wrap="square" lIns="0" rIns="0" tIns="0" bIns="0">
+            <a:spAutoFit/>
+          </a:bodyPr>
+          <a:lstStyle/>
+          <a:p>
+            <a:pPr>
+              <a:defRPr sz="1200">
+                <a:solidFill>
+                  <a:srgbClr val="526458"/>
+                </a:solidFill>
+                <a:latin typeface="Arial"/>
+              </a:defRPr>
+            </a:pPr>
+            <a:r>
+              <a:t>The emerging Dual-Stack Architecture uniting legal compliance and continuous learning</a:t>
+            </a:r>
+          </a:p>
+        </p:txBody>
+      </p:sp>
+      <p:pic>
+        <p:nvPicPr>
+          <p:cNvPr id="6" name="Picture 5" descr="ait_logo.png"/>
+          <p:cNvPicPr>
+            <a:picLocks noChangeAspect="1"/>
+          </p:cNvPicPr>
+          <p:nvPr/>
+        </p:nvPicPr>
+        <p:blipFill>
+          <a:blip r:embed="rId2"/>
+          <a:stretch>
+            <a:fillRect/>
+          </a:stretch>
+        </p:blipFill>
+        <p:spPr>
+          <a:xfrm>
+            <a:off x="10149840" y="411480"/>
+            <a:ext cx="1371600" cy="293914"/>
+          </a:xfrm>
+          <a:prstGeom prst="rect">
+            <a:avLst/>
+          </a:prstGeom>
+        </p:spPr>
+      </p:pic>
+      <p:sp>
+        <p:nvSpPr>
+          <p:cNvPr id="7" name="Rounded Rectangle 6"/>
           <p:cNvSpPr/>
           <p:nvPr/>
         </p:nvSpPr>
         <p:spPr>
           <a:xfrm>
-            <a:off x="822960" y="1645920"/>
-            <a:ext cx="5669280" cy="411480"/>
+            <a:off x="731520" y="1828800"/>
+            <a:ext cx="5120640" cy="4389120"/>
           </a:xfrm>
           <a:prstGeom prst="roundRect">
             <a:avLst/>
           </a:prstGeom>
           <a:solidFill>
-            <a:srgbClr val="285C36"/>
+            <a:srgbClr val="FFFFFF"/>
           </a:solidFill>
-          <a:ln>
-            <a:noFill/>
+          <a:ln w="15240">
+            <a:solidFill>
+              <a:srgbClr val="D2DCD4"/>
+            </a:solidFill>
           </a:ln>
         </p:spPr>
         <p:style>
@@ -10378,91 +10513,130 @@
           </a:fontRef>
         </p:style>
         <p:txBody>
-          <a:bodyPr rtlCol="0" anchor="ctr" lIns="182880"/>
+          <a:bodyPr rtlCol="0" anchor="ctr" lIns="320040" rIns="320040" tIns="320040"/>
           <a:lstStyle/>
           <a:p>
             <a:pPr algn="ctr">
-              <a:defRPr b="1" sz="1000">
-                <a:solidFill>
-                  <a:srgbClr val="FFFFFF"/>
-                </a:solidFill>
-              </a:defRPr>
-            </a:pPr>
-            <a:r>
-              <a:t>PHASE +1 · AIT RESEARCH IN ACTION (CHAKLAM'S SPOTLIGHT)</a:t>
-            </a:r>
-          </a:p>
-        </p:txBody>
-      </p:sp>
-      <p:sp>
-        <p:nvSpPr>
-          <p:cNvPr id="4" name="TextBox 3"/>
-          <p:cNvSpPr txBox="1"/>
-          <p:nvPr/>
-        </p:nvSpPr>
-        <p:spPr>
-          <a:xfrm>
-            <a:off x="822960" y="2286000"/>
-            <a:ext cx="10515600" cy="2011680"/>
-          </a:xfrm>
-          <a:prstGeom prst="rect">
-            <a:avLst/>
-          </a:prstGeom>
-          <a:noFill/>
-        </p:spPr>
-        <p:txBody>
-          <a:bodyPr wrap="square">
-            <a:spAutoFit/>
-          </a:bodyPr>
-          <a:lstStyle/>
-          <a:p>
-            <a:pPr>
-              <a:defRPr b="1" sz="3800">
-                <a:solidFill>
-                  <a:srgbClr val="FFFFFF"/>
-                </a:solidFill>
-              </a:defRPr>
-            </a:pPr>
-            <a:r>
-              <a:t>Telehealth &amp; Assistive Systems</a:t>
-            </a:r>
-          </a:p>
-          <a:p>
-            <a:pPr>
-              <a:spcBef>
-                <a:spcPts val="1200"/>
-              </a:spcBef>
-              <a:defRPr sz="1700">
-                <a:solidFill>
-                  <a:srgbClr val="94BA33"/>
-                </a:solidFill>
-              </a:defRPr>
-            </a:pPr>
-            <a:r>
-              <a:t>Monitoring and Assistive Systems for Elderly and Disabled People — Prof. Chaklam Silpasuwanchai</a:t>
-            </a:r>
-          </a:p>
-        </p:txBody>
-      </p:sp>
-      <p:sp>
-        <p:nvSpPr>
-          <p:cNvPr id="5" name="Rounded Rectangle 4"/>
+              <a:defRPr b="1" sz="1100">
+                <a:solidFill>
+                  <a:srgbClr val="285C36"/>
+                </a:solidFill>
+              </a:defRPr>
+            </a:pPr>
+            <a:r>
+              <a:t>THE THREE ERAS OF HEALTH DATA</a:t>
+            </a:r>
+          </a:p>
+          <a:p>
+            <a:pPr>
+              <a:spcBef>
+                <a:spcPts val="600"/>
+              </a:spcBef>
+              <a:defRPr b="1" sz="1800">
+                <a:solidFill>
+                  <a:srgbClr val="1B3E24"/>
+                </a:solidFill>
+              </a:defRPr>
+            </a:pPr>
+            <a:r>
+              <a:t>From Sockets to Autonomous AI</a:t>
+            </a:r>
+          </a:p>
+          <a:p>
+            <a:pPr>
+              <a:spcBef>
+                <a:spcPts val="1000"/>
+              </a:spcBef>
+              <a:defRPr b="1" sz="1100">
+                <a:solidFill>
+                  <a:srgbClr val="142118"/>
+                </a:solidFill>
+              </a:defRPr>
+            </a:pPr>
+            <a:r>
+              <a:t>• Era 1: 1989–2011 (Local Machines):</a:t>
+            </a:r>
+            <a:br/>
+            <a:r>
+              <a:rPr b="0">
+                <a:solidFill>
+                  <a:srgbClr val="526458"/>
+                </a:solidFill>
+              </a:rPr>
+              <a:t>HL7 v2: Pipe-delimited ASCII strings over TCP sockets for local hospital LANs.</a:t>
+            </a:r>
+          </a:p>
+          <a:p>
+            <a:pPr>
+              <a:spcBef>
+                <a:spcPts val="1000"/>
+              </a:spcBef>
+              <a:defRPr b="1" sz="1100">
+                <a:solidFill>
+                  <a:srgbClr val="142118"/>
+                </a:solidFill>
+              </a:defRPr>
+            </a:pPr>
+            <a:r>
+              <a:t>• Era 2: 2014–2025 (Web &amp; Mobile):</a:t>
+            </a:r>
+            <a:br/>
+            <a:r>
+              <a:rPr b="0">
+                <a:solidFill>
+                  <a:srgbClr val="526458"/>
+                </a:solidFill>
+              </a:rPr>
+              <a:t>HL7 FHIR: JSON REST APIs and web standards for apps, clinicians, and portals.</a:t>
+            </a:r>
+          </a:p>
+          <a:p>
+            <a:pPr>
+              <a:spcBef>
+                <a:spcPts val="1000"/>
+              </a:spcBef>
+              <a:defRPr b="1" sz="1100">
+                <a:solidFill>
+                  <a:srgbClr val="142118"/>
+                </a:solidFill>
+              </a:defRPr>
+            </a:pPr>
+            <a:r>
+              <a:t>• Era 3: 2026+ (Artificial Intelligence):</a:t>
+            </a:r>
+            <a:br/>
+            <a:r>
+              <a:rPr b="0">
+                <a:solidFill>
+                  <a:srgbClr val="526458"/>
+                </a:solidFill>
+              </a:rPr>
+              <a:t>AI-Native Stack: Vector embeddings, token-optimized Markdown, and Agentic MCP tool protocols.</a:t>
+            </a:r>
+          </a:p>
+        </p:txBody>
+      </p:sp>
+      <p:sp>
+        <p:nvSpPr>
+          <p:cNvPr id="8" name="Rounded Rectangle 7"/>
           <p:cNvSpPr/>
           <p:nvPr/>
         </p:nvSpPr>
         <p:spPr>
           <a:xfrm>
-            <a:off x="822960" y="4572000"/>
-            <a:ext cx="10515600" cy="1463040"/>
+            <a:off x="6217920" y="1828800"/>
+            <a:ext cx="5212080" cy="4389120"/>
           </a:xfrm>
           <a:prstGeom prst="roundRect">
             <a:avLst/>
           </a:prstGeom>
           <a:solidFill>
-            <a:srgbClr val="285C36"/>
+            <a:srgbClr val="FFFFFF"/>
           </a:solidFill>
-          <a:ln>
-            <a:noFill/>
+          <a:ln w="15240">
+            <a:solidFill>
+              <a:srgbClr val="D2DCD4"/>
+            </a:solidFill>
           </a:ln>
         </p:spPr>
         <p:style>
@@ -10480,33 +10654,105 @@
           </a:fontRef>
         </p:style>
         <p:txBody>
-          <a:bodyPr rtlCol="0" anchor="ctr" lIns="274320" tIns="182880"/>
+          <a:bodyPr rtlCol="0" anchor="ctr" lIns="320040" rIns="320040" tIns="320040"/>
           <a:lstStyle/>
           <a:p>
             <a:pPr algn="ctr">
-              <a:defRPr b="1" sz="1300">
+              <a:defRPr b="1" sz="1100">
                 <a:solidFill>
                   <a:srgbClr val="94BA33"/>
                 </a:solidFill>
               </a:defRPr>
             </a:pPr>
             <a:r>
-              <a:t>Grounding Theory in Real AIT Systems Engineering:</a:t>
-            </a:r>
-          </a:p>
-          <a:p>
-            <a:pPr>
-              <a:spcBef>
-                <a:spcPts val="400"/>
-              </a:spcBef>
-              <a:defRPr b="1" sz="1350">
-                <a:solidFill>
-                  <a:srgbClr val="FFFFFF"/>
-                </a:solidFill>
-              </a:defRPr>
-            </a:pPr>
-            <a:r>
-              <a:t>Connecting optical Raman laser sensors, computer vision telemetry, and haptic rehabilitation robotics to global clinical standards and FHIR microservices.</a:t>
+              <a:t>THE DUAL-STACK SOLUTION</a:t>
+            </a:r>
+          </a:p>
+          <a:p>
+            <a:pPr>
+              <a:spcBef>
+                <a:spcPts val="600"/>
+              </a:spcBef>
+              <a:defRPr b="1" sz="1800">
+                <a:solidFill>
+                  <a:srgbClr val="1B3E24"/>
+                </a:solidFill>
+              </a:defRPr>
+            </a:pPr>
+            <a:r>
+              <a:t>Record Layer + Intelligence Layer</a:t>
+            </a:r>
+          </a:p>
+          <a:p>
+            <a:pPr>
+              <a:spcBef>
+                <a:spcPts val="1000"/>
+              </a:spcBef>
+              <a:defRPr b="1" sz="1100">
+                <a:solidFill>
+                  <a:srgbClr val="142118"/>
+                </a:solidFill>
+              </a:defRPr>
+            </a:pPr>
+            <a:r>
+              <a:t>• Layer A · System of Record (FHIR):</a:t>
+            </a:r>
+            <a:br/>
+            <a:r>
+              <a:rPr b="0">
+                <a:solidFill>
+                  <a:srgbClr val="526458"/>
+                </a:solidFill>
+              </a:rPr>
+              <a:t>FHIR remains the authoritative, legally audited, and human-verified patient ledger for billing, medication safety, and clinical charts.</a:t>
+            </a:r>
+          </a:p>
+          <a:p>
+            <a:pPr>
+              <a:spcBef>
+                <a:spcPts val="1000"/>
+              </a:spcBef>
+              <a:defRPr b="1" sz="1100">
+                <a:solidFill>
+                  <a:srgbClr val="142118"/>
+                </a:solidFill>
+              </a:defRPr>
+            </a:pPr>
+            <a:r>
+              <a:t>• Layer B · System of Intelligence (AI Store):</a:t>
+            </a:r>
+            <a:br/>
+            <a:r>
+              <a:rPr b="0">
+                <a:solidFill>
+                  <a:srgbClr val="526458"/>
+                </a:solidFill>
+              </a:rPr>
+              <a:t>High-performance vector stores and feature stores (e.g. Feast, pgvector) continuously ingest FHIR streams, serving ML models and LLM agents in milliseconds.</a:t>
+            </a:r>
+          </a:p>
+          <a:p>
+            <a:pPr>
+              <a:spcBef>
+                <a:spcPts val="1000"/>
+              </a:spcBef>
+              <a:defRPr b="1" sz="1100">
+                <a:solidFill>
+                  <a:srgbClr val="142118"/>
+                </a:solidFill>
+              </a:defRPr>
+            </a:pPr>
+            <a:r>
+              <a:t>• Health MCP Protocol Standard:</a:t>
+            </a:r>
+            <a:br/>
+            <a:r>
+              <a:rPr b="0">
+                <a:solidFill>
+                  <a:srgbClr val="526458"/>
+                </a:solidFill>
+              </a:rPr>
+              <a:t>Standardizing tool schemas so any clinical AI agent can query and propose treatment orders across any hospital safely.</a:t>
             </a:r>
           </a:p>
         </p:txBody>
@@ -10544,7 +10790,7 @@
             <a:avLst/>
           </a:prstGeom>
           <a:solidFill>
-            <a:srgbClr val="F5F7F5"/>
+            <a:srgbClr val="1B3E24"/>
           </a:solidFill>
           <a:ln>
             <a:noFill/>
@@ -10574,157 +10820,23 @@
       </p:sp>
       <p:sp>
         <p:nvSpPr>
-          <p:cNvPr id="3" name="TextBox 2"/>
-          <p:cNvSpPr txBox="1"/>
-          <p:nvPr/>
-        </p:nvSpPr>
-        <p:spPr>
-          <a:xfrm>
-            <a:off x="731520" y="365760"/>
-            <a:ext cx="7772400" cy="320040"/>
-          </a:xfrm>
-          <a:prstGeom prst="rect">
-            <a:avLst/>
-          </a:prstGeom>
-          <a:noFill/>
-        </p:spPr>
-        <p:txBody>
-          <a:bodyPr wrap="square" lIns="0" rIns="0" tIns="0" bIns="0">
-            <a:spAutoFit/>
-          </a:bodyPr>
-          <a:lstStyle/>
-          <a:p>
-            <a:pPr>
-              <a:defRPr sz="1000" b="1">
-                <a:solidFill>
-                  <a:srgbClr val="285C36"/>
-                </a:solidFill>
-                <a:latin typeface="Arial"/>
-              </a:defRPr>
-            </a:pPr>
-            <a:r>
-              <a:t>PHASE +1 · AIT SPOTLIGHT</a:t>
-            </a:r>
-          </a:p>
-        </p:txBody>
-      </p:sp>
-      <p:sp>
-        <p:nvSpPr>
-          <p:cNvPr id="4" name="TextBox 3"/>
-          <p:cNvSpPr txBox="1"/>
-          <p:nvPr/>
-        </p:nvSpPr>
-        <p:spPr>
-          <a:xfrm>
-            <a:off x="731520" y="658368"/>
-            <a:ext cx="8961120" cy="594360"/>
-          </a:xfrm>
-          <a:prstGeom prst="rect">
-            <a:avLst/>
-          </a:prstGeom>
-          <a:noFill/>
-        </p:spPr>
-        <p:txBody>
-          <a:bodyPr wrap="square" lIns="0" rIns="0" tIns="0" bIns="0">
-            <a:spAutoFit/>
-          </a:bodyPr>
-          <a:lstStyle/>
-          <a:p>
-            <a:pPr>
-              <a:defRPr sz="2100" b="1">
-                <a:solidFill>
-                  <a:srgbClr val="1B3E24"/>
-                </a:solidFill>
-                <a:latin typeface="Arial"/>
-              </a:defRPr>
-            </a:pPr>
-            <a:r>
-              <a:t>AIT Telehealth Project: Four Work Packages</a:t>
-            </a:r>
-          </a:p>
-        </p:txBody>
-      </p:sp>
-      <p:sp>
-        <p:nvSpPr>
-          <p:cNvPr id="5" name="TextBox 4"/>
-          <p:cNvSpPr txBox="1"/>
-          <p:nvPr/>
-        </p:nvSpPr>
-        <p:spPr>
-          <a:xfrm>
-            <a:off x="731520" y="1261872"/>
-            <a:ext cx="9144000" cy="365760"/>
-          </a:xfrm>
-          <a:prstGeom prst="rect">
-            <a:avLst/>
-          </a:prstGeom>
-          <a:noFill/>
-        </p:spPr>
-        <p:txBody>
-          <a:bodyPr wrap="square" lIns="0" rIns="0" tIns="0" bIns="0">
-            <a:spAutoFit/>
-          </a:bodyPr>
-          <a:lstStyle/>
-          <a:p>
-            <a:pPr>
-              <a:defRPr sz="1200">
-                <a:solidFill>
-                  <a:srgbClr val="526458"/>
-                </a:solidFill>
-                <a:latin typeface="Arial"/>
-              </a:defRPr>
-            </a:pPr>
-            <a:r>
-              <a:t>Bridging physical sensor engineering, edge robotics, and secure clinical cloud platforms</a:t>
-            </a:r>
-          </a:p>
-        </p:txBody>
-      </p:sp>
-      <p:pic>
-        <p:nvPicPr>
-          <p:cNvPr id="6" name="Picture 5" descr="ait_logo.png"/>
-          <p:cNvPicPr>
-            <a:picLocks noChangeAspect="1"/>
-          </p:cNvPicPr>
-          <p:nvPr/>
-        </p:nvPicPr>
-        <p:blipFill>
-          <a:blip r:embed="rId2"/>
-          <a:stretch>
-            <a:fillRect/>
-          </a:stretch>
-        </p:blipFill>
-        <p:spPr>
-          <a:xfrm>
-            <a:off x="10149840" y="411480"/>
-            <a:ext cx="1371600" cy="293914"/>
-          </a:xfrm>
-          <a:prstGeom prst="rect">
-            <a:avLst/>
-          </a:prstGeom>
-        </p:spPr>
-      </p:pic>
-      <p:sp>
-        <p:nvSpPr>
-          <p:cNvPr id="7" name="Rounded Rectangle 6"/>
+          <p:cNvPr id="3" name="Rounded Rectangle 2"/>
           <p:cNvSpPr/>
           <p:nvPr/>
         </p:nvSpPr>
         <p:spPr>
           <a:xfrm>
-            <a:off x="731520" y="1828800"/>
-            <a:ext cx="2514600" cy="4389120"/>
+            <a:off x="822960" y="1645920"/>
+            <a:ext cx="5669280" cy="411480"/>
           </a:xfrm>
           <a:prstGeom prst="roundRect">
             <a:avLst/>
           </a:prstGeom>
           <a:solidFill>
-            <a:srgbClr val="FFFFFF"/>
+            <a:srgbClr val="285C36"/>
           </a:solidFill>
-          <a:ln w="15240">
-            <a:solidFill>
-              <a:srgbClr val="D2DCD4"/>
-            </a:solidFill>
+          <a:ln>
+            <a:noFill/>
           </a:ln>
         </p:spPr>
         <p:style>
@@ -10742,92 +10854,91 @@
           </a:fontRef>
         </p:style>
         <p:txBody>
-          <a:bodyPr rtlCol="0" anchor="ctr" lIns="228600" rIns="228600" tIns="228600"/>
+          <a:bodyPr rtlCol="0" anchor="ctr" lIns="182880"/>
           <a:lstStyle/>
           <a:p>
             <a:pPr algn="ctr">
-              <a:defRPr b="1" sz="1050">
+              <a:defRPr b="1" sz="1000">
+                <a:solidFill>
+                  <a:srgbClr val="FFFFFF"/>
+                </a:solidFill>
+              </a:defRPr>
+            </a:pPr>
+            <a:r>
+              <a:t>PHASE +1 · AIT RESEARCH IN ACTION (CHAKLAM'S SPOTLIGHT)</a:t>
+            </a:r>
+          </a:p>
+        </p:txBody>
+      </p:sp>
+      <p:sp>
+        <p:nvSpPr>
+          <p:cNvPr id="4" name="TextBox 3"/>
+          <p:cNvSpPr txBox="1"/>
+          <p:nvPr/>
+        </p:nvSpPr>
+        <p:spPr>
+          <a:xfrm>
+            <a:off x="822960" y="2286000"/>
+            <a:ext cx="10515600" cy="2011680"/>
+          </a:xfrm>
+          <a:prstGeom prst="rect">
+            <a:avLst/>
+          </a:prstGeom>
+          <a:noFill/>
+        </p:spPr>
+        <p:txBody>
+          <a:bodyPr wrap="square">
+            <a:spAutoFit/>
+          </a:bodyPr>
+          <a:lstStyle/>
+          <a:p>
+            <a:pPr>
+              <a:defRPr b="1" sz="3800">
+                <a:solidFill>
+                  <a:srgbClr val="FFFFFF"/>
+                </a:solidFill>
+              </a:defRPr>
+            </a:pPr>
+            <a:r>
+              <a:t>Telehealth &amp; Assistive Systems</a:t>
+            </a:r>
+          </a:p>
+          <a:p>
+            <a:pPr>
+              <a:spcBef>
+                <a:spcPts val="1200"/>
+              </a:spcBef>
+              <a:defRPr sz="1700">
                 <a:solidFill>
                   <a:srgbClr val="94BA33"/>
                 </a:solidFill>
               </a:defRPr>
             </a:pPr>
             <a:r>
-              <a:t>WP1: Optical Glucose Sensing</a:t>
-            </a:r>
-          </a:p>
-          <a:p>
-            <a:pPr>
-              <a:spcBef>
-                <a:spcPts val="400"/>
-              </a:spcBef>
-              <a:defRPr b="1" sz="1300">
-                <a:solidFill>
-                  <a:srgbClr val="1B3E24"/>
-                </a:solidFill>
-              </a:defRPr>
-            </a:pPr>
-            <a:r>
-              <a:t>Non-Invasive Raman Sensor</a:t>
-            </a:r>
-          </a:p>
-          <a:p>
-            <a:pPr>
-              <a:spcBef>
-                <a:spcPts val="800"/>
-              </a:spcBef>
-              <a:defRPr sz="1050">
-                <a:solidFill>
-                  <a:srgbClr val="142118"/>
-                </a:solidFill>
-              </a:defRPr>
-            </a:pPr>
-            <a:r>
-              <a:t>Measures blood glucose without skin pricks using 785nm optical Raman laser spectroscopy.</a:t>
-            </a:r>
-          </a:p>
-          <a:p>
-            <a:pPr>
-              <a:spcBef>
-                <a:spcPts val="1000"/>
-              </a:spcBef>
-              <a:defRPr sz="950">
-                <a:solidFill>
-                  <a:srgbClr val="526458"/>
-                </a:solidFill>
-              </a:defRPr>
-            </a:pPr>
-            <a:r>
-              <a:t>POC App: github.com/akraradets/BloodGlucose-App</a:t>
-            </a:r>
-            <a:br/>
-            <a:r>
-              <a:t>Edge ML calibration models.</a:t>
-            </a:r>
-          </a:p>
-        </p:txBody>
-      </p:sp>
-      <p:sp>
-        <p:nvSpPr>
-          <p:cNvPr id="8" name="Rounded Rectangle 7"/>
+              <a:t>Monitoring and Assistive Systems for Elderly and Disabled People — Prof. Chaklam Silpasuwanchai</a:t>
+            </a:r>
+          </a:p>
+        </p:txBody>
+      </p:sp>
+      <p:sp>
+        <p:nvSpPr>
+          <p:cNvPr id="5" name="Rounded Rectangle 4"/>
           <p:cNvSpPr/>
           <p:nvPr/>
         </p:nvSpPr>
         <p:spPr>
           <a:xfrm>
-            <a:off x="3429000" y="1828800"/>
-            <a:ext cx="2514600" cy="4389120"/>
+            <a:off x="822960" y="4572000"/>
+            <a:ext cx="10515600" cy="1463040"/>
           </a:xfrm>
           <a:prstGeom prst="roundRect">
             <a:avLst/>
           </a:prstGeom>
           <a:solidFill>
-            <a:srgbClr val="FFFFFF"/>
+            <a:srgbClr val="285C36"/>
           </a:solidFill>
-          <a:ln w="15240">
-            <a:solidFill>
-              <a:srgbClr val="D2DCD4"/>
-            </a:solidFill>
+          <a:ln>
+            <a:noFill/>
           </a:ln>
         </p:spPr>
         <p:style>
@@ -10845,18 +10956,18 @@
           </a:fontRef>
         </p:style>
         <p:txBody>
-          <a:bodyPr rtlCol="0" anchor="ctr" lIns="228600" rIns="228600" tIns="228600"/>
+          <a:bodyPr rtlCol="0" anchor="ctr" lIns="274320" tIns="182880"/>
           <a:lstStyle/>
           <a:p>
             <a:pPr algn="ctr">
-              <a:defRPr b="1" sz="1050">
-                <a:solidFill>
-                  <a:srgbClr val="285C36"/>
-                </a:solidFill>
-              </a:defRPr>
-            </a:pPr>
-            <a:r>
-              <a:t>WP2: Activity &amp; Fall Telemetry</a:t>
+              <a:defRPr b="1" sz="1300">
+                <a:solidFill>
+                  <a:srgbClr val="94BA33"/>
+                </a:solidFill>
+              </a:defRPr>
+            </a:pPr>
+            <a:r>
+              <a:t>Grounding Theory in Real AIT Systems Engineering:</a:t>
             </a:r>
           </a:p>
           <a:p>
@@ -10864,254 +10975,14 @@
               <a:spcBef>
                 <a:spcPts val="400"/>
               </a:spcBef>
-              <a:defRPr b="1" sz="1300">
-                <a:solidFill>
-                  <a:srgbClr val="1B3E24"/>
-                </a:solidFill>
-              </a:defRPr>
-            </a:pPr>
-            <a:r>
-              <a:t>Computer Vision &amp; Wi-Fi CSI</a:t>
-            </a:r>
-          </a:p>
-          <a:p>
-            <a:pPr>
-              <a:spcBef>
-                <a:spcPts val="800"/>
-              </a:spcBef>
-              <a:defRPr sz="1050">
-                <a:solidFill>
-                  <a:srgbClr val="142118"/>
-                </a:solidFill>
-              </a:defRPr>
-            </a:pPr>
-            <a:r>
-              <a:t>Monitors elderly mobility and detects falls in real time using privacy-preserving camera feeds and Wi-Fi disturbance.</a:t>
-            </a:r>
-          </a:p>
-          <a:p>
-            <a:pPr>
-              <a:spcBef>
-                <a:spcPts val="1000"/>
-              </a:spcBef>
-              <a:defRPr sz="950">
-                <a:solidFill>
-                  <a:srgbClr val="526458"/>
-                </a:solidFill>
-              </a:defRPr>
-            </a:pPr>
-            <a:r>
-              <a:t>Continuous spatial &amp; time-series AI</a:t>
-            </a:r>
-            <a:br/>
-            <a:r>
-              <a:t>Edge inference on embedded hardware.</a:t>
-            </a:r>
-          </a:p>
-        </p:txBody>
-      </p:sp>
-      <p:sp>
-        <p:nvSpPr>
-          <p:cNvPr id="9" name="Rounded Rectangle 8"/>
-          <p:cNvSpPr/>
-          <p:nvPr/>
-        </p:nvSpPr>
-        <p:spPr>
-          <a:xfrm>
-            <a:off x="6126480" y="1828800"/>
-            <a:ext cx="2514600" cy="4389120"/>
-          </a:xfrm>
-          <a:prstGeom prst="roundRect">
-            <a:avLst/>
-          </a:prstGeom>
-          <a:solidFill>
-            <a:srgbClr val="FFFFFF"/>
-          </a:solidFill>
-          <a:ln w="15240">
-            <a:solidFill>
-              <a:srgbClr val="D2DCD4"/>
-            </a:solidFill>
-          </a:ln>
-        </p:spPr>
-        <p:style>
-          <a:lnRef idx="1">
-            <a:schemeClr val="accent1"/>
-          </a:lnRef>
-          <a:fillRef idx="3">
-            <a:schemeClr val="accent1"/>
-          </a:fillRef>
-          <a:effectRef idx="2">
-            <a:schemeClr val="accent1"/>
-          </a:effectRef>
-          <a:fontRef idx="minor">
-            <a:schemeClr val="lt1"/>
-          </a:fontRef>
-        </p:style>
-        <p:txBody>
-          <a:bodyPr rtlCol="0" anchor="ctr" lIns="228600" rIns="228600" tIns="228600"/>
-          <a:lstStyle/>
-          <a:p>
-            <a:pPr algn="ctr">
-              <a:defRPr b="1" sz="1050">
-                <a:solidFill>
-                  <a:srgbClr val="1B3E24"/>
-                </a:solidFill>
-              </a:defRPr>
-            </a:pPr>
-            <a:r>
-              <a:t>WP3: Remote Haptic Therapy</a:t>
-            </a:r>
-          </a:p>
-          <a:p>
-            <a:pPr>
-              <a:spcBef>
-                <a:spcPts val="400"/>
-              </a:spcBef>
-              <a:defRPr b="1" sz="1300">
-                <a:solidFill>
-                  <a:srgbClr val="1B3E24"/>
-                </a:solidFill>
-              </a:defRPr>
-            </a:pPr>
-            <a:r>
-              <a:t>Robotic Physical Rehabilitation</a:t>
-            </a:r>
-          </a:p>
-          <a:p>
-            <a:pPr>
-              <a:spcBef>
-                <a:spcPts val="800"/>
-              </a:spcBef>
-              <a:defRPr sz="1050">
-                <a:solidFill>
-                  <a:srgbClr val="142118"/>
-                </a:solidFill>
-              </a:defRPr>
-            </a:pPr>
-            <a:r>
-              <a:t>Upper-limb rehabilitation device providing programmable force-feedback for stroke patient recovery.</a:t>
-            </a:r>
-          </a:p>
-          <a:p>
-            <a:pPr>
-              <a:spcBef>
-                <a:spcPts val="1000"/>
-              </a:spcBef>
-              <a:defRPr sz="950">
-                <a:solidFill>
-                  <a:srgbClr val="526458"/>
-                </a:solidFill>
-              </a:defRPr>
-            </a:pPr>
-            <a:r>
-              <a:t>Bi-directional physical telemetry</a:t>
-            </a:r>
-            <a:br/>
-            <a:r>
-              <a:t>Remote clinician tele-operation.</a:t>
-            </a:r>
-          </a:p>
-        </p:txBody>
-      </p:sp>
-      <p:sp>
-        <p:nvSpPr>
-          <p:cNvPr id="10" name="Rounded Rectangle 9"/>
-          <p:cNvSpPr/>
-          <p:nvPr/>
-        </p:nvSpPr>
-        <p:spPr>
-          <a:xfrm>
-            <a:off x="8823960" y="1828800"/>
-            <a:ext cx="2514600" cy="4389120"/>
-          </a:xfrm>
-          <a:prstGeom prst="roundRect">
-            <a:avLst/>
-          </a:prstGeom>
-          <a:solidFill>
-            <a:srgbClr val="FFFFFF"/>
-          </a:solidFill>
-          <a:ln w="15240">
-            <a:solidFill>
-              <a:srgbClr val="D2DCD4"/>
-            </a:solidFill>
-          </a:ln>
-        </p:spPr>
-        <p:style>
-          <a:lnRef idx="1">
-            <a:schemeClr val="accent1"/>
-          </a:lnRef>
-          <a:fillRef idx="3">
-            <a:schemeClr val="accent1"/>
-          </a:fillRef>
-          <a:effectRef idx="2">
-            <a:schemeClr val="accent1"/>
-          </a:effectRef>
-          <a:fontRef idx="minor">
-            <a:schemeClr val="lt1"/>
-          </a:fontRef>
-        </p:style>
-        <p:txBody>
-          <a:bodyPr rtlCol="0" anchor="ctr" lIns="228600" rIns="228600" tIns="228600"/>
-          <a:lstStyle/>
-          <a:p>
-            <a:pPr algn="ctr">
-              <a:defRPr b="1" sz="1050">
-                <a:solidFill>
-                  <a:srgbClr val="C0392B"/>
-                </a:solidFill>
-              </a:defRPr>
-            </a:pPr>
-            <a:r>
-              <a:t>WP4: Cloud Telehealth Platform</a:t>
-            </a:r>
-          </a:p>
-          <a:p>
-            <a:pPr>
-              <a:spcBef>
-                <a:spcPts val="400"/>
-              </a:spcBef>
-              <a:defRPr b="1" sz="1300">
-                <a:solidFill>
-                  <a:srgbClr val="1B3E24"/>
-                </a:solidFill>
-              </a:defRPr>
-            </a:pPr>
-            <a:r>
-              <a:t>Secure FHIR Integration</a:t>
-            </a:r>
-          </a:p>
-          <a:p>
-            <a:pPr>
-              <a:spcBef>
-                <a:spcPts val="800"/>
-              </a:spcBef>
-              <a:defRPr sz="1050">
-                <a:solidFill>
-                  <a:srgbClr val="142118"/>
-                </a:solidFill>
-              </a:defRPr>
-            </a:pPr>
-            <a:r>
-              <a:t>Consolidates telemetry from WP1–WP3 into an encrypted cloud backend for clinician review.</a:t>
-            </a:r>
-          </a:p>
-          <a:p>
-            <a:pPr>
-              <a:spcBef>
-                <a:spcPts val="1000"/>
-              </a:spcBef>
-              <a:defRPr sz="950">
-                <a:solidFill>
-                  <a:srgbClr val="526458"/>
-                </a:solidFill>
-              </a:defRPr>
-            </a:pPr>
-            <a:r>
-              <a:t>Standardized FHIR R4 resources</a:t>
-            </a:r>
-            <a:br/>
-            <a:r>
-              <a:t>Real-time web &amp; mobile dashboards.</a:t>
+              <a:defRPr b="1" sz="1350">
+                <a:solidFill>
+                  <a:srgbClr val="FFFFFF"/>
+                </a:solidFill>
+              </a:defRPr>
+            </a:pPr>
+            <a:r>
+              <a:t>Connecting optical Raman laser sensors, computer vision telemetry, and haptic rehabilitation robotics to global clinical standards and FHIR microservices.</a:t>
             </a:r>
           </a:p>
         </p:txBody>
@@ -11244,7 +11115,7 @@
               </a:defRPr>
             </a:pPr>
             <a:r>
-              <a:t>WP1 Deep Dive: Non-Invasive Glucose via Raman Spectroscopy</a:t>
+              <a:t>AIT Telehealth Project: Four Work Packages</a:t>
             </a:r>
           </a:p>
         </p:txBody>
@@ -11280,7 +11151,7 @@
               </a:defRPr>
             </a:pPr>
             <a:r>
-              <a:t>Translating raw optical spectra into calibrated physiological biomarkers (BloodGlucose-App)</a:t>
+              <a:t>Bridging physical sensor engineering, edge robotics, and secure clinical cloud platforms</a:t>
             </a:r>
           </a:p>
         </p:txBody>
@@ -11318,7 +11189,7 @@
         <p:spPr>
           <a:xfrm>
             <a:off x="731520" y="1828800"/>
-            <a:ext cx="5120640" cy="4389120"/>
+            <a:ext cx="2514600" cy="4389120"/>
           </a:xfrm>
           <a:prstGeom prst="roundRect">
             <a:avLst/>
@@ -11347,33 +11218,48 @@
           </a:fontRef>
         </p:style>
         <p:txBody>
-          <a:bodyPr rtlCol="0" anchor="ctr" lIns="320040" rIns="320040" tIns="320040"/>
+          <a:bodyPr rtlCol="0" anchor="ctr" lIns="228600" rIns="228600" tIns="228600"/>
           <a:lstStyle/>
           <a:p>
             <a:pPr algn="ctr">
-              <a:defRPr b="1" sz="1100">
-                <a:solidFill>
-                  <a:srgbClr val="285C36"/>
-                </a:solidFill>
-              </a:defRPr>
-            </a:pPr>
-            <a:r>
-              <a:t>THE OPTICAL SENSOR PRINCIPLE</a:t>
-            </a:r>
-          </a:p>
-          <a:p>
-            <a:pPr>
-              <a:spcBef>
-                <a:spcPts val="600"/>
-              </a:spcBef>
-              <a:defRPr b="1" sz="1800">
+              <a:defRPr b="1" sz="1050">
+                <a:solidFill>
+                  <a:srgbClr val="94BA33"/>
+                </a:solidFill>
+              </a:defRPr>
+            </a:pPr>
+            <a:r>
+              <a:t>WP1: Optical Glucose Sensing</a:t>
+            </a:r>
+          </a:p>
+          <a:p>
+            <a:pPr>
+              <a:spcBef>
+                <a:spcPts val="400"/>
+              </a:spcBef>
+              <a:defRPr b="1" sz="1300">
                 <a:solidFill>
                   <a:srgbClr val="1B3E24"/>
                 </a:solidFill>
               </a:defRPr>
             </a:pPr>
             <a:r>
-              <a:t>Inelastic Photon Scattering</a:t>
+              <a:t>Non-Invasive Raman Sensor</a:t>
+            </a:r>
+          </a:p>
+          <a:p>
+            <a:pPr>
+              <a:spcBef>
+                <a:spcPts val="800"/>
+              </a:spcBef>
+              <a:defRPr sz="1050">
+                <a:solidFill>
+                  <a:srgbClr val="142118"/>
+                </a:solidFill>
+              </a:defRPr>
+            </a:pPr>
+            <a:r>
+              <a:t>Measures blood glucose without skin pricks using 785nm optical Raman laser spectroscopy.</a:t>
             </a:r>
           </a:p>
           <a:p>
@@ -11381,71 +11267,18 @@
               <a:spcBef>
                 <a:spcPts val="1000"/>
               </a:spcBef>
-              <a:defRPr b="1" sz="1100">
-                <a:solidFill>
-                  <a:srgbClr val="142118"/>
-                </a:solidFill>
-              </a:defRPr>
-            </a:pPr>
-            <a:r>
-              <a:t>• The Clinical Need:</a:t>
+              <a:defRPr sz="950">
+                <a:solidFill>
+                  <a:srgbClr val="526458"/>
+                </a:solidFill>
+              </a:defRPr>
+            </a:pPr>
+            <a:r>
+              <a:t>POC App: github.com/akraradets/BloodGlucose-App</a:t>
             </a:r>
             <a:br/>
             <a:r>
-              <a:rPr b="0">
-                <a:solidFill>
-                  <a:srgbClr val="526458"/>
-                </a:solidFill>
-              </a:rPr>
-              <a:t>Diabetic and elderly patients require frequent daily blood checks. Finger-prick lancets cause tissue damage, infection risks, and poor patient compliance.</a:t>
-            </a:r>
-          </a:p>
-          <a:p>
-            <a:pPr>
-              <a:spcBef>
-                <a:spcPts val="1000"/>
-              </a:spcBef>
-              <a:defRPr b="1" sz="1100">
-                <a:solidFill>
-                  <a:srgbClr val="142118"/>
-                </a:solidFill>
-              </a:defRPr>
-            </a:pPr>
-            <a:r>
-              <a:t>• Raman Spectroscopy:</a:t>
-            </a:r>
-            <a:br/>
-            <a:r>
-              <a:rPr b="0">
-                <a:solidFill>
-                  <a:srgbClr val="526458"/>
-                </a:solidFill>
-              </a:rPr>
-              <a:t>A 785nm near-infrared laser illuminates interstitial fluid. Photons scatter inelastically off glucose molecules, yielding a unique spectral fingerprint around 1125 cm⁻¹.</a:t>
-            </a:r>
-          </a:p>
-          <a:p>
-            <a:pPr>
-              <a:spcBef>
-                <a:spcPts val="1000"/>
-              </a:spcBef>
-              <a:defRPr b="1" sz="1100">
-                <a:solidFill>
-                  <a:srgbClr val="142118"/>
-                </a:solidFill>
-              </a:defRPr>
-            </a:pPr>
-            <a:r>
-              <a:t>• Mobile POC App:</a:t>
-            </a:r>
-            <a:br/>
-            <a:r>
-              <a:rPr b="0">
-                <a:solidFill>
-                  <a:srgbClr val="526458"/>
-                </a:solidFill>
-              </a:rPr>
-              <a:t>Built at AIT (github.com/akraradets/BloodGlucose-App). Connects over Bluetooth Low Energy (BLE) to the Raman hardware spectrometer.</a:t>
+              <a:t>Edge ML calibration models.</a:t>
             </a:r>
           </a:p>
         </p:txBody>
@@ -11458,8 +11291,8 @@
         </p:nvSpPr>
         <p:spPr>
           <a:xfrm>
-            <a:off x="6217920" y="1828800"/>
-            <a:ext cx="5212080" cy="4389120"/>
+            <a:off x="3429000" y="1828800"/>
+            <a:ext cx="2514600" cy="4389120"/>
           </a:xfrm>
           <a:prstGeom prst="roundRect">
             <a:avLst/>
@@ -11488,33 +11321,48 @@
           </a:fontRef>
         </p:style>
         <p:txBody>
-          <a:bodyPr rtlCol="0" anchor="ctr" lIns="320040" rIns="320040" tIns="320040"/>
+          <a:bodyPr rtlCol="0" anchor="ctr" lIns="228600" rIns="228600" tIns="228600"/>
           <a:lstStyle/>
           <a:p>
             <a:pPr algn="ctr">
-              <a:defRPr b="1" sz="1100">
-                <a:solidFill>
-                  <a:srgbClr val="94BA33"/>
-                </a:solidFill>
-              </a:defRPr>
-            </a:pPr>
-            <a:r>
-              <a:t>THE MACHINE LEARNING ENGINE</a:t>
-            </a:r>
-          </a:p>
-          <a:p>
-            <a:pPr>
-              <a:spcBef>
-                <a:spcPts val="600"/>
-              </a:spcBef>
-              <a:defRPr b="1" sz="1800">
+              <a:defRPr b="1" sz="1050">
+                <a:solidFill>
+                  <a:srgbClr val="285C36"/>
+                </a:solidFill>
+              </a:defRPr>
+            </a:pPr>
+            <a:r>
+              <a:t>WP2: Activity &amp; Fall Telemetry</a:t>
+            </a:r>
+          </a:p>
+          <a:p>
+            <a:pPr>
+              <a:spcBef>
+                <a:spcPts val="400"/>
+              </a:spcBef>
+              <a:defRPr b="1" sz="1300">
                 <a:solidFill>
                   <a:srgbClr val="1B3E24"/>
                 </a:solidFill>
               </a:defRPr>
             </a:pPr>
             <a:r>
-              <a:t>Modality 3 → Modality 1 Mapping</a:t>
+              <a:t>Computer Vision &amp; Wi-Fi CSI</a:t>
+            </a:r>
+          </a:p>
+          <a:p>
+            <a:pPr>
+              <a:spcBef>
+                <a:spcPts val="800"/>
+              </a:spcBef>
+              <a:defRPr sz="1050">
+                <a:solidFill>
+                  <a:srgbClr val="142118"/>
+                </a:solidFill>
+              </a:defRPr>
+            </a:pPr>
+            <a:r>
+              <a:t>Monitors elderly mobility and detects falls in real time using privacy-preserving camera feeds and Wi-Fi disturbance.</a:t>
             </a:r>
           </a:p>
           <a:p>
@@ -11522,71 +11370,224 @@
               <a:spcBef>
                 <a:spcPts val="1000"/>
               </a:spcBef>
-              <a:defRPr b="1" sz="1100">
+              <a:defRPr sz="950">
+                <a:solidFill>
+                  <a:srgbClr val="526458"/>
+                </a:solidFill>
+              </a:defRPr>
+            </a:pPr>
+            <a:r>
+              <a:t>Continuous spatial &amp; time-series AI</a:t>
+            </a:r>
+            <a:br/>
+            <a:r>
+              <a:t>Edge inference on embedded hardware.</a:t>
+            </a:r>
+          </a:p>
+        </p:txBody>
+      </p:sp>
+      <p:sp>
+        <p:nvSpPr>
+          <p:cNvPr id="9" name="Rounded Rectangle 8"/>
+          <p:cNvSpPr/>
+          <p:nvPr/>
+        </p:nvSpPr>
+        <p:spPr>
+          <a:xfrm>
+            <a:off x="6126480" y="1828800"/>
+            <a:ext cx="2514600" cy="4389120"/>
+          </a:xfrm>
+          <a:prstGeom prst="roundRect">
+            <a:avLst/>
+          </a:prstGeom>
+          <a:solidFill>
+            <a:srgbClr val="FFFFFF"/>
+          </a:solidFill>
+          <a:ln w="15240">
+            <a:solidFill>
+              <a:srgbClr val="D2DCD4"/>
+            </a:solidFill>
+          </a:ln>
+        </p:spPr>
+        <p:style>
+          <a:lnRef idx="1">
+            <a:schemeClr val="accent1"/>
+          </a:lnRef>
+          <a:fillRef idx="3">
+            <a:schemeClr val="accent1"/>
+          </a:fillRef>
+          <a:effectRef idx="2">
+            <a:schemeClr val="accent1"/>
+          </a:effectRef>
+          <a:fontRef idx="minor">
+            <a:schemeClr val="lt1"/>
+          </a:fontRef>
+        </p:style>
+        <p:txBody>
+          <a:bodyPr rtlCol="0" anchor="ctr" lIns="228600" rIns="228600" tIns="228600"/>
+          <a:lstStyle/>
+          <a:p>
+            <a:pPr algn="ctr">
+              <a:defRPr b="1" sz="1050">
+                <a:solidFill>
+                  <a:srgbClr val="1B3E24"/>
+                </a:solidFill>
+              </a:defRPr>
+            </a:pPr>
+            <a:r>
+              <a:t>WP3: Remote Haptic Therapy</a:t>
+            </a:r>
+          </a:p>
+          <a:p>
+            <a:pPr>
+              <a:spcBef>
+                <a:spcPts val="400"/>
+              </a:spcBef>
+              <a:defRPr b="1" sz="1300">
+                <a:solidFill>
+                  <a:srgbClr val="1B3E24"/>
+                </a:solidFill>
+              </a:defRPr>
+            </a:pPr>
+            <a:r>
+              <a:t>Robotic Physical Rehabilitation</a:t>
+            </a:r>
+          </a:p>
+          <a:p>
+            <a:pPr>
+              <a:spcBef>
+                <a:spcPts val="800"/>
+              </a:spcBef>
+              <a:defRPr sz="1050">
                 <a:solidFill>
                   <a:srgbClr val="142118"/>
                 </a:solidFill>
               </a:defRPr>
             </a:pPr>
             <a:r>
-              <a:t>• Signal Preprocessing:</a:t>
+              <a:t>Upper-limb rehabilitation device providing programmable force-feedback for stroke patient recovery.</a:t>
+            </a:r>
+          </a:p>
+          <a:p>
+            <a:pPr>
+              <a:spcBef>
+                <a:spcPts val="1000"/>
+              </a:spcBef>
+              <a:defRPr sz="950">
+                <a:solidFill>
+                  <a:srgbClr val="526458"/>
+                </a:solidFill>
+              </a:defRPr>
+            </a:pPr>
+            <a:r>
+              <a:t>Bi-directional physical telemetry</a:t>
             </a:r>
             <a:br/>
             <a:r>
-              <a:rPr b="0">
+              <a:t>Remote clinician tele-operation.</a:t>
+            </a:r>
+          </a:p>
+        </p:txBody>
+      </p:sp>
+      <p:sp>
+        <p:nvSpPr>
+          <p:cNvPr id="10" name="Rounded Rectangle 9"/>
+          <p:cNvSpPr/>
+          <p:nvPr/>
+        </p:nvSpPr>
+        <p:spPr>
+          <a:xfrm>
+            <a:off x="8823960" y="1828800"/>
+            <a:ext cx="2514600" cy="4389120"/>
+          </a:xfrm>
+          <a:prstGeom prst="roundRect">
+            <a:avLst/>
+          </a:prstGeom>
+          <a:solidFill>
+            <a:srgbClr val="FFFFFF"/>
+          </a:solidFill>
+          <a:ln w="15240">
+            <a:solidFill>
+              <a:srgbClr val="D2DCD4"/>
+            </a:solidFill>
+          </a:ln>
+        </p:spPr>
+        <p:style>
+          <a:lnRef idx="1">
+            <a:schemeClr val="accent1"/>
+          </a:lnRef>
+          <a:fillRef idx="3">
+            <a:schemeClr val="accent1"/>
+          </a:fillRef>
+          <a:effectRef idx="2">
+            <a:schemeClr val="accent1"/>
+          </a:effectRef>
+          <a:fontRef idx="minor">
+            <a:schemeClr val="lt1"/>
+          </a:fontRef>
+        </p:style>
+        <p:txBody>
+          <a:bodyPr rtlCol="0" anchor="ctr" lIns="228600" rIns="228600" tIns="228600"/>
+          <a:lstStyle/>
+          <a:p>
+            <a:pPr algn="ctr">
+              <a:defRPr b="1" sz="1050">
+                <a:solidFill>
+                  <a:srgbClr val="C0392B"/>
+                </a:solidFill>
+              </a:defRPr>
+            </a:pPr>
+            <a:r>
+              <a:t>WP4: Cloud Telehealth Platform</a:t>
+            </a:r>
+          </a:p>
+          <a:p>
+            <a:pPr>
+              <a:spcBef>
+                <a:spcPts val="400"/>
+              </a:spcBef>
+              <a:defRPr b="1" sz="1300">
+                <a:solidFill>
+                  <a:srgbClr val="1B3E24"/>
+                </a:solidFill>
+              </a:defRPr>
+            </a:pPr>
+            <a:r>
+              <a:t>Secure FHIR Integration</a:t>
+            </a:r>
+          </a:p>
+          <a:p>
+            <a:pPr>
+              <a:spcBef>
+                <a:spcPts val="800"/>
+              </a:spcBef>
+              <a:defRPr sz="1050">
+                <a:solidFill>
+                  <a:srgbClr val="142118"/>
+                </a:solidFill>
+              </a:defRPr>
+            </a:pPr>
+            <a:r>
+              <a:t>Consolidates telemetry from WP1–WP3 into an encrypted cloud backend for clinician review.</a:t>
+            </a:r>
+          </a:p>
+          <a:p>
+            <a:pPr>
+              <a:spcBef>
+                <a:spcPts val="1000"/>
+              </a:spcBef>
+              <a:defRPr sz="950">
                 <a:solidFill>
                   <a:srgbClr val="526458"/>
                 </a:solidFill>
-              </a:rPr>
-              <a:t>Raw spectra suffer from skin autofluorescence and dark current noise. Preprocessing uses baseline polynomial subtraction and Standard Normal Variate (SNV) scaling.</a:t>
-            </a:r>
-          </a:p>
-          <a:p>
-            <a:pPr>
-              <a:spcBef>
-                <a:spcPts val="1000"/>
-              </a:spcBef>
-              <a:defRPr b="1" sz="1100">
-                <a:solidFill>
-                  <a:srgbClr val="142118"/>
-                </a:solidFill>
-              </a:defRPr>
-            </a:pPr>
-            <a:r>
-              <a:t>• Edge Calibration Model:</a:t>
+              </a:defRPr>
+            </a:pPr>
+            <a:r>
+              <a:t>Standardized FHIR R4 resources</a:t>
             </a:r>
             <a:br/>
             <a:r>
-              <a:rPr b="0">
-                <a:solidFill>
-                  <a:srgbClr val="526458"/>
-                </a:solidFill>
-              </a:rPr>
-              <a:t>Partial Least Squares (PLS) regression and Random Forests map the continuous 1D spectral curve directly to blood glucose (mg/dL).</a:t>
-            </a:r>
-          </a:p>
-          <a:p>
-            <a:pPr>
-              <a:spcBef>
-                <a:spcPts val="1000"/>
-              </a:spcBef>
-              <a:defRPr b="1" sz="1100">
-                <a:solidFill>
-                  <a:srgbClr val="142118"/>
-                </a:solidFill>
-              </a:defRPr>
-            </a:pPr>
-            <a:r>
-              <a:t>• The Standard Challenge:</a:t>
-            </a:r>
-            <a:br/>
-            <a:r>
-              <a:rPr b="0">
-                <a:solidFill>
-                  <a:srgbClr val="526458"/>
-                </a:solidFill>
-              </a:rPr>
-              <a:t>Once the phone calculates '118 mg/dL', how do we push it to a hospital EHR without losing context? We serialize it to FHIR!</a:t>
+              <a:t>Real-time web &amp; mobile dashboards.</a:t>
             </a:r>
           </a:p>
         </p:txBody>
@@ -11719,7 +11720,7 @@
               </a:defRPr>
             </a:pPr>
             <a:r>
-              <a:t>Closing the Circuit: Mapping AIT Raman Readings into FHIR</a:t>
+              <a:t>WP1 Deep Dive: Non-Invasive Glucose via Raman Spectroscopy</a:t>
             </a:r>
           </a:p>
         </p:txBody>
@@ -11755,7 +11756,7 @@
               </a:defRPr>
             </a:pPr>
             <a:r>
-              <a:t>How physical sensor telemetry becomes a globally interoperable clinical resource</a:t>
+              <a:t>Translating raw optical spectra into calibrated physiological biomarkers (BloodGlucose-App)</a:t>
             </a:r>
           </a:p>
         </p:txBody>
@@ -11793,7 +11794,7 @@
         <p:spPr>
           <a:xfrm>
             <a:off x="731520" y="1828800"/>
-            <a:ext cx="4389120" cy="4389120"/>
+            <a:ext cx="5120640" cy="4389120"/>
           </a:xfrm>
           <a:prstGeom prst="roundRect">
             <a:avLst/>
@@ -11822,7 +11823,7 @@
           </a:fontRef>
         </p:style>
         <p:txBody>
-          <a:bodyPr rtlCol="0" anchor="ctr" lIns="274320" rIns="274320" tIns="274320"/>
+          <a:bodyPr rtlCol="0" anchor="ctr" lIns="320040" rIns="320040" tIns="320040"/>
           <a:lstStyle/>
           <a:p>
             <a:pPr algn="ctr">
@@ -11833,7 +11834,22 @@
               </a:defRPr>
             </a:pPr>
             <a:r>
-              <a:t>STANDARDS HARMONIZATION</a:t>
+              <a:t>THE OPTICAL SENSOR PRINCIPLE</a:t>
+            </a:r>
+          </a:p>
+          <a:p>
+            <a:pPr>
+              <a:spcBef>
+                <a:spcPts val="600"/>
+              </a:spcBef>
+              <a:defRPr b="1" sz="1800">
+                <a:solidFill>
+                  <a:srgbClr val="1B3E24"/>
+                </a:solidFill>
+              </a:defRPr>
+            </a:pPr>
+            <a:r>
+              <a:t>Inelastic Photon Scattering</a:t>
             </a:r>
           </a:p>
           <a:p>
@@ -11843,12 +11859,12 @@
               </a:spcBef>
               <a:defRPr b="1" sz="1100">
                 <a:solidFill>
-                  <a:srgbClr val="1B3E24"/>
-                </a:solidFill>
-              </a:defRPr>
-            </a:pPr>
-            <a:r>
-              <a:t>LOINC 2339-0:</a:t>
+                  <a:srgbClr val="142118"/>
+                </a:solidFill>
+              </a:defRPr>
+            </a:pPr>
+            <a:r>
+              <a:t>• The Clinical Need:</a:t>
             </a:r>
             <a:br/>
             <a:r>
@@ -11857,7 +11873,7 @@
                   <a:srgbClr val="526458"/>
                 </a:solidFill>
               </a:rPr>
-              <a:t>Standard test code for Glucose [Mass/vol] in Blood. Guarantees that any EHR on Earth recognizes the value as blood sugar.</a:t>
+              <a:t>Diabetic and elderly patients require frequent daily blood checks. Finger-prick lancets cause tissue damage, infection risks, and poor patient compliance.</a:t>
             </a:r>
           </a:p>
           <a:p>
@@ -11867,12 +11883,12 @@
               </a:spcBef>
               <a:defRPr b="1" sz="1100">
                 <a:solidFill>
-                  <a:srgbClr val="1B3E24"/>
-                </a:solidFill>
-              </a:defRPr>
-            </a:pPr>
-            <a:r>
-              <a:t>SNOMED CT 439401001:</a:t>
+                  <a:srgbClr val="142118"/>
+                </a:solidFill>
+              </a:defRPr>
+            </a:pPr>
+            <a:r>
+              <a:t>• Raman Spectroscopy:</a:t>
             </a:r>
             <a:br/>
             <a:r>
@@ -11881,7 +11897,7 @@
                   <a:srgbClr val="526458"/>
                 </a:solidFill>
               </a:rPr>
-              <a:t>Identifies the measurement method as In-vivo Raman spectroscopy rather than a laboratory venous blood draw.</a:t>
+              <a:t>A 785nm near-infrared laser illuminates interstitial fluid. Photons scatter inelastically off glucose molecules, yielding a unique spectral fingerprint around 1125 cm⁻¹.</a:t>
             </a:r>
           </a:p>
           <a:p>
@@ -11891,12 +11907,12 @@
               </a:spcBef>
               <a:defRPr b="1" sz="1100">
                 <a:solidFill>
-                  <a:srgbClr val="1B3E24"/>
-                </a:solidFill>
-              </a:defRPr>
-            </a:pPr>
-            <a:r>
-              <a:t>UCUM Units (mg/dL):</a:t>
+                  <a:srgbClr val="142118"/>
+                </a:solidFill>
+              </a:defRPr>
+            </a:pPr>
+            <a:r>
+              <a:t>• Mobile POC App:</a:t>
             </a:r>
             <a:br/>
             <a:r>
@@ -11905,7 +11921,7 @@
                   <a:srgbClr val="526458"/>
                 </a:solidFill>
               </a:rPr>
-              <a:t>Explicit unit coding eliminates fatal confusion between US (mg/dL) and European/Thai (mmol/L) scales.</a:t>
+              <a:t>Built at AIT (github.com/akraradets/BloodGlucose-App). Connects over Bluetooth Low Energy (BLE) to the Raman hardware spectrometer.</a:t>
             </a:r>
           </a:p>
         </p:txBody>
@@ -11918,17 +11934,19 @@
         </p:nvSpPr>
         <p:spPr>
           <a:xfrm>
-            <a:off x="5394960" y="1828800"/>
-            <a:ext cx="6035040" cy="4389120"/>
+            <a:off x="6217920" y="1828800"/>
+            <a:ext cx="5212080" cy="4389120"/>
           </a:xfrm>
           <a:prstGeom prst="roundRect">
             <a:avLst/>
           </a:prstGeom>
           <a:solidFill>
-            <a:srgbClr val="131E16"/>
+            <a:srgbClr val="FFFFFF"/>
           </a:solidFill>
-          <a:ln>
-            <a:noFill/>
+          <a:ln w="15240">
+            <a:solidFill>
+              <a:srgbClr val="D2DCD4"/>
+            </a:solidFill>
           </a:ln>
         </p:spPr>
         <p:style>
@@ -11946,187 +11964,105 @@
           </a:fontRef>
         </p:style>
         <p:txBody>
-          <a:bodyPr rtlCol="0" anchor="ctr" lIns="274320" rIns="274320" tIns="274320"/>
+          <a:bodyPr rtlCol="0" anchor="ctr" lIns="320040" rIns="320040" tIns="320040"/>
           <a:lstStyle/>
           <a:p>
             <a:pPr algn="ctr">
-              <a:defRPr sz="1050">
+              <a:defRPr b="1" sz="1100">
                 <a:solidFill>
                   <a:srgbClr val="94BA33"/>
                 </a:solidFill>
-                <a:latin typeface="Courier New"/>
-              </a:defRPr>
-            </a:pPr>
-            <a:r>
-              <a:t>// AIT WP1 Raman Glucose in FHIR R4 JSON</a:t>
-            </a:r>
-          </a:p>
-          <a:p>
-            <a:pPr>
-              <a:spcBef>
-                <a:spcPts val="400"/>
-              </a:spcBef>
-              <a:defRPr sz="900">
-                <a:solidFill>
-                  <a:srgbClr val="A6E22E"/>
-                </a:solidFill>
-                <a:latin typeface="Courier New"/>
-              </a:defRPr>
-            </a:pPr>
-            <a:r>
-              <a:t>{</a:t>
+              </a:defRPr>
+            </a:pPr>
+            <a:r>
+              <a:t>THE MACHINE LEARNING ENGINE</a:t>
+            </a:r>
+          </a:p>
+          <a:p>
+            <a:pPr>
+              <a:spcBef>
+                <a:spcPts val="600"/>
+              </a:spcBef>
+              <a:defRPr b="1" sz="1800">
+                <a:solidFill>
+                  <a:srgbClr val="1B3E24"/>
+                </a:solidFill>
+              </a:defRPr>
+            </a:pPr>
+            <a:r>
+              <a:t>Modality 3 → Modality 1 Mapping</a:t>
+            </a:r>
+          </a:p>
+          <a:p>
+            <a:pPr>
+              <a:spcBef>
+                <a:spcPts val="1000"/>
+              </a:spcBef>
+              <a:defRPr b="1" sz="1100">
+                <a:solidFill>
+                  <a:srgbClr val="142118"/>
+                </a:solidFill>
+              </a:defRPr>
+            </a:pPr>
+            <a:r>
+              <a:t>• Signal Preprocessing:</a:t>
             </a:r>
             <a:br/>
             <a:r>
-              <a:t>  "resourceType": "Observation",</a:t>
+              <a:rPr b="0">
+                <a:solidFill>
+                  <a:srgbClr val="526458"/>
+                </a:solidFill>
+              </a:rPr>
+              <a:t>Raw spectra suffer from skin autofluorescence and dark current noise. Preprocessing uses baseline polynomial subtraction and Standard Normal Variate (SNV) scaling.</a:t>
+            </a:r>
+          </a:p>
+          <a:p>
+            <a:pPr>
+              <a:spcBef>
+                <a:spcPts val="1000"/>
+              </a:spcBef>
+              <a:defRPr b="1" sz="1100">
+                <a:solidFill>
+                  <a:srgbClr val="142118"/>
+                </a:solidFill>
+              </a:defRPr>
+            </a:pPr>
+            <a:r>
+              <a:t>• Edge Calibration Model:</a:t>
             </a:r>
             <a:br/>
             <a:r>
-              <a:t>  "id": "ait-raman-glucose-001",</a:t>
+              <a:rPr b="0">
+                <a:solidFill>
+                  <a:srgbClr val="526458"/>
+                </a:solidFill>
+              </a:rPr>
+              <a:t>Partial Least Squares (PLS) regression and Random Forests map the continuous 1D spectral curve directly to blood glucose (mg/dL).</a:t>
+            </a:r>
+          </a:p>
+          <a:p>
+            <a:pPr>
+              <a:spcBef>
+                <a:spcPts val="1000"/>
+              </a:spcBef>
+              <a:defRPr b="1" sz="1100">
+                <a:solidFill>
+                  <a:srgbClr val="142118"/>
+                </a:solidFill>
+              </a:defRPr>
+            </a:pPr>
+            <a:r>
+              <a:t>• The Standard Challenge:</a:t>
             </a:r>
             <a:br/>
             <a:r>
-              <a:t>  "status": "final",</a:t>
-            </a:r>
-          </a:p>
-          <a:p>
-            <a:pPr>
-              <a:spcBef>
-                <a:spcPts val="400"/>
-              </a:spcBef>
-              <a:defRPr sz="900">
-                <a:solidFill>
-                  <a:srgbClr val="A6E22E"/>
-                </a:solidFill>
-                <a:latin typeface="Courier New"/>
-              </a:defRPr>
-            </a:pPr>
-            <a:r>
-              <a:t>  "code": {</a:t>
-            </a:r>
-            <a:br/>
-            <a:r>
-              <a:t>    "coding": [{</a:t>
-            </a:r>
-            <a:br/>
-            <a:r>
-              <a:t>      "system": "http://loinc.org",</a:t>
-            </a:r>
-            <a:br/>
-            <a:r>
-              <a:t>      "code": "2339-0",</a:t>
-            </a:r>
-            <a:br/>
-            <a:r>
-              <a:t>      "display": "Glucose [Mass/vol] in Blood"</a:t>
-            </a:r>
-            <a:br/>
-            <a:r>
-              <a:t>    }]</a:t>
-            </a:r>
-            <a:br/>
-            <a:r>
-              <a:t>  },</a:t>
-            </a:r>
-          </a:p>
-          <a:p>
-            <a:pPr>
-              <a:spcBef>
-                <a:spcPts val="400"/>
-              </a:spcBef>
-              <a:defRPr sz="900">
-                <a:solidFill>
-                  <a:srgbClr val="A6E22E"/>
-                </a:solidFill>
-                <a:latin typeface="Courier New"/>
-              </a:defRPr>
-            </a:pPr>
-            <a:r>
-              <a:t>  "subject": { "reference": "Patient/P0001" },</a:t>
-            </a:r>
-            <a:br/>
-            <a:r>
-              <a:t>  "effectiveDateTime": "2026-09-09T10:30:00+07:00",</a:t>
-            </a:r>
-          </a:p>
-          <a:p>
-            <a:pPr>
-              <a:spcBef>
-                <a:spcPts val="400"/>
-              </a:spcBef>
-              <a:defRPr sz="900">
-                <a:solidFill>
-                  <a:srgbClr val="A6E22E"/>
-                </a:solidFill>
-                <a:latin typeface="Courier New"/>
-              </a:defRPr>
-            </a:pPr>
-            <a:r>
-              <a:t>  "valueQuantity": {</a:t>
-            </a:r>
-            <a:br/>
-            <a:r>
-              <a:t>    "value": 118,</a:t>
-            </a:r>
-            <a:br/>
-            <a:r>
-              <a:t>    "unit": "mg/dL",</a:t>
-            </a:r>
-            <a:br/>
-            <a:r>
-              <a:t>    "system": "http://unitsofmeasure.org",</a:t>
-            </a:r>
-            <a:br/>
-            <a:r>
-              <a:t>    "code": "mg/dL"</a:t>
-            </a:r>
-            <a:br/>
-            <a:r>
-              <a:t>  },</a:t>
-            </a:r>
-          </a:p>
-          <a:p>
-            <a:pPr>
-              <a:spcBef>
-                <a:spcPts val="400"/>
-              </a:spcBef>
-              <a:defRPr sz="900">
-                <a:solidFill>
-                  <a:srgbClr val="A6E22E"/>
-                </a:solidFill>
-                <a:latin typeface="Courier New"/>
-              </a:defRPr>
-            </a:pPr>
-            <a:r>
-              <a:t>  "method": {</a:t>
-            </a:r>
-            <a:br/>
-            <a:r>
-              <a:t>    "coding": [{</a:t>
-            </a:r>
-            <a:br/>
-            <a:r>
-              <a:t>      "system": "http://snomed.info/sct",</a:t>
-            </a:r>
-            <a:br/>
-            <a:r>
-              <a:t>      "code": "439401001",</a:t>
-            </a:r>
-            <a:br/>
-            <a:r>
-              <a:t>      "display": "In-vivo Raman spectroscopy"</a:t>
-            </a:r>
-            <a:br/>
-            <a:r>
-              <a:t>    }]</a:t>
-            </a:r>
-            <a:br/>
-            <a:r>
-              <a:t>  }</a:t>
-            </a:r>
-            <a:br/>
-            <a:r>
-              <a:t>}</a:t>
+              <a:rPr b="0">
+                <a:solidFill>
+                  <a:srgbClr val="526458"/>
+                </a:solidFill>
+              </a:rPr>
+              <a:t>Once the phone calculates '118 mg/dL', how do we push it to a hospital EHR without losing context? We serialize it to FHIR!</a:t>
             </a:r>
           </a:p>
         </p:txBody>
@@ -12223,7 +12159,7 @@
               </a:defRPr>
             </a:pPr>
             <a:r>
-              <a:t>BRIDGE TO AFTERNOON</a:t>
+              <a:t>PHASE +1 · AIT SPOTLIGHT</a:t>
             </a:r>
           </a:p>
         </p:txBody>
@@ -12259,7 +12195,7 @@
               </a:defRPr>
             </a:pPr>
             <a:r>
-              <a:t>Closing the Classical Loop &amp; Tech Checkpoint</a:t>
+              <a:t>Closing the Circuit: Mapping AIT Raman Readings into FHIR</a:t>
             </a:r>
           </a:p>
         </p:txBody>
@@ -12295,7 +12231,7 @@
               </a:defRPr>
             </a:pPr>
             <a:r>
-              <a:t>Verify your environment now so the room is 100% ready to run code at 14:00</a:t>
+              <a:t>How physical sensor telemetry becomes a globally interoperable clinical resource</a:t>
             </a:r>
           </a:p>
         </p:txBody>
@@ -12333,7 +12269,7 @@
         <p:spPr>
           <a:xfrm>
             <a:off x="731520" y="1828800"/>
-            <a:ext cx="3429000" cy="4389120"/>
+            <a:ext cx="4389120" cy="4389120"/>
           </a:xfrm>
           <a:prstGeom prst="roundRect">
             <a:avLst/>
@@ -12366,45 +12302,86 @@
           <a:lstStyle/>
           <a:p>
             <a:pPr algn="ctr">
-              <a:defRPr b="1" sz="1300">
-                <a:solidFill>
-                  <a:srgbClr val="94BA33"/>
-                </a:solidFill>
-              </a:defRPr>
-            </a:pPr>
-            <a:r>
-              <a:t>CLOSING THE LOOP</a:t>
-            </a:r>
-          </a:p>
-          <a:p>
-            <a:pPr>
-              <a:spcBef>
-                <a:spcPts val="400"/>
-              </a:spcBef>
-              <a:defRPr b="1" sz="1500">
+              <a:defRPr b="1" sz="1100">
+                <a:solidFill>
+                  <a:srgbClr val="285C36"/>
+                </a:solidFill>
+              </a:defRPr>
+            </a:pPr>
+            <a:r>
+              <a:t>STANDARDS HARMONIZATION</a:t>
+            </a:r>
+          </a:p>
+          <a:p>
+            <a:pPr>
+              <a:spcBef>
+                <a:spcPts val="1000"/>
+              </a:spcBef>
+              <a:defRPr b="1" sz="1100">
                 <a:solidFill>
                   <a:srgbClr val="1B3E24"/>
                 </a:solidFill>
               </a:defRPr>
             </a:pPr>
             <a:r>
-              <a:t>Predictions Back as FHIR</a:t>
-            </a:r>
-          </a:p>
-          <a:p>
-            <a:pPr>
-              <a:spcBef>
-                <a:spcPts val="1200"/>
-              </a:spcBef>
-              <a:defRPr sz="1050">
-                <a:solidFill>
-                  <a:srgbClr val="142118"/>
-                </a:solidFill>
-                <a:latin typeface="Arial"/>
-              </a:defRPr>
-            </a:pPr>
-            <a:r>
-              <a:t>In Step 5c of this afternoon's workshop, clicking 'Send to record' wraps our scikit-learn cancer risk prediction back into a valid FHIR RiskAssessment and Observation resource.</a:t>
+              <a:t>LOINC 2339-0:</a:t>
+            </a:r>
+            <a:br/>
+            <a:r>
+              <a:rPr b="0">
+                <a:solidFill>
+                  <a:srgbClr val="526458"/>
+                </a:solidFill>
+              </a:rPr>
+              <a:t>Standard test code for Glucose [Mass/vol] in Blood. Guarantees that any EHR on Earth recognizes the value as blood sugar.</a:t>
+            </a:r>
+          </a:p>
+          <a:p>
+            <a:pPr>
+              <a:spcBef>
+                <a:spcPts val="1000"/>
+              </a:spcBef>
+              <a:defRPr b="1" sz="1100">
+                <a:solidFill>
+                  <a:srgbClr val="1B3E24"/>
+                </a:solidFill>
+              </a:defRPr>
+            </a:pPr>
+            <a:r>
+              <a:t>SNOMED CT 439401001:</a:t>
+            </a:r>
+            <a:br/>
+            <a:r>
+              <a:rPr b="0">
+                <a:solidFill>
+                  <a:srgbClr val="526458"/>
+                </a:solidFill>
+              </a:rPr>
+              <a:t>Identifies the measurement method as In-vivo Raman spectroscopy rather than a laboratory venous blood draw.</a:t>
+            </a:r>
+          </a:p>
+          <a:p>
+            <a:pPr>
+              <a:spcBef>
+                <a:spcPts val="1000"/>
+              </a:spcBef>
+              <a:defRPr b="1" sz="1100">
+                <a:solidFill>
+                  <a:srgbClr val="1B3E24"/>
+                </a:solidFill>
+              </a:defRPr>
+            </a:pPr>
+            <a:r>
+              <a:t>UCUM Units (mg/dL):</a:t>
+            </a:r>
+            <a:br/>
+            <a:r>
+              <a:rPr b="0">
+                <a:solidFill>
+                  <a:srgbClr val="526458"/>
+                </a:solidFill>
+              </a:rPr>
+              <a:t>Explicit unit coding eliminates fatal confusion between US (mg/dL) and European/Thai (mmol/L) scales.</a:t>
             </a:r>
           </a:p>
         </p:txBody>
@@ -12417,19 +12394,17 @@
         </p:nvSpPr>
         <p:spPr>
           <a:xfrm>
-            <a:off x="4343400" y="1828800"/>
-            <a:ext cx="3429000" cy="4389120"/>
+            <a:off x="5394960" y="1828800"/>
+            <a:ext cx="6035040" cy="4389120"/>
           </a:xfrm>
           <a:prstGeom prst="roundRect">
             <a:avLst/>
           </a:prstGeom>
           <a:solidFill>
-            <a:srgbClr val="FFFFFF"/>
+            <a:srgbClr val="131E16"/>
           </a:solidFill>
-          <a:ln w="15240">
-            <a:solidFill>
-              <a:srgbClr val="D2DCD4"/>
-            </a:solidFill>
+          <a:ln>
+            <a:noFill/>
           </a:ln>
         </p:spPr>
         <p:style>
@@ -12451,14 +12426,15 @@
           <a:lstStyle/>
           <a:p>
             <a:pPr algn="ctr">
-              <a:defRPr b="1" sz="1300">
+              <a:defRPr sz="1050">
                 <a:solidFill>
                   <a:srgbClr val="94BA33"/>
                 </a:solidFill>
-              </a:defRPr>
-            </a:pPr>
-            <a:r>
-              <a:t>TERMINAL CHECK</a:t>
+                <a:latin typeface="Courier New"/>
+              </a:defRPr>
+            </a:pPr>
+            <a:r>
+              <a:t>// AIT WP1 Raman Glucose in FHIR R4 JSON</a:t>
             </a:r>
           </a:p>
           <a:p>
@@ -12466,94 +12442,67 @@
               <a:spcBef>
                 <a:spcPts val="400"/>
               </a:spcBef>
-              <a:defRPr b="1" sz="1500">
-                <a:solidFill>
-                  <a:srgbClr val="1B3E24"/>
-                </a:solidFill>
-              </a:defRPr>
-            </a:pPr>
-            <a:r>
-              <a:t>Navigate to Repo Root</a:t>
-            </a:r>
-          </a:p>
-          <a:p>
-            <a:pPr>
-              <a:spcBef>
-                <a:spcPts val="1200"/>
-              </a:spcBef>
-              <a:defRPr sz="1050">
-                <a:solidFill>
-                  <a:srgbClr val="142118"/>
-                </a:solidFill>
-                <a:latin typeface="Arial"/>
-              </a:defRPr>
-            </a:pPr>
-            <a:r>
-              <a:t>Open your terminal application and verify your current working directory:</a:t>
+              <a:defRPr sz="900">
+                <a:solidFill>
+                  <a:srgbClr val="A6E22E"/>
+                </a:solidFill>
+                <a:latin typeface="Courier New"/>
+              </a:defRPr>
+            </a:pPr>
+            <a:r>
+              <a:t>{</a:t>
             </a:r>
             <a:br/>
+            <a:r>
+              <a:t>  "resourceType": "Observation",</a:t>
+            </a:r>
             <a:br/>
             <a:r>
-              <a:t>$ cd fhir-ml-workshop</a:t>
+              <a:t>  "id": "ait-raman-glucose-001",</a:t>
             </a:r>
             <a:br/>
+            <a:r>
+              <a:t>  "status": "final",</a:t>
+            </a:r>
+          </a:p>
+          <a:p>
+            <a:pPr>
+              <a:spcBef>
+                <a:spcPts val="400"/>
+              </a:spcBef>
+              <a:defRPr sz="900">
+                <a:solidFill>
+                  <a:srgbClr val="A6E22E"/>
+                </a:solidFill>
+                <a:latin typeface="Courier New"/>
+              </a:defRPr>
+            </a:pPr>
+            <a:r>
+              <a:t>  "code": {</a:t>
+            </a:r>
             <a:br/>
             <a:r>
-              <a:t>Ensure git branch is clean.</a:t>
-            </a:r>
-          </a:p>
-        </p:txBody>
-      </p:sp>
-      <p:sp>
-        <p:nvSpPr>
-          <p:cNvPr id="9" name="Rounded Rectangle 8"/>
-          <p:cNvSpPr/>
-          <p:nvPr/>
-        </p:nvSpPr>
-        <p:spPr>
-          <a:xfrm>
-            <a:off x="7955280" y="1828800"/>
-            <a:ext cx="3429000" cy="4389120"/>
-          </a:xfrm>
-          <a:prstGeom prst="roundRect">
-            <a:avLst/>
-          </a:prstGeom>
-          <a:solidFill>
-            <a:srgbClr val="FFFFFF"/>
-          </a:solidFill>
-          <a:ln w="15240">
-            <a:solidFill>
-              <a:srgbClr val="D2DCD4"/>
-            </a:solidFill>
-          </a:ln>
-        </p:spPr>
-        <p:style>
-          <a:lnRef idx="1">
-            <a:schemeClr val="accent1"/>
-          </a:lnRef>
-          <a:fillRef idx="3">
-            <a:schemeClr val="accent1"/>
-          </a:fillRef>
-          <a:effectRef idx="2">
-            <a:schemeClr val="accent1"/>
-          </a:effectRef>
-          <a:fontRef idx="minor">
-            <a:schemeClr val="lt1"/>
-          </a:fontRef>
-        </p:style>
-        <p:txBody>
-          <a:bodyPr rtlCol="0" anchor="ctr" lIns="274320" rIns="274320" tIns="274320"/>
-          <a:lstStyle/>
-          <a:p>
-            <a:pPr algn="ctr">
-              <a:defRPr b="1" sz="1300">
-                <a:solidFill>
-                  <a:srgbClr val="94BA33"/>
-                </a:solidFill>
-              </a:defRPr>
-            </a:pPr>
-            <a:r>
-              <a:t>SYNC ENVIRONMENT</a:t>
+              <a:t>    "coding": [{</a:t>
+            </a:r>
+            <a:br/>
+            <a:r>
+              <a:t>      "system": "http://loinc.org",</a:t>
+            </a:r>
+            <a:br/>
+            <a:r>
+              <a:t>      "code": "2339-0",</a:t>
+            </a:r>
+            <a:br/>
+            <a:r>
+              <a:t>      "display": "Glucose [Mass/vol] in Blood"</a:t>
+            </a:r>
+            <a:br/>
+            <a:r>
+              <a:t>    }]</a:t>
+            </a:r>
+            <a:br/>
+            <a:r>
+              <a:t>  },</a:t>
             </a:r>
           </a:p>
           <a:p>
@@ -12561,44 +12510,99 @@
               <a:spcBef>
                 <a:spcPts val="400"/>
               </a:spcBef>
-              <a:defRPr b="1" sz="1500">
-                <a:solidFill>
-                  <a:srgbClr val="1B3E24"/>
-                </a:solidFill>
-              </a:defRPr>
-            </a:pPr>
-            <a:r>
-              <a:t>Verify Libraries Before Lunch</a:t>
-            </a:r>
-          </a:p>
-          <a:p>
-            <a:pPr>
-              <a:spcBef>
-                <a:spcPts val="1200"/>
-              </a:spcBef>
-              <a:defRPr sz="1050">
-                <a:solidFill>
-                  <a:srgbClr val="142118"/>
-                </a:solidFill>
-                <a:latin typeface="Arial"/>
-              </a:defRPr>
-            </a:pPr>
-            <a:r>
-              <a:t>Run the fast package synchronizer from inside the repository:</a:t>
+              <a:defRPr sz="900">
+                <a:solidFill>
+                  <a:srgbClr val="A6E22E"/>
+                </a:solidFill>
+                <a:latin typeface="Courier New"/>
+              </a:defRPr>
+            </a:pPr>
+            <a:r>
+              <a:t>  "subject": { "reference": "Patient/P0001" },</a:t>
             </a:r>
             <a:br/>
+            <a:r>
+              <a:t>  "effectiveDateTime": "2026-09-09T10:30:00+07:00",</a:t>
+            </a:r>
+          </a:p>
+          <a:p>
+            <a:pPr>
+              <a:spcBef>
+                <a:spcPts val="400"/>
+              </a:spcBef>
+              <a:defRPr sz="900">
+                <a:solidFill>
+                  <a:srgbClr val="A6E22E"/>
+                </a:solidFill>
+                <a:latin typeface="Courier New"/>
+              </a:defRPr>
+            </a:pPr>
+            <a:r>
+              <a:t>  "valueQuantity": {</a:t>
+            </a:r>
             <a:br/>
             <a:r>
-              <a:t>$ uv sync</a:t>
+              <a:t>    "value": 118,</a:t>
             </a:r>
             <a:br/>
+            <a:r>
+              <a:t>    "unit": "mg/dL",</a:t>
+            </a:r>
             <a:br/>
             <a:r>
-              <a:t>Verify sklearn:</a:t>
+              <a:t>    "system": "http://unitsofmeasure.org",</a:t>
             </a:r>
             <a:br/>
             <a:r>
-              <a:t>$ uv run python -c "import sklearn; print(sklearn.__version__)"</a:t>
+              <a:t>    "code": "mg/dL"</a:t>
+            </a:r>
+            <a:br/>
+            <a:r>
+              <a:t>  },</a:t>
+            </a:r>
+          </a:p>
+          <a:p>
+            <a:pPr>
+              <a:spcBef>
+                <a:spcPts val="400"/>
+              </a:spcBef>
+              <a:defRPr sz="900">
+                <a:solidFill>
+                  <a:srgbClr val="A6E22E"/>
+                </a:solidFill>
+                <a:latin typeface="Courier New"/>
+              </a:defRPr>
+            </a:pPr>
+            <a:r>
+              <a:t>  "method": {</a:t>
+            </a:r>
+            <a:br/>
+            <a:r>
+              <a:t>    "coding": [{</a:t>
+            </a:r>
+            <a:br/>
+            <a:r>
+              <a:t>      "system": "http://snomed.info/sct",</a:t>
+            </a:r>
+            <a:br/>
+            <a:r>
+              <a:t>      "code": "439401001",</a:t>
+            </a:r>
+            <a:br/>
+            <a:r>
+              <a:t>      "display": "In-vivo Raman spectroscopy"</a:t>
+            </a:r>
+            <a:br/>
+            <a:r>
+              <a:t>    }]</a:t>
+            </a:r>
+            <a:br/>
+            <a:r>
+              <a:t>  }</a:t>
+            </a:r>
+            <a:br/>
+            <a:r>
+              <a:t>}</a:t>
             </a:r>
           </a:p>
         </p:txBody>
@@ -12953,6 +12957,478 @@
                 </a:solidFill>
               </a:rPr>
               <a:t>Records were frequently misfiled, stained, illegible, or lost in fires. If a patient moved to another town or hospital, their clinical history vanished completely.</a:t>
+            </a:r>
+          </a:p>
+        </p:txBody>
+      </p:sp>
+    </p:spTree>
+  </p:cSld>
+  <p:clrMapOvr>
+    <a:masterClrMapping/>
+  </p:clrMapOvr>
+</p:sld>
+</file>
+
+<file path=ppt/slides/slide30.xml><?xml version="1.0" encoding="utf-8"?>
+<p:sld xmlns:a="http://schemas.openxmlformats.org/drawingml/2006/main" xmlns:p="http://schemas.openxmlformats.org/presentationml/2006/main" xmlns:r="http://schemas.openxmlformats.org/officeDocument/2006/relationships">
+  <p:cSld>
+    <p:spTree>
+      <p:nvGrpSpPr>
+        <p:cNvPr id="1" name=""/>
+        <p:cNvGrpSpPr/>
+        <p:nvPr/>
+      </p:nvGrpSpPr>
+      <p:grpSpPr/>
+      <p:sp>
+        <p:nvSpPr>
+          <p:cNvPr id="2" name="Rectangle 1"/>
+          <p:cNvSpPr/>
+          <p:nvPr/>
+        </p:nvSpPr>
+        <p:spPr>
+          <a:xfrm>
+            <a:off x="0" y="0"/>
+            <a:ext cx="12191695" cy="6858000"/>
+          </a:xfrm>
+          <a:prstGeom prst="rect">
+            <a:avLst/>
+          </a:prstGeom>
+          <a:solidFill>
+            <a:srgbClr val="F5F7F5"/>
+          </a:solidFill>
+          <a:ln>
+            <a:noFill/>
+          </a:ln>
+        </p:spPr>
+        <p:style>
+          <a:lnRef idx="1">
+            <a:schemeClr val="accent1"/>
+          </a:lnRef>
+          <a:fillRef idx="3">
+            <a:schemeClr val="accent1"/>
+          </a:fillRef>
+          <a:effectRef idx="2">
+            <a:schemeClr val="accent1"/>
+          </a:effectRef>
+          <a:fontRef idx="minor">
+            <a:schemeClr val="lt1"/>
+          </a:fontRef>
+        </p:style>
+        <p:txBody>
+          <a:bodyPr rtlCol="0" anchor="ctr"/>
+          <a:lstStyle/>
+          <a:p>
+            <a:pPr algn="ctr"/>
+          </a:p>
+        </p:txBody>
+      </p:sp>
+      <p:sp>
+        <p:nvSpPr>
+          <p:cNvPr id="3" name="TextBox 2"/>
+          <p:cNvSpPr txBox="1"/>
+          <p:nvPr/>
+        </p:nvSpPr>
+        <p:spPr>
+          <a:xfrm>
+            <a:off x="731520" y="365760"/>
+            <a:ext cx="7772400" cy="320040"/>
+          </a:xfrm>
+          <a:prstGeom prst="rect">
+            <a:avLst/>
+          </a:prstGeom>
+          <a:noFill/>
+        </p:spPr>
+        <p:txBody>
+          <a:bodyPr wrap="square" lIns="0" rIns="0" tIns="0" bIns="0">
+            <a:spAutoFit/>
+          </a:bodyPr>
+          <a:lstStyle/>
+          <a:p>
+            <a:pPr>
+              <a:defRPr sz="1000" b="1">
+                <a:solidFill>
+                  <a:srgbClr val="285C36"/>
+                </a:solidFill>
+                <a:latin typeface="Arial"/>
+              </a:defRPr>
+            </a:pPr>
+            <a:r>
+              <a:t>BRIDGE TO AFTERNOON</a:t>
+            </a:r>
+          </a:p>
+        </p:txBody>
+      </p:sp>
+      <p:sp>
+        <p:nvSpPr>
+          <p:cNvPr id="4" name="TextBox 3"/>
+          <p:cNvSpPr txBox="1"/>
+          <p:nvPr/>
+        </p:nvSpPr>
+        <p:spPr>
+          <a:xfrm>
+            <a:off x="731520" y="658368"/>
+            <a:ext cx="8961120" cy="594360"/>
+          </a:xfrm>
+          <a:prstGeom prst="rect">
+            <a:avLst/>
+          </a:prstGeom>
+          <a:noFill/>
+        </p:spPr>
+        <p:txBody>
+          <a:bodyPr wrap="square" lIns="0" rIns="0" tIns="0" bIns="0">
+            <a:spAutoFit/>
+          </a:bodyPr>
+          <a:lstStyle/>
+          <a:p>
+            <a:pPr>
+              <a:defRPr sz="2100" b="1">
+                <a:solidFill>
+                  <a:srgbClr val="1B3E24"/>
+                </a:solidFill>
+                <a:latin typeface="Arial"/>
+              </a:defRPr>
+            </a:pPr>
+            <a:r>
+              <a:t>Closing the Classical Loop &amp; Tech Checkpoint</a:t>
+            </a:r>
+          </a:p>
+        </p:txBody>
+      </p:sp>
+      <p:sp>
+        <p:nvSpPr>
+          <p:cNvPr id="5" name="TextBox 4"/>
+          <p:cNvSpPr txBox="1"/>
+          <p:nvPr/>
+        </p:nvSpPr>
+        <p:spPr>
+          <a:xfrm>
+            <a:off x="731520" y="1261872"/>
+            <a:ext cx="9144000" cy="365760"/>
+          </a:xfrm>
+          <a:prstGeom prst="rect">
+            <a:avLst/>
+          </a:prstGeom>
+          <a:noFill/>
+        </p:spPr>
+        <p:txBody>
+          <a:bodyPr wrap="square" lIns="0" rIns="0" tIns="0" bIns="0">
+            <a:spAutoFit/>
+          </a:bodyPr>
+          <a:lstStyle/>
+          <a:p>
+            <a:pPr>
+              <a:defRPr sz="1200">
+                <a:solidFill>
+                  <a:srgbClr val="526458"/>
+                </a:solidFill>
+                <a:latin typeface="Arial"/>
+              </a:defRPr>
+            </a:pPr>
+            <a:r>
+              <a:t>Verify your environment now so the room is 100% ready to run code at 14:00</a:t>
+            </a:r>
+          </a:p>
+        </p:txBody>
+      </p:sp>
+      <p:pic>
+        <p:nvPicPr>
+          <p:cNvPr id="6" name="Picture 5" descr="ait_logo.png"/>
+          <p:cNvPicPr>
+            <a:picLocks noChangeAspect="1"/>
+          </p:cNvPicPr>
+          <p:nvPr/>
+        </p:nvPicPr>
+        <p:blipFill>
+          <a:blip r:embed="rId2"/>
+          <a:stretch>
+            <a:fillRect/>
+          </a:stretch>
+        </p:blipFill>
+        <p:spPr>
+          <a:xfrm>
+            <a:off x="10149840" y="411480"/>
+            <a:ext cx="1371600" cy="293914"/>
+          </a:xfrm>
+          <a:prstGeom prst="rect">
+            <a:avLst/>
+          </a:prstGeom>
+        </p:spPr>
+      </p:pic>
+      <p:sp>
+        <p:nvSpPr>
+          <p:cNvPr id="7" name="Rounded Rectangle 6"/>
+          <p:cNvSpPr/>
+          <p:nvPr/>
+        </p:nvSpPr>
+        <p:spPr>
+          <a:xfrm>
+            <a:off x="731520" y="1828800"/>
+            <a:ext cx="3429000" cy="4389120"/>
+          </a:xfrm>
+          <a:prstGeom prst="roundRect">
+            <a:avLst/>
+          </a:prstGeom>
+          <a:solidFill>
+            <a:srgbClr val="FFFFFF"/>
+          </a:solidFill>
+          <a:ln w="15240">
+            <a:solidFill>
+              <a:srgbClr val="D2DCD4"/>
+            </a:solidFill>
+          </a:ln>
+        </p:spPr>
+        <p:style>
+          <a:lnRef idx="1">
+            <a:schemeClr val="accent1"/>
+          </a:lnRef>
+          <a:fillRef idx="3">
+            <a:schemeClr val="accent1"/>
+          </a:fillRef>
+          <a:effectRef idx="2">
+            <a:schemeClr val="accent1"/>
+          </a:effectRef>
+          <a:fontRef idx="minor">
+            <a:schemeClr val="lt1"/>
+          </a:fontRef>
+        </p:style>
+        <p:txBody>
+          <a:bodyPr rtlCol="0" anchor="ctr" lIns="274320" rIns="274320" tIns="274320"/>
+          <a:lstStyle/>
+          <a:p>
+            <a:pPr algn="ctr">
+              <a:defRPr b="1" sz="1300">
+                <a:solidFill>
+                  <a:srgbClr val="94BA33"/>
+                </a:solidFill>
+              </a:defRPr>
+            </a:pPr>
+            <a:r>
+              <a:t>CLOSING THE LOOP</a:t>
+            </a:r>
+          </a:p>
+          <a:p>
+            <a:pPr>
+              <a:spcBef>
+                <a:spcPts val="400"/>
+              </a:spcBef>
+              <a:defRPr b="1" sz="1500">
+                <a:solidFill>
+                  <a:srgbClr val="1B3E24"/>
+                </a:solidFill>
+              </a:defRPr>
+            </a:pPr>
+            <a:r>
+              <a:t>Predictions Back as FHIR</a:t>
+            </a:r>
+          </a:p>
+          <a:p>
+            <a:pPr>
+              <a:spcBef>
+                <a:spcPts val="1200"/>
+              </a:spcBef>
+              <a:defRPr sz="1050">
+                <a:solidFill>
+                  <a:srgbClr val="142118"/>
+                </a:solidFill>
+                <a:latin typeface="Arial"/>
+              </a:defRPr>
+            </a:pPr>
+            <a:r>
+              <a:t>In Step 5c of this afternoon's workshop, clicking 'Send to record' wraps our scikit-learn cancer risk prediction back into a valid FHIR RiskAssessment and Observation resource.</a:t>
+            </a:r>
+          </a:p>
+        </p:txBody>
+      </p:sp>
+      <p:sp>
+        <p:nvSpPr>
+          <p:cNvPr id="8" name="Rounded Rectangle 7"/>
+          <p:cNvSpPr/>
+          <p:nvPr/>
+        </p:nvSpPr>
+        <p:spPr>
+          <a:xfrm>
+            <a:off x="4343400" y="1828800"/>
+            <a:ext cx="3429000" cy="4389120"/>
+          </a:xfrm>
+          <a:prstGeom prst="roundRect">
+            <a:avLst/>
+          </a:prstGeom>
+          <a:solidFill>
+            <a:srgbClr val="FFFFFF"/>
+          </a:solidFill>
+          <a:ln w="15240">
+            <a:solidFill>
+              <a:srgbClr val="D2DCD4"/>
+            </a:solidFill>
+          </a:ln>
+        </p:spPr>
+        <p:style>
+          <a:lnRef idx="1">
+            <a:schemeClr val="accent1"/>
+          </a:lnRef>
+          <a:fillRef idx="3">
+            <a:schemeClr val="accent1"/>
+          </a:fillRef>
+          <a:effectRef idx="2">
+            <a:schemeClr val="accent1"/>
+          </a:effectRef>
+          <a:fontRef idx="minor">
+            <a:schemeClr val="lt1"/>
+          </a:fontRef>
+        </p:style>
+        <p:txBody>
+          <a:bodyPr rtlCol="0" anchor="ctr" lIns="274320" rIns="274320" tIns="274320"/>
+          <a:lstStyle/>
+          <a:p>
+            <a:pPr algn="ctr">
+              <a:defRPr b="1" sz="1300">
+                <a:solidFill>
+                  <a:srgbClr val="94BA33"/>
+                </a:solidFill>
+              </a:defRPr>
+            </a:pPr>
+            <a:r>
+              <a:t>TERMINAL CHECK</a:t>
+            </a:r>
+          </a:p>
+          <a:p>
+            <a:pPr>
+              <a:spcBef>
+                <a:spcPts val="400"/>
+              </a:spcBef>
+              <a:defRPr b="1" sz="1500">
+                <a:solidFill>
+                  <a:srgbClr val="1B3E24"/>
+                </a:solidFill>
+              </a:defRPr>
+            </a:pPr>
+            <a:r>
+              <a:t>Navigate to Repo Root</a:t>
+            </a:r>
+          </a:p>
+          <a:p>
+            <a:pPr>
+              <a:spcBef>
+                <a:spcPts val="1200"/>
+              </a:spcBef>
+              <a:defRPr sz="1050">
+                <a:solidFill>
+                  <a:srgbClr val="142118"/>
+                </a:solidFill>
+                <a:latin typeface="Arial"/>
+              </a:defRPr>
+            </a:pPr>
+            <a:r>
+              <a:t>Open your terminal application and verify your current working directory:</a:t>
+            </a:r>
+            <a:br/>
+            <a:br/>
+            <a:r>
+              <a:t>$ cd fhir-ml-workshop</a:t>
+            </a:r>
+            <a:br/>
+            <a:br/>
+            <a:r>
+              <a:t>Ensure git branch is clean.</a:t>
+            </a:r>
+          </a:p>
+        </p:txBody>
+      </p:sp>
+      <p:sp>
+        <p:nvSpPr>
+          <p:cNvPr id="9" name="Rounded Rectangle 8"/>
+          <p:cNvSpPr/>
+          <p:nvPr/>
+        </p:nvSpPr>
+        <p:spPr>
+          <a:xfrm>
+            <a:off x="7955280" y="1828800"/>
+            <a:ext cx="3429000" cy="4389120"/>
+          </a:xfrm>
+          <a:prstGeom prst="roundRect">
+            <a:avLst/>
+          </a:prstGeom>
+          <a:solidFill>
+            <a:srgbClr val="FFFFFF"/>
+          </a:solidFill>
+          <a:ln w="15240">
+            <a:solidFill>
+              <a:srgbClr val="D2DCD4"/>
+            </a:solidFill>
+          </a:ln>
+        </p:spPr>
+        <p:style>
+          <a:lnRef idx="1">
+            <a:schemeClr val="accent1"/>
+          </a:lnRef>
+          <a:fillRef idx="3">
+            <a:schemeClr val="accent1"/>
+          </a:fillRef>
+          <a:effectRef idx="2">
+            <a:schemeClr val="accent1"/>
+          </a:effectRef>
+          <a:fontRef idx="minor">
+            <a:schemeClr val="lt1"/>
+          </a:fontRef>
+        </p:style>
+        <p:txBody>
+          <a:bodyPr rtlCol="0" anchor="ctr" lIns="274320" rIns="274320" tIns="274320"/>
+          <a:lstStyle/>
+          <a:p>
+            <a:pPr algn="ctr">
+              <a:defRPr b="1" sz="1300">
+                <a:solidFill>
+                  <a:srgbClr val="94BA33"/>
+                </a:solidFill>
+              </a:defRPr>
+            </a:pPr>
+            <a:r>
+              <a:t>SYNC ENVIRONMENT</a:t>
+            </a:r>
+          </a:p>
+          <a:p>
+            <a:pPr>
+              <a:spcBef>
+                <a:spcPts val="400"/>
+              </a:spcBef>
+              <a:defRPr b="1" sz="1500">
+                <a:solidFill>
+                  <a:srgbClr val="1B3E24"/>
+                </a:solidFill>
+              </a:defRPr>
+            </a:pPr>
+            <a:r>
+              <a:t>Verify Libraries Before Lunch</a:t>
+            </a:r>
+          </a:p>
+          <a:p>
+            <a:pPr>
+              <a:spcBef>
+                <a:spcPts val="1200"/>
+              </a:spcBef>
+              <a:defRPr sz="1050">
+                <a:solidFill>
+                  <a:srgbClr val="142118"/>
+                </a:solidFill>
+                <a:latin typeface="Arial"/>
+              </a:defRPr>
+            </a:pPr>
+            <a:r>
+              <a:t>Run the fast package synchronizer from inside the repository:</a:t>
+            </a:r>
+            <a:br/>
+            <a:br/>
+            <a:r>
+              <a:t>$ uv sync</a:t>
+            </a:r>
+            <a:br/>
+            <a:br/>
+            <a:r>
+              <a:t>Verify sklearn:</a:t>
+            </a:r>
+            <a:br/>
+            <a:r>
+              <a:t>$ uv run python -c "import sklearn; print(sklearn.__version__)"</a:t>
             </a:r>
           </a:p>
         </p:txBody>
